--- a/RatDev_OWASP_GRC.pptx
+++ b/RatDev_OWASP_GRC.pptx
@@ -391,7 +391,7 @@
             <a:pPr indent="0" algn="r">
               <a:buNone/>
             </a:pPr>
-            <a:fld id="{9436C5E6-DEB3-4771-BF60-A5456362F7D0}" type="slidenum">
+            <a:fld id="{D1BDE319-C118-4CE8-A043-A7AA835C5FE3}" type="slidenum">
               <a:rPr b="0" lang="en-US" sz="1400" strike="noStrike" u="none">
                 <a:solidFill>
                   <a:srgbClr val="000000"/>
@@ -438,7 +438,7 @@
       </p:grpSpPr>
       <p:sp>
         <p:nvSpPr>
-          <p:cNvPr id="424" name="PlaceHolder 1"/>
+          <p:cNvPr id="425" name="PlaceHolder 1"/>
           <p:cNvSpPr>
             <a:spLocks noGrp="1"/>
           </p:cNvSpPr>
@@ -449,19 +449,19 @@
         <p:spPr>
           <a:xfrm>
             <a:off x="857160" y="694800"/>
-            <a:ext cx="3428280" cy="3427920"/>
-          </a:xfrm>
-          <a:prstGeom prst="rect">
-            <a:avLst/>
-          </a:prstGeom>
-          <a:ln w="0">
-            <a:noFill/>
-          </a:ln>
-        </p:spPr>
-      </p:sp>
-      <p:sp>
-        <p:nvSpPr>
-          <p:cNvPr id="425" name="PlaceHolder 2"/>
+            <a:ext cx="3427920" cy="3427560"/>
+          </a:xfrm>
+          <a:prstGeom prst="rect">
+            <a:avLst/>
+          </a:prstGeom>
+          <a:ln w="0">
+            <a:noFill/>
+          </a:ln>
+        </p:spPr>
+      </p:sp>
+      <p:sp>
+        <p:nvSpPr>
+          <p:cNvPr id="426" name="PlaceHolder 2"/>
           <p:cNvSpPr>
             <a:spLocks noGrp="1"/>
           </p:cNvSpPr>
@@ -472,7 +472,7 @@
         <p:spPr>
           <a:xfrm>
             <a:off x="514080" y="4343040"/>
-            <a:ext cx="4114080" cy="4115160"/>
+            <a:ext cx="4113720" cy="4115520"/>
           </a:xfrm>
           <a:prstGeom prst="rect">
             <a:avLst/>
@@ -543,7 +543,7 @@
       </p:grpSpPr>
       <p:sp>
         <p:nvSpPr>
-          <p:cNvPr id="448" name="PlaceHolder 1"/>
+          <p:cNvPr id="449" name="PlaceHolder 1"/>
           <p:cNvSpPr>
             <a:spLocks noGrp="1"/>
           </p:cNvSpPr>
@@ -554,19 +554,19 @@
         <p:spPr>
           <a:xfrm>
             <a:off x="685800" y="1143000"/>
-            <a:ext cx="5485320" cy="3085200"/>
-          </a:xfrm>
-          <a:prstGeom prst="rect">
-            <a:avLst/>
-          </a:prstGeom>
-          <a:ln w="0">
-            <a:noFill/>
-          </a:ln>
-        </p:spPr>
-      </p:sp>
-      <p:sp>
-        <p:nvSpPr>
-          <p:cNvPr id="449" name="PlaceHolder 2"/>
+            <a:ext cx="5484960" cy="3084840"/>
+          </a:xfrm>
+          <a:prstGeom prst="rect">
+            <a:avLst/>
+          </a:prstGeom>
+          <a:ln w="0">
+            <a:noFill/>
+          </a:ln>
+        </p:spPr>
+      </p:sp>
+      <p:sp>
+        <p:nvSpPr>
+          <p:cNvPr id="450" name="PlaceHolder 2"/>
           <p:cNvSpPr>
             <a:spLocks noGrp="1"/>
           </p:cNvSpPr>
@@ -577,7 +577,7 @@
         <p:spPr>
           <a:xfrm>
             <a:off x="685800" y="4400640"/>
-            <a:ext cx="5485320" cy="3599280"/>
+            <a:ext cx="5484960" cy="3598920"/>
           </a:xfrm>
           <a:prstGeom prst="rect">
             <a:avLst/>
@@ -608,7 +608,7 @@
       </p:sp>
       <p:sp>
         <p:nvSpPr>
-          <p:cNvPr id="450" name="PlaceHolder 3"/>
+          <p:cNvPr id="451" name="PlaceHolder 3"/>
           <p:cNvSpPr>
             <a:spLocks noGrp="1"/>
           </p:cNvSpPr>
@@ -619,7 +619,7 @@
         <p:spPr>
           <a:xfrm>
             <a:off x="3884760" y="8685360"/>
-            <a:ext cx="2970720" cy="457560"/>
+            <a:ext cx="2970360" cy="457200"/>
           </a:xfrm>
           <a:prstGeom prst="rect">
             <a:avLst/>
@@ -663,7 +663,7 @@
                 <a:tab algn="l" pos="0"/>
               </a:tabLst>
             </a:pPr>
-            <a:fld id="{6D734C9A-ACE9-49C4-9F49-ABB4B5759FA8}" type="slidenum">
+            <a:fld id="{B8679485-4608-4F06-B0A4-A4BE7A6DA5E6}" type="slidenum">
               <a:rPr b="0" lang="en-US" sz="1200" strike="noStrike" u="none">
                 <a:solidFill>
                   <a:schemeClr val="dk1"/>
@@ -710,7 +710,7 @@
       </p:grpSpPr>
       <p:sp>
         <p:nvSpPr>
-          <p:cNvPr id="451" name="PlaceHolder 1"/>
+          <p:cNvPr id="452" name="PlaceHolder 1"/>
           <p:cNvSpPr>
             <a:spLocks noGrp="1"/>
           </p:cNvSpPr>
@@ -721,19 +721,19 @@
         <p:spPr>
           <a:xfrm>
             <a:off x="685800" y="1143000"/>
-            <a:ext cx="5485320" cy="3085200"/>
-          </a:xfrm>
-          <a:prstGeom prst="rect">
-            <a:avLst/>
-          </a:prstGeom>
-          <a:ln w="0">
-            <a:noFill/>
-          </a:ln>
-        </p:spPr>
-      </p:sp>
-      <p:sp>
-        <p:nvSpPr>
-          <p:cNvPr id="452" name="PlaceHolder 2"/>
+            <a:ext cx="5484960" cy="3084840"/>
+          </a:xfrm>
+          <a:prstGeom prst="rect">
+            <a:avLst/>
+          </a:prstGeom>
+          <a:ln w="0">
+            <a:noFill/>
+          </a:ln>
+        </p:spPr>
+      </p:sp>
+      <p:sp>
+        <p:nvSpPr>
+          <p:cNvPr id="453" name="PlaceHolder 2"/>
           <p:cNvSpPr>
             <a:spLocks noGrp="1"/>
           </p:cNvSpPr>
@@ -744,7 +744,7 @@
         <p:spPr>
           <a:xfrm>
             <a:off x="685800" y="4400640"/>
-            <a:ext cx="5485320" cy="3599280"/>
+            <a:ext cx="5484960" cy="3598920"/>
           </a:xfrm>
           <a:prstGeom prst="rect">
             <a:avLst/>
@@ -775,7 +775,7 @@
       </p:sp>
       <p:sp>
         <p:nvSpPr>
-          <p:cNvPr id="453" name="PlaceHolder 3"/>
+          <p:cNvPr id="454" name="PlaceHolder 3"/>
           <p:cNvSpPr>
             <a:spLocks noGrp="1"/>
           </p:cNvSpPr>
@@ -786,7 +786,7 @@
         <p:spPr>
           <a:xfrm>
             <a:off x="3884760" y="8685360"/>
-            <a:ext cx="2970720" cy="457560"/>
+            <a:ext cx="2970360" cy="457200"/>
           </a:xfrm>
           <a:prstGeom prst="rect">
             <a:avLst/>
@@ -830,7 +830,7 @@
                 <a:tab algn="l" pos="0"/>
               </a:tabLst>
             </a:pPr>
-            <a:fld id="{ADF484F4-68A4-4F1B-A0C4-AAB335E5CA7A}" type="slidenum">
+            <a:fld id="{B5D0422E-FDDB-42B0-8B0A-5F6CC73C92CD}" type="slidenum">
               <a:rPr b="0" lang="en-US" sz="1200" strike="noStrike" u="none">
                 <a:solidFill>
                   <a:schemeClr val="dk1"/>
@@ -877,7 +877,7 @@
       </p:grpSpPr>
       <p:sp>
         <p:nvSpPr>
-          <p:cNvPr id="454" name="PlaceHolder 1"/>
+          <p:cNvPr id="455" name="PlaceHolder 1"/>
           <p:cNvSpPr>
             <a:spLocks noGrp="1"/>
           </p:cNvSpPr>
@@ -888,19 +888,19 @@
         <p:spPr>
           <a:xfrm>
             <a:off x="685800" y="1143000"/>
-            <a:ext cx="5485320" cy="3085200"/>
-          </a:xfrm>
-          <a:prstGeom prst="rect">
-            <a:avLst/>
-          </a:prstGeom>
-          <a:ln w="0">
-            <a:noFill/>
-          </a:ln>
-        </p:spPr>
-      </p:sp>
-      <p:sp>
-        <p:nvSpPr>
-          <p:cNvPr id="455" name="PlaceHolder 2"/>
+            <a:ext cx="5484960" cy="3084840"/>
+          </a:xfrm>
+          <a:prstGeom prst="rect">
+            <a:avLst/>
+          </a:prstGeom>
+          <a:ln w="0">
+            <a:noFill/>
+          </a:ln>
+        </p:spPr>
+      </p:sp>
+      <p:sp>
+        <p:nvSpPr>
+          <p:cNvPr id="456" name="PlaceHolder 2"/>
           <p:cNvSpPr>
             <a:spLocks noGrp="1"/>
           </p:cNvSpPr>
@@ -911,7 +911,7 @@
         <p:spPr>
           <a:xfrm>
             <a:off x="685800" y="4400640"/>
-            <a:ext cx="5485320" cy="3599280"/>
+            <a:ext cx="5484960" cy="3598920"/>
           </a:xfrm>
           <a:prstGeom prst="rect">
             <a:avLst/>
@@ -942,7 +942,7 @@
       </p:sp>
       <p:sp>
         <p:nvSpPr>
-          <p:cNvPr id="456" name="PlaceHolder 3"/>
+          <p:cNvPr id="457" name="PlaceHolder 3"/>
           <p:cNvSpPr>
             <a:spLocks noGrp="1"/>
           </p:cNvSpPr>
@@ -953,7 +953,7 @@
         <p:spPr>
           <a:xfrm>
             <a:off x="3884760" y="8685360"/>
-            <a:ext cx="2970720" cy="457560"/>
+            <a:ext cx="2970360" cy="457200"/>
           </a:xfrm>
           <a:prstGeom prst="rect">
             <a:avLst/>
@@ -997,7 +997,7 @@
                 <a:tab algn="l" pos="0"/>
               </a:tabLst>
             </a:pPr>
-            <a:fld id="{05B6DC07-F212-4774-BBCC-80D9E69217C6}" type="slidenum">
+            <a:fld id="{80908378-0E20-4C87-8C30-A58649B147A0}" type="slidenum">
               <a:rPr b="0" lang="en-US" sz="1200" strike="noStrike" u="none">
                 <a:solidFill>
                   <a:schemeClr val="dk1"/>
@@ -1044,7 +1044,7 @@
       </p:grpSpPr>
       <p:sp>
         <p:nvSpPr>
-          <p:cNvPr id="457" name="PlaceHolder 1"/>
+          <p:cNvPr id="458" name="PlaceHolder 1"/>
           <p:cNvSpPr>
             <a:spLocks noGrp="1"/>
           </p:cNvSpPr>
@@ -1055,19 +1055,19 @@
         <p:spPr>
           <a:xfrm>
             <a:off x="685800" y="1143000"/>
-            <a:ext cx="5485320" cy="3085200"/>
-          </a:xfrm>
-          <a:prstGeom prst="rect">
-            <a:avLst/>
-          </a:prstGeom>
-          <a:ln w="0">
-            <a:noFill/>
-          </a:ln>
-        </p:spPr>
-      </p:sp>
-      <p:sp>
-        <p:nvSpPr>
-          <p:cNvPr id="458" name="PlaceHolder 2"/>
+            <a:ext cx="5484960" cy="3084840"/>
+          </a:xfrm>
+          <a:prstGeom prst="rect">
+            <a:avLst/>
+          </a:prstGeom>
+          <a:ln w="0">
+            <a:noFill/>
+          </a:ln>
+        </p:spPr>
+      </p:sp>
+      <p:sp>
+        <p:nvSpPr>
+          <p:cNvPr id="459" name="PlaceHolder 2"/>
           <p:cNvSpPr>
             <a:spLocks noGrp="1"/>
           </p:cNvSpPr>
@@ -1078,7 +1078,7 @@
         <p:spPr>
           <a:xfrm>
             <a:off x="685800" y="4400640"/>
-            <a:ext cx="5485320" cy="3599280"/>
+            <a:ext cx="5484960" cy="3598920"/>
           </a:xfrm>
           <a:prstGeom prst="rect">
             <a:avLst/>
@@ -1109,7 +1109,7 @@
       </p:sp>
       <p:sp>
         <p:nvSpPr>
-          <p:cNvPr id="459" name="PlaceHolder 3"/>
+          <p:cNvPr id="460" name="PlaceHolder 3"/>
           <p:cNvSpPr>
             <a:spLocks noGrp="1"/>
           </p:cNvSpPr>
@@ -1120,7 +1120,7 @@
         <p:spPr>
           <a:xfrm>
             <a:off x="3884760" y="8685360"/>
-            <a:ext cx="2970720" cy="457560"/>
+            <a:ext cx="2970360" cy="457200"/>
           </a:xfrm>
           <a:prstGeom prst="rect">
             <a:avLst/>
@@ -1164,7 +1164,7 @@
                 <a:tab algn="l" pos="0"/>
               </a:tabLst>
             </a:pPr>
-            <a:fld id="{1ABC647F-882E-4C42-8A62-7FDCA54EAFC7}" type="slidenum">
+            <a:fld id="{13D8BB07-CA92-4419-AFFE-91AA229D3AB0}" type="slidenum">
               <a:rPr b="0" lang="en-US" sz="1200" strike="noStrike" u="none">
                 <a:solidFill>
                   <a:schemeClr val="dk1"/>
@@ -1211,7 +1211,7 @@
       </p:grpSpPr>
       <p:sp>
         <p:nvSpPr>
-          <p:cNvPr id="460" name="PlaceHolder 1"/>
+          <p:cNvPr id="461" name="PlaceHolder 1"/>
           <p:cNvSpPr>
             <a:spLocks noGrp="1"/>
           </p:cNvSpPr>
@@ -1222,19 +1222,19 @@
         <p:spPr>
           <a:xfrm>
             <a:off x="685800" y="1143000"/>
-            <a:ext cx="5485320" cy="3085200"/>
-          </a:xfrm>
-          <a:prstGeom prst="rect">
-            <a:avLst/>
-          </a:prstGeom>
-          <a:ln w="0">
-            <a:noFill/>
-          </a:ln>
-        </p:spPr>
-      </p:sp>
-      <p:sp>
-        <p:nvSpPr>
-          <p:cNvPr id="461" name="PlaceHolder 2"/>
+            <a:ext cx="5484960" cy="3084840"/>
+          </a:xfrm>
+          <a:prstGeom prst="rect">
+            <a:avLst/>
+          </a:prstGeom>
+          <a:ln w="0">
+            <a:noFill/>
+          </a:ln>
+        </p:spPr>
+      </p:sp>
+      <p:sp>
+        <p:nvSpPr>
+          <p:cNvPr id="462" name="PlaceHolder 2"/>
           <p:cNvSpPr>
             <a:spLocks noGrp="1"/>
           </p:cNvSpPr>
@@ -1245,7 +1245,7 @@
         <p:spPr>
           <a:xfrm>
             <a:off x="685800" y="4400640"/>
-            <a:ext cx="5485320" cy="3599280"/>
+            <a:ext cx="5484960" cy="3598920"/>
           </a:xfrm>
           <a:prstGeom prst="rect">
             <a:avLst/>
@@ -1276,7 +1276,7 @@
       </p:sp>
       <p:sp>
         <p:nvSpPr>
-          <p:cNvPr id="462" name="PlaceHolder 3"/>
+          <p:cNvPr id="463" name="PlaceHolder 3"/>
           <p:cNvSpPr>
             <a:spLocks noGrp="1"/>
           </p:cNvSpPr>
@@ -1287,7 +1287,7 @@
         <p:spPr>
           <a:xfrm>
             <a:off x="3884760" y="8685360"/>
-            <a:ext cx="2970720" cy="457560"/>
+            <a:ext cx="2970360" cy="457200"/>
           </a:xfrm>
           <a:prstGeom prst="rect">
             <a:avLst/>
@@ -1331,7 +1331,7 @@
                 <a:tab algn="l" pos="0"/>
               </a:tabLst>
             </a:pPr>
-            <a:fld id="{F1619291-C67F-4948-83AC-2B5DA91EC02A}" type="slidenum">
+            <a:fld id="{5FA3675C-D174-4E79-B53F-DA1C7A9EADEB}" type="slidenum">
               <a:rPr b="0" lang="en-US" sz="1200" strike="noStrike" u="none">
                 <a:solidFill>
                   <a:schemeClr val="dk1"/>
@@ -1378,7 +1378,7 @@
       </p:grpSpPr>
       <p:sp>
         <p:nvSpPr>
-          <p:cNvPr id="463" name="PlaceHolder 1"/>
+          <p:cNvPr id="464" name="PlaceHolder 1"/>
           <p:cNvSpPr>
             <a:spLocks noGrp="1"/>
           </p:cNvSpPr>
@@ -1389,19 +1389,19 @@
         <p:spPr>
           <a:xfrm>
             <a:off x="685800" y="1143000"/>
-            <a:ext cx="5485320" cy="3085200"/>
-          </a:xfrm>
-          <a:prstGeom prst="rect">
-            <a:avLst/>
-          </a:prstGeom>
-          <a:ln w="0">
-            <a:noFill/>
-          </a:ln>
-        </p:spPr>
-      </p:sp>
-      <p:sp>
-        <p:nvSpPr>
-          <p:cNvPr id="464" name="PlaceHolder 2"/>
+            <a:ext cx="5484960" cy="3084840"/>
+          </a:xfrm>
+          <a:prstGeom prst="rect">
+            <a:avLst/>
+          </a:prstGeom>
+          <a:ln w="0">
+            <a:noFill/>
+          </a:ln>
+        </p:spPr>
+      </p:sp>
+      <p:sp>
+        <p:nvSpPr>
+          <p:cNvPr id="465" name="PlaceHolder 2"/>
           <p:cNvSpPr>
             <a:spLocks noGrp="1"/>
           </p:cNvSpPr>
@@ -1412,7 +1412,7 @@
         <p:spPr>
           <a:xfrm>
             <a:off x="685800" y="4400640"/>
-            <a:ext cx="5485320" cy="3599280"/>
+            <a:ext cx="5484960" cy="3598920"/>
           </a:xfrm>
           <a:prstGeom prst="rect">
             <a:avLst/>
@@ -1443,7 +1443,7 @@
       </p:sp>
       <p:sp>
         <p:nvSpPr>
-          <p:cNvPr id="465" name="PlaceHolder 3"/>
+          <p:cNvPr id="466" name="PlaceHolder 3"/>
           <p:cNvSpPr>
             <a:spLocks noGrp="1"/>
           </p:cNvSpPr>
@@ -1454,7 +1454,7 @@
         <p:spPr>
           <a:xfrm>
             <a:off x="3884760" y="8685360"/>
-            <a:ext cx="2970720" cy="457560"/>
+            <a:ext cx="2970360" cy="457200"/>
           </a:xfrm>
           <a:prstGeom prst="rect">
             <a:avLst/>
@@ -1498,7 +1498,7 @@
                 <a:tab algn="l" pos="0"/>
               </a:tabLst>
             </a:pPr>
-            <a:fld id="{F43422B1-E6C1-4F91-B51E-B6FF3A121132}" type="slidenum">
+            <a:fld id="{34E59ED7-1805-485C-91DF-3334807DA560}" type="slidenum">
               <a:rPr b="0" lang="en-US" sz="1200" strike="noStrike" u="none">
                 <a:solidFill>
                   <a:schemeClr val="dk1"/>
@@ -1545,7 +1545,7 @@
       </p:grpSpPr>
       <p:sp>
         <p:nvSpPr>
-          <p:cNvPr id="466" name="PlaceHolder 1"/>
+          <p:cNvPr id="467" name="PlaceHolder 1"/>
           <p:cNvSpPr>
             <a:spLocks noGrp="1"/>
           </p:cNvSpPr>
@@ -1556,19 +1556,19 @@
         <p:spPr>
           <a:xfrm>
             <a:off x="685800" y="1143000"/>
-            <a:ext cx="5485320" cy="3085200"/>
-          </a:xfrm>
-          <a:prstGeom prst="rect">
-            <a:avLst/>
-          </a:prstGeom>
-          <a:ln w="0">
-            <a:noFill/>
-          </a:ln>
-        </p:spPr>
-      </p:sp>
-      <p:sp>
-        <p:nvSpPr>
-          <p:cNvPr id="467" name="PlaceHolder 2"/>
+            <a:ext cx="5484960" cy="3084840"/>
+          </a:xfrm>
+          <a:prstGeom prst="rect">
+            <a:avLst/>
+          </a:prstGeom>
+          <a:ln w="0">
+            <a:noFill/>
+          </a:ln>
+        </p:spPr>
+      </p:sp>
+      <p:sp>
+        <p:nvSpPr>
+          <p:cNvPr id="468" name="PlaceHolder 2"/>
           <p:cNvSpPr>
             <a:spLocks noGrp="1"/>
           </p:cNvSpPr>
@@ -1579,7 +1579,7 @@
         <p:spPr>
           <a:xfrm>
             <a:off x="685800" y="4400640"/>
-            <a:ext cx="5485320" cy="3599280"/>
+            <a:ext cx="5484960" cy="3598920"/>
           </a:xfrm>
           <a:prstGeom prst="rect">
             <a:avLst/>
@@ -1610,7 +1610,7 @@
       </p:sp>
       <p:sp>
         <p:nvSpPr>
-          <p:cNvPr id="468" name="PlaceHolder 3"/>
+          <p:cNvPr id="469" name="PlaceHolder 3"/>
           <p:cNvSpPr>
             <a:spLocks noGrp="1"/>
           </p:cNvSpPr>
@@ -1621,7 +1621,7 @@
         <p:spPr>
           <a:xfrm>
             <a:off x="3884760" y="8685360"/>
-            <a:ext cx="2970720" cy="457560"/>
+            <a:ext cx="2970360" cy="457200"/>
           </a:xfrm>
           <a:prstGeom prst="rect">
             <a:avLst/>
@@ -1665,7 +1665,7 @@
                 <a:tab algn="l" pos="0"/>
               </a:tabLst>
             </a:pPr>
-            <a:fld id="{4604CA18-EF46-417F-9804-083BBCF4BFF6}" type="slidenum">
+            <a:fld id="{55143D4B-2357-45DB-A8D9-32E1397EF3EB}" type="slidenum">
               <a:rPr b="0" lang="en-US" sz="1200" strike="noStrike" u="none">
                 <a:solidFill>
                   <a:schemeClr val="dk1"/>
@@ -1712,7 +1712,7 @@
       </p:grpSpPr>
       <p:sp>
         <p:nvSpPr>
-          <p:cNvPr id="469" name="PlaceHolder 1"/>
+          <p:cNvPr id="470" name="PlaceHolder 1"/>
           <p:cNvSpPr>
             <a:spLocks noGrp="1"/>
           </p:cNvSpPr>
@@ -1723,19 +1723,19 @@
         <p:spPr>
           <a:xfrm>
             <a:off x="685800" y="1143000"/>
-            <a:ext cx="5485320" cy="3085200"/>
-          </a:xfrm>
-          <a:prstGeom prst="rect">
-            <a:avLst/>
-          </a:prstGeom>
-          <a:ln w="0">
-            <a:noFill/>
-          </a:ln>
-        </p:spPr>
-      </p:sp>
-      <p:sp>
-        <p:nvSpPr>
-          <p:cNvPr id="470" name="PlaceHolder 2"/>
+            <a:ext cx="5484960" cy="3084840"/>
+          </a:xfrm>
+          <a:prstGeom prst="rect">
+            <a:avLst/>
+          </a:prstGeom>
+          <a:ln w="0">
+            <a:noFill/>
+          </a:ln>
+        </p:spPr>
+      </p:sp>
+      <p:sp>
+        <p:nvSpPr>
+          <p:cNvPr id="471" name="PlaceHolder 2"/>
           <p:cNvSpPr>
             <a:spLocks noGrp="1"/>
           </p:cNvSpPr>
@@ -1746,7 +1746,7 @@
         <p:spPr>
           <a:xfrm>
             <a:off x="685800" y="4400640"/>
-            <a:ext cx="5485320" cy="3599280"/>
+            <a:ext cx="5484960" cy="3598920"/>
           </a:xfrm>
           <a:prstGeom prst="rect">
             <a:avLst/>
@@ -1777,7 +1777,7 @@
       </p:sp>
       <p:sp>
         <p:nvSpPr>
-          <p:cNvPr id="471" name="PlaceHolder 3"/>
+          <p:cNvPr id="472" name="PlaceHolder 3"/>
           <p:cNvSpPr>
             <a:spLocks noGrp="1"/>
           </p:cNvSpPr>
@@ -1788,7 +1788,7 @@
         <p:spPr>
           <a:xfrm>
             <a:off x="3884760" y="8685360"/>
-            <a:ext cx="2970720" cy="457560"/>
+            <a:ext cx="2970360" cy="457200"/>
           </a:xfrm>
           <a:prstGeom prst="rect">
             <a:avLst/>
@@ -1832,7 +1832,7 @@
                 <a:tab algn="l" pos="0"/>
               </a:tabLst>
             </a:pPr>
-            <a:fld id="{B3DB1D06-1B05-480C-AB7B-157B9E727C71}" type="slidenum">
+            <a:fld id="{4EEA7D35-A77E-4262-8290-5248DFAD0A53}" type="slidenum">
               <a:rPr b="0" lang="en-US" sz="1200" strike="noStrike" u="none">
                 <a:solidFill>
                   <a:schemeClr val="dk1"/>
@@ -1879,7 +1879,7 @@
       </p:grpSpPr>
       <p:sp>
         <p:nvSpPr>
-          <p:cNvPr id="472" name="PlaceHolder 1"/>
+          <p:cNvPr id="473" name="PlaceHolder 1"/>
           <p:cNvSpPr>
             <a:spLocks noGrp="1"/>
           </p:cNvSpPr>
@@ -1890,19 +1890,19 @@
         <p:spPr>
           <a:xfrm>
             <a:off x="685800" y="1143000"/>
-            <a:ext cx="5485320" cy="3085200"/>
-          </a:xfrm>
-          <a:prstGeom prst="rect">
-            <a:avLst/>
-          </a:prstGeom>
-          <a:ln w="0">
-            <a:noFill/>
-          </a:ln>
-        </p:spPr>
-      </p:sp>
-      <p:sp>
-        <p:nvSpPr>
-          <p:cNvPr id="473" name="PlaceHolder 2"/>
+            <a:ext cx="5484960" cy="3084840"/>
+          </a:xfrm>
+          <a:prstGeom prst="rect">
+            <a:avLst/>
+          </a:prstGeom>
+          <a:ln w="0">
+            <a:noFill/>
+          </a:ln>
+        </p:spPr>
+      </p:sp>
+      <p:sp>
+        <p:nvSpPr>
+          <p:cNvPr id="474" name="PlaceHolder 2"/>
           <p:cNvSpPr>
             <a:spLocks noGrp="1"/>
           </p:cNvSpPr>
@@ -1913,7 +1913,7 @@
         <p:spPr>
           <a:xfrm>
             <a:off x="685800" y="4400640"/>
-            <a:ext cx="5485320" cy="3599280"/>
+            <a:ext cx="5484960" cy="3598920"/>
           </a:xfrm>
           <a:prstGeom prst="rect">
             <a:avLst/>
@@ -1944,7 +1944,7 @@
       </p:sp>
       <p:sp>
         <p:nvSpPr>
-          <p:cNvPr id="474" name="PlaceHolder 3"/>
+          <p:cNvPr id="475" name="PlaceHolder 3"/>
           <p:cNvSpPr>
             <a:spLocks noGrp="1"/>
           </p:cNvSpPr>
@@ -1955,7 +1955,7 @@
         <p:spPr>
           <a:xfrm>
             <a:off x="3884760" y="8685360"/>
-            <a:ext cx="2970720" cy="457560"/>
+            <a:ext cx="2970360" cy="457200"/>
           </a:xfrm>
           <a:prstGeom prst="rect">
             <a:avLst/>
@@ -1999,7 +1999,7 @@
                 <a:tab algn="l" pos="0"/>
               </a:tabLst>
             </a:pPr>
-            <a:fld id="{AD58534F-6CE6-4373-BEB5-B674C00F63BC}" type="slidenum">
+            <a:fld id="{E0EBC595-70B8-4687-9C4A-71F05541C0F8}" type="slidenum">
               <a:rPr b="0" lang="en-US" sz="1200" strike="noStrike" u="none">
                 <a:solidFill>
                   <a:schemeClr val="dk1"/>
@@ -2046,7 +2046,7 @@
       </p:grpSpPr>
       <p:sp>
         <p:nvSpPr>
-          <p:cNvPr id="426" name="PlaceHolder 1"/>
+          <p:cNvPr id="427" name="PlaceHolder 1"/>
           <p:cNvSpPr>
             <a:spLocks noGrp="1"/>
           </p:cNvSpPr>
@@ -2057,19 +2057,19 @@
         <p:spPr>
           <a:xfrm>
             <a:off x="857160" y="694800"/>
-            <a:ext cx="3428280" cy="3427920"/>
-          </a:xfrm>
-          <a:prstGeom prst="rect">
-            <a:avLst/>
-          </a:prstGeom>
-          <a:ln w="0">
-            <a:noFill/>
-          </a:ln>
-        </p:spPr>
-      </p:sp>
-      <p:sp>
-        <p:nvSpPr>
-          <p:cNvPr id="427" name="PlaceHolder 2"/>
+            <a:ext cx="3427920" cy="3427560"/>
+          </a:xfrm>
+          <a:prstGeom prst="rect">
+            <a:avLst/>
+          </a:prstGeom>
+          <a:ln w="0">
+            <a:noFill/>
+          </a:ln>
+        </p:spPr>
+      </p:sp>
+      <p:sp>
+        <p:nvSpPr>
+          <p:cNvPr id="428" name="PlaceHolder 2"/>
           <p:cNvSpPr>
             <a:spLocks noGrp="1"/>
           </p:cNvSpPr>
@@ -2080,7 +2080,7 @@
         <p:spPr>
           <a:xfrm>
             <a:off x="514080" y="4343400"/>
-            <a:ext cx="4114080" cy="4574520"/>
+            <a:ext cx="4113720" cy="4574880"/>
           </a:xfrm>
           <a:prstGeom prst="rect">
             <a:avLst/>
@@ -2151,7 +2151,7 @@
       </p:grpSpPr>
       <p:sp>
         <p:nvSpPr>
-          <p:cNvPr id="475" name="PlaceHolder 1"/>
+          <p:cNvPr id="476" name="PlaceHolder 1"/>
           <p:cNvSpPr>
             <a:spLocks noGrp="1"/>
           </p:cNvSpPr>
@@ -2162,19 +2162,19 @@
         <p:spPr>
           <a:xfrm>
             <a:off x="685800" y="1143000"/>
-            <a:ext cx="5485320" cy="3085200"/>
-          </a:xfrm>
-          <a:prstGeom prst="rect">
-            <a:avLst/>
-          </a:prstGeom>
-          <a:ln w="0">
-            <a:noFill/>
-          </a:ln>
-        </p:spPr>
-      </p:sp>
-      <p:sp>
-        <p:nvSpPr>
-          <p:cNvPr id="476" name="PlaceHolder 2"/>
+            <a:ext cx="5484960" cy="3084840"/>
+          </a:xfrm>
+          <a:prstGeom prst="rect">
+            <a:avLst/>
+          </a:prstGeom>
+          <a:ln w="0">
+            <a:noFill/>
+          </a:ln>
+        </p:spPr>
+      </p:sp>
+      <p:sp>
+        <p:nvSpPr>
+          <p:cNvPr id="477" name="PlaceHolder 2"/>
           <p:cNvSpPr>
             <a:spLocks noGrp="1"/>
           </p:cNvSpPr>
@@ -2185,7 +2185,7 @@
         <p:spPr>
           <a:xfrm>
             <a:off x="685800" y="4400640"/>
-            <a:ext cx="5485320" cy="3599280"/>
+            <a:ext cx="5484960" cy="3598920"/>
           </a:xfrm>
           <a:prstGeom prst="rect">
             <a:avLst/>
@@ -2216,7 +2216,7 @@
       </p:sp>
       <p:sp>
         <p:nvSpPr>
-          <p:cNvPr id="477" name="PlaceHolder 3"/>
+          <p:cNvPr id="478" name="PlaceHolder 3"/>
           <p:cNvSpPr>
             <a:spLocks noGrp="1"/>
           </p:cNvSpPr>
@@ -2227,7 +2227,7 @@
         <p:spPr>
           <a:xfrm>
             <a:off x="3884760" y="8685360"/>
-            <a:ext cx="2970720" cy="457560"/>
+            <a:ext cx="2970360" cy="457200"/>
           </a:xfrm>
           <a:prstGeom prst="rect">
             <a:avLst/>
@@ -2271,7 +2271,7 @@
                 <a:tab algn="l" pos="0"/>
               </a:tabLst>
             </a:pPr>
-            <a:fld id="{61543D35-44FF-4953-8104-563421CD3E58}" type="slidenum">
+            <a:fld id="{4D6269A9-D485-46A9-8EDC-752246D632B1}" type="slidenum">
               <a:rPr b="0" lang="en-US" sz="1200" strike="noStrike" u="none">
                 <a:solidFill>
                   <a:schemeClr val="dk1"/>
@@ -2318,7 +2318,7 @@
       </p:grpSpPr>
       <p:sp>
         <p:nvSpPr>
-          <p:cNvPr id="478" name="PlaceHolder 1"/>
+          <p:cNvPr id="479" name="PlaceHolder 1"/>
           <p:cNvSpPr>
             <a:spLocks noGrp="1"/>
           </p:cNvSpPr>
@@ -2329,19 +2329,19 @@
         <p:spPr>
           <a:xfrm>
             <a:off x="685800" y="1143000"/>
-            <a:ext cx="5485320" cy="3085200"/>
-          </a:xfrm>
-          <a:prstGeom prst="rect">
-            <a:avLst/>
-          </a:prstGeom>
-          <a:ln w="0">
-            <a:noFill/>
-          </a:ln>
-        </p:spPr>
-      </p:sp>
-      <p:sp>
-        <p:nvSpPr>
-          <p:cNvPr id="479" name="PlaceHolder 2"/>
+            <a:ext cx="5484960" cy="3084840"/>
+          </a:xfrm>
+          <a:prstGeom prst="rect">
+            <a:avLst/>
+          </a:prstGeom>
+          <a:ln w="0">
+            <a:noFill/>
+          </a:ln>
+        </p:spPr>
+      </p:sp>
+      <p:sp>
+        <p:nvSpPr>
+          <p:cNvPr id="480" name="PlaceHolder 2"/>
           <p:cNvSpPr>
             <a:spLocks noGrp="1"/>
           </p:cNvSpPr>
@@ -2352,7 +2352,7 @@
         <p:spPr>
           <a:xfrm>
             <a:off x="685800" y="4400640"/>
-            <a:ext cx="5485320" cy="3599280"/>
+            <a:ext cx="5484960" cy="3598920"/>
           </a:xfrm>
           <a:prstGeom prst="rect">
             <a:avLst/>
@@ -2383,7 +2383,7 @@
       </p:sp>
       <p:sp>
         <p:nvSpPr>
-          <p:cNvPr id="480" name="PlaceHolder 3"/>
+          <p:cNvPr id="481" name="PlaceHolder 3"/>
           <p:cNvSpPr>
             <a:spLocks noGrp="1"/>
           </p:cNvSpPr>
@@ -2394,7 +2394,7 @@
         <p:spPr>
           <a:xfrm>
             <a:off x="3884760" y="8685360"/>
-            <a:ext cx="2970720" cy="457560"/>
+            <a:ext cx="2970360" cy="457200"/>
           </a:xfrm>
           <a:prstGeom prst="rect">
             <a:avLst/>
@@ -2438,7 +2438,7 @@
                 <a:tab algn="l" pos="0"/>
               </a:tabLst>
             </a:pPr>
-            <a:fld id="{46DC709B-FD16-4A76-ABA6-87E04187B506}" type="slidenum">
+            <a:fld id="{B1E1DC7E-5816-4942-9135-B68F7D18F879}" type="slidenum">
               <a:rPr b="0" lang="en-US" sz="1200" strike="noStrike" u="none">
                 <a:solidFill>
                   <a:schemeClr val="dk1"/>
@@ -2485,7 +2485,7 @@
       </p:grpSpPr>
       <p:sp>
         <p:nvSpPr>
-          <p:cNvPr id="481" name="PlaceHolder 1"/>
+          <p:cNvPr id="482" name="PlaceHolder 1"/>
           <p:cNvSpPr>
             <a:spLocks noGrp="1"/>
           </p:cNvSpPr>
@@ -2496,19 +2496,19 @@
         <p:spPr>
           <a:xfrm>
             <a:off x="685800" y="1143000"/>
-            <a:ext cx="5485320" cy="3085200"/>
-          </a:xfrm>
-          <a:prstGeom prst="rect">
-            <a:avLst/>
-          </a:prstGeom>
-          <a:ln w="0">
-            <a:noFill/>
-          </a:ln>
-        </p:spPr>
-      </p:sp>
-      <p:sp>
-        <p:nvSpPr>
-          <p:cNvPr id="482" name="PlaceHolder 2"/>
+            <a:ext cx="5484960" cy="3084840"/>
+          </a:xfrm>
+          <a:prstGeom prst="rect">
+            <a:avLst/>
+          </a:prstGeom>
+          <a:ln w="0">
+            <a:noFill/>
+          </a:ln>
+        </p:spPr>
+      </p:sp>
+      <p:sp>
+        <p:nvSpPr>
+          <p:cNvPr id="483" name="PlaceHolder 2"/>
           <p:cNvSpPr>
             <a:spLocks noGrp="1"/>
           </p:cNvSpPr>
@@ -2519,7 +2519,7 @@
         <p:spPr>
           <a:xfrm>
             <a:off x="685800" y="4400640"/>
-            <a:ext cx="5485320" cy="3599280"/>
+            <a:ext cx="5484960" cy="3598920"/>
           </a:xfrm>
           <a:prstGeom prst="rect">
             <a:avLst/>
@@ -2550,7 +2550,7 @@
       </p:sp>
       <p:sp>
         <p:nvSpPr>
-          <p:cNvPr id="483" name="PlaceHolder 3"/>
+          <p:cNvPr id="484" name="PlaceHolder 3"/>
           <p:cNvSpPr>
             <a:spLocks noGrp="1"/>
           </p:cNvSpPr>
@@ -2561,7 +2561,7 @@
         <p:spPr>
           <a:xfrm>
             <a:off x="3884760" y="8685360"/>
-            <a:ext cx="2970720" cy="457560"/>
+            <a:ext cx="2970360" cy="457200"/>
           </a:xfrm>
           <a:prstGeom prst="rect">
             <a:avLst/>
@@ -2605,7 +2605,7 @@
                 <a:tab algn="l" pos="0"/>
               </a:tabLst>
             </a:pPr>
-            <a:fld id="{70F09E9E-0181-4B54-BBA7-648CE8EA0553}" type="slidenum">
+            <a:fld id="{A4C337C2-54E9-4E33-B3E3-6177965AA5E2}" type="slidenum">
               <a:rPr b="0" lang="en-US" sz="1200" strike="noStrike" u="none">
                 <a:solidFill>
                   <a:schemeClr val="dk1"/>
@@ -2652,7 +2652,7 @@
       </p:grpSpPr>
       <p:sp>
         <p:nvSpPr>
-          <p:cNvPr id="484" name="PlaceHolder 1"/>
+          <p:cNvPr id="485" name="PlaceHolder 1"/>
           <p:cNvSpPr>
             <a:spLocks noGrp="1"/>
           </p:cNvSpPr>
@@ -2663,19 +2663,19 @@
         <p:spPr>
           <a:xfrm>
             <a:off x="685800" y="1143000"/>
-            <a:ext cx="5485320" cy="3085200"/>
-          </a:xfrm>
-          <a:prstGeom prst="rect">
-            <a:avLst/>
-          </a:prstGeom>
-          <a:ln w="0">
-            <a:noFill/>
-          </a:ln>
-        </p:spPr>
-      </p:sp>
-      <p:sp>
-        <p:nvSpPr>
-          <p:cNvPr id="485" name="PlaceHolder 2"/>
+            <a:ext cx="5484960" cy="3084840"/>
+          </a:xfrm>
+          <a:prstGeom prst="rect">
+            <a:avLst/>
+          </a:prstGeom>
+          <a:ln w="0">
+            <a:noFill/>
+          </a:ln>
+        </p:spPr>
+      </p:sp>
+      <p:sp>
+        <p:nvSpPr>
+          <p:cNvPr id="486" name="PlaceHolder 2"/>
           <p:cNvSpPr>
             <a:spLocks noGrp="1"/>
           </p:cNvSpPr>
@@ -2686,7 +2686,7 @@
         <p:spPr>
           <a:xfrm>
             <a:off x="685800" y="4400640"/>
-            <a:ext cx="5485320" cy="3599280"/>
+            <a:ext cx="5484960" cy="3598920"/>
           </a:xfrm>
           <a:prstGeom prst="rect">
             <a:avLst/>
@@ -2717,7 +2717,7 @@
       </p:sp>
       <p:sp>
         <p:nvSpPr>
-          <p:cNvPr id="486" name="PlaceHolder 3"/>
+          <p:cNvPr id="487" name="PlaceHolder 3"/>
           <p:cNvSpPr>
             <a:spLocks noGrp="1"/>
           </p:cNvSpPr>
@@ -2728,7 +2728,7 @@
         <p:spPr>
           <a:xfrm>
             <a:off x="3884760" y="8685360"/>
-            <a:ext cx="2970720" cy="457560"/>
+            <a:ext cx="2970360" cy="457200"/>
           </a:xfrm>
           <a:prstGeom prst="rect">
             <a:avLst/>
@@ -2772,7 +2772,7 @@
                 <a:tab algn="l" pos="0"/>
               </a:tabLst>
             </a:pPr>
-            <a:fld id="{A40DA14B-0D11-42DD-B77B-48FE713346C2}" type="slidenum">
+            <a:fld id="{05992F9C-A127-4D64-92E4-25194E68056D}" type="slidenum">
               <a:rPr b="0" lang="en-US" sz="1200" strike="noStrike" u="none">
                 <a:solidFill>
                   <a:schemeClr val="dk1"/>
@@ -2819,7 +2819,7 @@
       </p:grpSpPr>
       <p:sp>
         <p:nvSpPr>
-          <p:cNvPr id="487" name="PlaceHolder 1"/>
+          <p:cNvPr id="488" name="PlaceHolder 1"/>
           <p:cNvSpPr>
             <a:spLocks noGrp="1"/>
           </p:cNvSpPr>
@@ -2830,19 +2830,19 @@
         <p:spPr>
           <a:xfrm>
             <a:off x="685800" y="1143000"/>
-            <a:ext cx="5485320" cy="3085200"/>
-          </a:xfrm>
-          <a:prstGeom prst="rect">
-            <a:avLst/>
-          </a:prstGeom>
-          <a:ln w="0">
-            <a:noFill/>
-          </a:ln>
-        </p:spPr>
-      </p:sp>
-      <p:sp>
-        <p:nvSpPr>
-          <p:cNvPr id="488" name="PlaceHolder 2"/>
+            <a:ext cx="5484960" cy="3084840"/>
+          </a:xfrm>
+          <a:prstGeom prst="rect">
+            <a:avLst/>
+          </a:prstGeom>
+          <a:ln w="0">
+            <a:noFill/>
+          </a:ln>
+        </p:spPr>
+      </p:sp>
+      <p:sp>
+        <p:nvSpPr>
+          <p:cNvPr id="489" name="PlaceHolder 2"/>
           <p:cNvSpPr>
             <a:spLocks noGrp="1"/>
           </p:cNvSpPr>
@@ -2853,7 +2853,7 @@
         <p:spPr>
           <a:xfrm>
             <a:off x="685800" y="4400640"/>
-            <a:ext cx="5485320" cy="3599280"/>
+            <a:ext cx="5484960" cy="3598920"/>
           </a:xfrm>
           <a:prstGeom prst="rect">
             <a:avLst/>
@@ -2884,7 +2884,7 @@
       </p:sp>
       <p:sp>
         <p:nvSpPr>
-          <p:cNvPr id="489" name="PlaceHolder 3"/>
+          <p:cNvPr id="490" name="PlaceHolder 3"/>
           <p:cNvSpPr>
             <a:spLocks noGrp="1"/>
           </p:cNvSpPr>
@@ -2895,7 +2895,7 @@
         <p:spPr>
           <a:xfrm>
             <a:off x="3884760" y="8685360"/>
-            <a:ext cx="2970720" cy="457560"/>
+            <a:ext cx="2970360" cy="457200"/>
           </a:xfrm>
           <a:prstGeom prst="rect">
             <a:avLst/>
@@ -2939,7 +2939,7 @@
                 <a:tab algn="l" pos="0"/>
               </a:tabLst>
             </a:pPr>
-            <a:fld id="{BA05B991-DA7D-49DB-A67F-7746EBB56F60}" type="slidenum">
+            <a:fld id="{549B045D-E62A-47D1-BF4B-48EE058D1B38}" type="slidenum">
               <a:rPr b="0" lang="en-US" sz="1200" strike="noStrike" u="none">
                 <a:solidFill>
                   <a:schemeClr val="dk1"/>
@@ -2986,7 +2986,7 @@
       </p:grpSpPr>
       <p:sp>
         <p:nvSpPr>
-          <p:cNvPr id="490" name="PlaceHolder 1"/>
+          <p:cNvPr id="491" name="PlaceHolder 1"/>
           <p:cNvSpPr>
             <a:spLocks noGrp="1"/>
           </p:cNvSpPr>
@@ -2997,19 +2997,19 @@
         <p:spPr>
           <a:xfrm>
             <a:off x="685800" y="1143000"/>
-            <a:ext cx="5485320" cy="3085200"/>
-          </a:xfrm>
-          <a:prstGeom prst="rect">
-            <a:avLst/>
-          </a:prstGeom>
-          <a:ln w="0">
-            <a:noFill/>
-          </a:ln>
-        </p:spPr>
-      </p:sp>
-      <p:sp>
-        <p:nvSpPr>
-          <p:cNvPr id="491" name="PlaceHolder 2"/>
+            <a:ext cx="5484960" cy="3084840"/>
+          </a:xfrm>
+          <a:prstGeom prst="rect">
+            <a:avLst/>
+          </a:prstGeom>
+          <a:ln w="0">
+            <a:noFill/>
+          </a:ln>
+        </p:spPr>
+      </p:sp>
+      <p:sp>
+        <p:nvSpPr>
+          <p:cNvPr id="492" name="PlaceHolder 2"/>
           <p:cNvSpPr>
             <a:spLocks noGrp="1"/>
           </p:cNvSpPr>
@@ -3020,7 +3020,7 @@
         <p:spPr>
           <a:xfrm>
             <a:off x="685800" y="4400640"/>
-            <a:ext cx="5485320" cy="3599280"/>
+            <a:ext cx="5484960" cy="3598920"/>
           </a:xfrm>
           <a:prstGeom prst="rect">
             <a:avLst/>
@@ -3051,7 +3051,7 @@
       </p:sp>
       <p:sp>
         <p:nvSpPr>
-          <p:cNvPr id="492" name="PlaceHolder 3"/>
+          <p:cNvPr id="493" name="PlaceHolder 3"/>
           <p:cNvSpPr>
             <a:spLocks noGrp="1"/>
           </p:cNvSpPr>
@@ -3062,7 +3062,7 @@
         <p:spPr>
           <a:xfrm>
             <a:off x="3884760" y="8685360"/>
-            <a:ext cx="2970720" cy="457560"/>
+            <a:ext cx="2970360" cy="457200"/>
           </a:xfrm>
           <a:prstGeom prst="rect">
             <a:avLst/>
@@ -3106,7 +3106,7 @@
                 <a:tab algn="l" pos="0"/>
               </a:tabLst>
             </a:pPr>
-            <a:fld id="{A55EB810-AA5C-46E8-8BAE-E29D40BF6DEB}" type="slidenum">
+            <a:fld id="{33E75364-04AB-489D-9CF8-0346F7D88921}" type="slidenum">
               <a:rPr b="0" lang="en-US" sz="1200" strike="noStrike" u="none">
                 <a:solidFill>
                   <a:schemeClr val="dk1"/>
@@ -3153,7 +3153,7 @@
       </p:grpSpPr>
       <p:sp>
         <p:nvSpPr>
-          <p:cNvPr id="428" name="PlaceHolder 1"/>
+          <p:cNvPr id="429" name="PlaceHolder 1"/>
           <p:cNvSpPr>
             <a:spLocks noGrp="1"/>
           </p:cNvSpPr>
@@ -3164,19 +3164,19 @@
         <p:spPr>
           <a:xfrm>
             <a:off x="857160" y="694800"/>
-            <a:ext cx="3428280" cy="3427920"/>
-          </a:xfrm>
-          <a:prstGeom prst="rect">
-            <a:avLst/>
-          </a:prstGeom>
-          <a:ln w="0">
-            <a:noFill/>
-          </a:ln>
-        </p:spPr>
-      </p:sp>
-      <p:sp>
-        <p:nvSpPr>
-          <p:cNvPr id="429" name="PlaceHolder 2"/>
+            <a:ext cx="3427920" cy="3427560"/>
+          </a:xfrm>
+          <a:prstGeom prst="rect">
+            <a:avLst/>
+          </a:prstGeom>
+          <a:ln w="0">
+            <a:noFill/>
+          </a:ln>
+        </p:spPr>
+      </p:sp>
+      <p:sp>
+        <p:nvSpPr>
+          <p:cNvPr id="430" name="PlaceHolder 2"/>
           <p:cNvSpPr>
             <a:spLocks noGrp="1"/>
           </p:cNvSpPr>
@@ -3187,7 +3187,7 @@
         <p:spPr>
           <a:xfrm>
             <a:off x="514080" y="4343400"/>
-            <a:ext cx="4114080" cy="4574520"/>
+            <a:ext cx="4113720" cy="4574880"/>
           </a:xfrm>
           <a:prstGeom prst="rect">
             <a:avLst/>
@@ -3258,7 +3258,7 @@
       </p:grpSpPr>
       <p:sp>
         <p:nvSpPr>
-          <p:cNvPr id="430" name="PlaceHolder 1"/>
+          <p:cNvPr id="431" name="PlaceHolder 1"/>
           <p:cNvSpPr>
             <a:spLocks noGrp="1"/>
           </p:cNvSpPr>
@@ -3269,19 +3269,19 @@
         <p:spPr>
           <a:xfrm>
             <a:off x="685800" y="1143000"/>
-            <a:ext cx="5485320" cy="3085200"/>
-          </a:xfrm>
-          <a:prstGeom prst="rect">
-            <a:avLst/>
-          </a:prstGeom>
-          <a:ln w="0">
-            <a:noFill/>
-          </a:ln>
-        </p:spPr>
-      </p:sp>
-      <p:sp>
-        <p:nvSpPr>
-          <p:cNvPr id="431" name="PlaceHolder 2"/>
+            <a:ext cx="5484960" cy="3084840"/>
+          </a:xfrm>
+          <a:prstGeom prst="rect">
+            <a:avLst/>
+          </a:prstGeom>
+          <a:ln w="0">
+            <a:noFill/>
+          </a:ln>
+        </p:spPr>
+      </p:sp>
+      <p:sp>
+        <p:nvSpPr>
+          <p:cNvPr id="432" name="PlaceHolder 2"/>
           <p:cNvSpPr>
             <a:spLocks noGrp="1"/>
           </p:cNvSpPr>
@@ -3292,7 +3292,7 @@
         <p:spPr>
           <a:xfrm>
             <a:off x="685800" y="4400640"/>
-            <a:ext cx="5485320" cy="3599280"/>
+            <a:ext cx="5484960" cy="3598920"/>
           </a:xfrm>
           <a:prstGeom prst="rect">
             <a:avLst/>
@@ -3323,7 +3323,7 @@
       </p:sp>
       <p:sp>
         <p:nvSpPr>
-          <p:cNvPr id="432" name="PlaceHolder 3"/>
+          <p:cNvPr id="433" name="PlaceHolder 3"/>
           <p:cNvSpPr>
             <a:spLocks noGrp="1"/>
           </p:cNvSpPr>
@@ -3334,7 +3334,7 @@
         <p:spPr>
           <a:xfrm>
             <a:off x="3884760" y="8685360"/>
-            <a:ext cx="2970720" cy="457560"/>
+            <a:ext cx="2970360" cy="457200"/>
           </a:xfrm>
           <a:prstGeom prst="rect">
             <a:avLst/>
@@ -3378,7 +3378,7 @@
                 <a:tab algn="l" pos="0"/>
               </a:tabLst>
             </a:pPr>
-            <a:fld id="{8485A93D-0BC5-4733-879F-D98DBC9AF116}" type="slidenum">
+            <a:fld id="{3D1C71A5-E766-44E3-8C20-CB4399A5DE9B}" type="slidenum">
               <a:rPr b="0" lang="en-US" sz="1200" strike="noStrike" u="none">
                 <a:solidFill>
                   <a:schemeClr val="dk1"/>
@@ -3425,7 +3425,7 @@
       </p:grpSpPr>
       <p:sp>
         <p:nvSpPr>
-          <p:cNvPr id="433" name="PlaceHolder 1"/>
+          <p:cNvPr id="434" name="PlaceHolder 1"/>
           <p:cNvSpPr>
             <a:spLocks noGrp="1"/>
           </p:cNvSpPr>
@@ -3436,19 +3436,19 @@
         <p:spPr>
           <a:xfrm>
             <a:off x="685800" y="1143000"/>
-            <a:ext cx="5485320" cy="3085200"/>
-          </a:xfrm>
-          <a:prstGeom prst="rect">
-            <a:avLst/>
-          </a:prstGeom>
-          <a:ln w="0">
-            <a:noFill/>
-          </a:ln>
-        </p:spPr>
-      </p:sp>
-      <p:sp>
-        <p:nvSpPr>
-          <p:cNvPr id="434" name="PlaceHolder 2"/>
+            <a:ext cx="5484960" cy="3084840"/>
+          </a:xfrm>
+          <a:prstGeom prst="rect">
+            <a:avLst/>
+          </a:prstGeom>
+          <a:ln w="0">
+            <a:noFill/>
+          </a:ln>
+        </p:spPr>
+      </p:sp>
+      <p:sp>
+        <p:nvSpPr>
+          <p:cNvPr id="435" name="PlaceHolder 2"/>
           <p:cNvSpPr>
             <a:spLocks noGrp="1"/>
           </p:cNvSpPr>
@@ -3459,7 +3459,7 @@
         <p:spPr>
           <a:xfrm>
             <a:off x="685800" y="4400640"/>
-            <a:ext cx="5485320" cy="3599280"/>
+            <a:ext cx="5484960" cy="3598920"/>
           </a:xfrm>
           <a:prstGeom prst="rect">
             <a:avLst/>
@@ -3490,7 +3490,7 @@
       </p:sp>
       <p:sp>
         <p:nvSpPr>
-          <p:cNvPr id="435" name="PlaceHolder 3"/>
+          <p:cNvPr id="436" name="PlaceHolder 3"/>
           <p:cNvSpPr>
             <a:spLocks noGrp="1"/>
           </p:cNvSpPr>
@@ -3501,7 +3501,7 @@
         <p:spPr>
           <a:xfrm>
             <a:off x="3884760" y="8685360"/>
-            <a:ext cx="2970720" cy="457560"/>
+            <a:ext cx="2970360" cy="457200"/>
           </a:xfrm>
           <a:prstGeom prst="rect">
             <a:avLst/>
@@ -3545,7 +3545,7 @@
                 <a:tab algn="l" pos="0"/>
               </a:tabLst>
             </a:pPr>
-            <a:fld id="{8A7E104A-CC50-4FE3-BE2E-435E35B24A41}" type="slidenum">
+            <a:fld id="{CC7457A8-D29C-40D9-89DA-73BF5329AE65}" type="slidenum">
               <a:rPr b="0" lang="en-US" sz="1200" strike="noStrike" u="none">
                 <a:solidFill>
                   <a:schemeClr val="dk1"/>
@@ -3592,7 +3592,7 @@
       </p:grpSpPr>
       <p:sp>
         <p:nvSpPr>
-          <p:cNvPr id="436" name="PlaceHolder 1"/>
+          <p:cNvPr id="437" name="PlaceHolder 1"/>
           <p:cNvSpPr>
             <a:spLocks noGrp="1"/>
           </p:cNvSpPr>
@@ -3603,19 +3603,19 @@
         <p:spPr>
           <a:xfrm>
             <a:off x="685800" y="1143000"/>
-            <a:ext cx="5485320" cy="3085200"/>
-          </a:xfrm>
-          <a:prstGeom prst="rect">
-            <a:avLst/>
-          </a:prstGeom>
-          <a:ln w="0">
-            <a:noFill/>
-          </a:ln>
-        </p:spPr>
-      </p:sp>
-      <p:sp>
-        <p:nvSpPr>
-          <p:cNvPr id="437" name="PlaceHolder 2"/>
+            <a:ext cx="5484960" cy="3084840"/>
+          </a:xfrm>
+          <a:prstGeom prst="rect">
+            <a:avLst/>
+          </a:prstGeom>
+          <a:ln w="0">
+            <a:noFill/>
+          </a:ln>
+        </p:spPr>
+      </p:sp>
+      <p:sp>
+        <p:nvSpPr>
+          <p:cNvPr id="438" name="PlaceHolder 2"/>
           <p:cNvSpPr>
             <a:spLocks noGrp="1"/>
           </p:cNvSpPr>
@@ -3626,7 +3626,7 @@
         <p:spPr>
           <a:xfrm>
             <a:off x="685800" y="4400640"/>
-            <a:ext cx="5485320" cy="3599280"/>
+            <a:ext cx="5484960" cy="3598920"/>
           </a:xfrm>
           <a:prstGeom prst="rect">
             <a:avLst/>
@@ -3657,7 +3657,7 @@
       </p:sp>
       <p:sp>
         <p:nvSpPr>
-          <p:cNvPr id="438" name="PlaceHolder 3"/>
+          <p:cNvPr id="439" name="PlaceHolder 3"/>
           <p:cNvSpPr>
             <a:spLocks noGrp="1"/>
           </p:cNvSpPr>
@@ -3668,7 +3668,7 @@
         <p:spPr>
           <a:xfrm>
             <a:off x="3884760" y="8685360"/>
-            <a:ext cx="2970720" cy="457560"/>
+            <a:ext cx="2970360" cy="457200"/>
           </a:xfrm>
           <a:prstGeom prst="rect">
             <a:avLst/>
@@ -3712,7 +3712,7 @@
                 <a:tab algn="l" pos="0"/>
               </a:tabLst>
             </a:pPr>
-            <a:fld id="{BC45239B-5802-48E7-BF04-619CA1FC77EB}" type="slidenum">
+            <a:fld id="{183BADF3-26D8-4F3C-8E1A-0A2FB09E1634}" type="slidenum">
               <a:rPr b="0" lang="en-US" sz="1200" strike="noStrike" u="none">
                 <a:solidFill>
                   <a:schemeClr val="dk1"/>
@@ -3759,7 +3759,7 @@
       </p:grpSpPr>
       <p:sp>
         <p:nvSpPr>
-          <p:cNvPr id="439" name="PlaceHolder 1"/>
+          <p:cNvPr id="440" name="PlaceHolder 1"/>
           <p:cNvSpPr>
             <a:spLocks noGrp="1"/>
           </p:cNvSpPr>
@@ -3770,19 +3770,19 @@
         <p:spPr>
           <a:xfrm>
             <a:off x="685800" y="1143000"/>
-            <a:ext cx="5485320" cy="3085200"/>
-          </a:xfrm>
-          <a:prstGeom prst="rect">
-            <a:avLst/>
-          </a:prstGeom>
-          <a:ln w="0">
-            <a:noFill/>
-          </a:ln>
-        </p:spPr>
-      </p:sp>
-      <p:sp>
-        <p:nvSpPr>
-          <p:cNvPr id="440" name="PlaceHolder 2"/>
+            <a:ext cx="5484960" cy="3084840"/>
+          </a:xfrm>
+          <a:prstGeom prst="rect">
+            <a:avLst/>
+          </a:prstGeom>
+          <a:ln w="0">
+            <a:noFill/>
+          </a:ln>
+        </p:spPr>
+      </p:sp>
+      <p:sp>
+        <p:nvSpPr>
+          <p:cNvPr id="441" name="PlaceHolder 2"/>
           <p:cNvSpPr>
             <a:spLocks noGrp="1"/>
           </p:cNvSpPr>
@@ -3793,7 +3793,7 @@
         <p:spPr>
           <a:xfrm>
             <a:off x="685800" y="4400640"/>
-            <a:ext cx="5485320" cy="3599280"/>
+            <a:ext cx="5484960" cy="3598920"/>
           </a:xfrm>
           <a:prstGeom prst="rect">
             <a:avLst/>
@@ -3824,7 +3824,7 @@
       </p:sp>
       <p:sp>
         <p:nvSpPr>
-          <p:cNvPr id="441" name="PlaceHolder 3"/>
+          <p:cNvPr id="442" name="PlaceHolder 3"/>
           <p:cNvSpPr>
             <a:spLocks noGrp="1"/>
           </p:cNvSpPr>
@@ -3835,7 +3835,7 @@
         <p:spPr>
           <a:xfrm>
             <a:off x="3884760" y="8685360"/>
-            <a:ext cx="2970720" cy="457560"/>
+            <a:ext cx="2970360" cy="457200"/>
           </a:xfrm>
           <a:prstGeom prst="rect">
             <a:avLst/>
@@ -3879,7 +3879,7 @@
                 <a:tab algn="l" pos="0"/>
               </a:tabLst>
             </a:pPr>
-            <a:fld id="{26B49425-7B93-483E-B02B-05AEF1B00FF7}" type="slidenum">
+            <a:fld id="{30BAD2E3-4941-49A6-929F-5AA572AF5D86}" type="slidenum">
               <a:rPr b="0" lang="en-US" sz="1200" strike="noStrike" u="none">
                 <a:solidFill>
                   <a:schemeClr val="dk1"/>
@@ -3926,7 +3926,7 @@
       </p:grpSpPr>
       <p:sp>
         <p:nvSpPr>
-          <p:cNvPr id="442" name="PlaceHolder 1"/>
+          <p:cNvPr id="443" name="PlaceHolder 1"/>
           <p:cNvSpPr>
             <a:spLocks noGrp="1"/>
           </p:cNvSpPr>
@@ -3937,19 +3937,19 @@
         <p:spPr>
           <a:xfrm>
             <a:off x="685800" y="1143000"/>
-            <a:ext cx="5485320" cy="3085200"/>
-          </a:xfrm>
-          <a:prstGeom prst="rect">
-            <a:avLst/>
-          </a:prstGeom>
-          <a:ln w="0">
-            <a:noFill/>
-          </a:ln>
-        </p:spPr>
-      </p:sp>
-      <p:sp>
-        <p:nvSpPr>
-          <p:cNvPr id="443" name="PlaceHolder 2"/>
+            <a:ext cx="5484960" cy="3084840"/>
+          </a:xfrm>
+          <a:prstGeom prst="rect">
+            <a:avLst/>
+          </a:prstGeom>
+          <a:ln w="0">
+            <a:noFill/>
+          </a:ln>
+        </p:spPr>
+      </p:sp>
+      <p:sp>
+        <p:nvSpPr>
+          <p:cNvPr id="444" name="PlaceHolder 2"/>
           <p:cNvSpPr>
             <a:spLocks noGrp="1"/>
           </p:cNvSpPr>
@@ -3960,7 +3960,7 @@
         <p:spPr>
           <a:xfrm>
             <a:off x="685800" y="4400640"/>
-            <a:ext cx="5485320" cy="3599280"/>
+            <a:ext cx="5484960" cy="3598920"/>
           </a:xfrm>
           <a:prstGeom prst="rect">
             <a:avLst/>
@@ -3991,7 +3991,7 @@
       </p:sp>
       <p:sp>
         <p:nvSpPr>
-          <p:cNvPr id="444" name="PlaceHolder 3"/>
+          <p:cNvPr id="445" name="PlaceHolder 3"/>
           <p:cNvSpPr>
             <a:spLocks noGrp="1"/>
           </p:cNvSpPr>
@@ -4002,7 +4002,7 @@
         <p:spPr>
           <a:xfrm>
             <a:off x="3884760" y="8685360"/>
-            <a:ext cx="2970720" cy="457560"/>
+            <a:ext cx="2970360" cy="457200"/>
           </a:xfrm>
           <a:prstGeom prst="rect">
             <a:avLst/>
@@ -4046,7 +4046,7 @@
                 <a:tab algn="l" pos="0"/>
               </a:tabLst>
             </a:pPr>
-            <a:fld id="{1E2BFA48-52E3-4B29-A01D-35E4AED8DE2A}" type="slidenum">
+            <a:fld id="{5EEA8265-949D-4D13-B806-8918DE72CFBE}" type="slidenum">
               <a:rPr b="0" lang="en-US" sz="1200" strike="noStrike" u="none">
                 <a:solidFill>
                   <a:schemeClr val="dk1"/>
@@ -4093,7 +4093,7 @@
       </p:grpSpPr>
       <p:sp>
         <p:nvSpPr>
-          <p:cNvPr id="445" name="PlaceHolder 1"/>
+          <p:cNvPr id="446" name="PlaceHolder 1"/>
           <p:cNvSpPr>
             <a:spLocks noGrp="1"/>
           </p:cNvSpPr>
@@ -4104,19 +4104,19 @@
         <p:spPr>
           <a:xfrm>
             <a:off x="685800" y="1143000"/>
-            <a:ext cx="5485320" cy="3085200"/>
-          </a:xfrm>
-          <a:prstGeom prst="rect">
-            <a:avLst/>
-          </a:prstGeom>
-          <a:ln w="0">
-            <a:noFill/>
-          </a:ln>
-        </p:spPr>
-      </p:sp>
-      <p:sp>
-        <p:nvSpPr>
-          <p:cNvPr id="446" name="PlaceHolder 2"/>
+            <a:ext cx="5484960" cy="3084840"/>
+          </a:xfrm>
+          <a:prstGeom prst="rect">
+            <a:avLst/>
+          </a:prstGeom>
+          <a:ln w="0">
+            <a:noFill/>
+          </a:ln>
+        </p:spPr>
+      </p:sp>
+      <p:sp>
+        <p:nvSpPr>
+          <p:cNvPr id="447" name="PlaceHolder 2"/>
           <p:cNvSpPr>
             <a:spLocks noGrp="1"/>
           </p:cNvSpPr>
@@ -4127,7 +4127,7 @@
         <p:spPr>
           <a:xfrm>
             <a:off x="685800" y="4400640"/>
-            <a:ext cx="5485320" cy="3599280"/>
+            <a:ext cx="5484960" cy="3598920"/>
           </a:xfrm>
           <a:prstGeom prst="rect">
             <a:avLst/>
@@ -4158,7 +4158,7 @@
       </p:sp>
       <p:sp>
         <p:nvSpPr>
-          <p:cNvPr id="447" name="PlaceHolder 3"/>
+          <p:cNvPr id="448" name="PlaceHolder 3"/>
           <p:cNvSpPr>
             <a:spLocks noGrp="1"/>
           </p:cNvSpPr>
@@ -4169,7 +4169,7 @@
         <p:spPr>
           <a:xfrm>
             <a:off x="3884760" y="8685360"/>
-            <a:ext cx="2970720" cy="457560"/>
+            <a:ext cx="2970360" cy="457200"/>
           </a:xfrm>
           <a:prstGeom prst="rect">
             <a:avLst/>
@@ -4213,7 +4213,7 @@
                 <a:tab algn="l" pos="0"/>
               </a:tabLst>
             </a:pPr>
-            <a:fld id="{4CCEE63D-FD1D-4642-A024-C02263F12AB4}" type="slidenum">
+            <a:fld id="{B8623237-2CA2-4AC7-9B17-1619B9D9943C}" type="slidenum">
               <a:rPr b="0" lang="en-US" sz="1200" strike="noStrike" u="none">
                 <a:solidFill>
                   <a:schemeClr val="dk1"/>
@@ -4300,7 +4300,7 @@
         <p:spPr>
           <a:xfrm>
             <a:off x="457200" y="497160"/>
-            <a:ext cx="8228520" cy="274680"/>
+            <a:ext cx="8228160" cy="274680"/>
           </a:xfrm>
           <a:prstGeom prst="rect">
             <a:avLst/>
@@ -4359,7 +4359,7 @@
         <p:spPr>
           <a:xfrm>
             <a:off x="457200" y="1203120"/>
-            <a:ext cx="8228520" cy="2982600"/>
+            <a:ext cx="8228160" cy="2982240"/>
           </a:xfrm>
           <a:prstGeom prst="rect">
             <a:avLst/>
@@ -4662,7 +4662,7 @@
         <p:spPr>
           <a:xfrm>
             <a:off x="457200" y="497160"/>
-            <a:ext cx="8228520" cy="274680"/>
+            <a:ext cx="8228160" cy="274680"/>
           </a:xfrm>
           <a:prstGeom prst="rect">
             <a:avLst/>
@@ -4721,7 +4721,7 @@
         <p:spPr>
           <a:xfrm>
             <a:off x="457200" y="1203120"/>
-            <a:ext cx="8228520" cy="2982600"/>
+            <a:ext cx="8228160" cy="2982240"/>
           </a:xfrm>
           <a:prstGeom prst="rect">
             <a:avLst/>
@@ -5024,7 +5024,7 @@
         <p:spPr>
           <a:xfrm>
             <a:off x="457200" y="497160"/>
-            <a:ext cx="8228520" cy="274680"/>
+            <a:ext cx="8228160" cy="274680"/>
           </a:xfrm>
           <a:prstGeom prst="rect">
             <a:avLst/>
@@ -5083,7 +5083,7 @@
         <p:spPr>
           <a:xfrm>
             <a:off x="457200" y="1203120"/>
-            <a:ext cx="8228520" cy="2982600"/>
+            <a:ext cx="8228160" cy="2982240"/>
           </a:xfrm>
           <a:prstGeom prst="rect">
             <a:avLst/>
@@ -5449,7 +5449,7 @@
         <p:spPr>
           <a:xfrm>
             <a:off x="2583000" y="1203120"/>
-            <a:ext cx="3976560" cy="2982600"/>
+            <a:ext cx="3976200" cy="2982240"/>
           </a:xfrm>
           <a:prstGeom prst="rect">
             <a:avLst/>
@@ -5472,8 +5472,8 @@
         </p:nvSpPr>
         <p:spPr>
           <a:xfrm>
-            <a:off x="457200" y="204480"/>
-            <a:ext cx="8228520" cy="859320"/>
+            <a:off x="457200" y="204120"/>
+            <a:ext cx="8228160" cy="859680"/>
           </a:xfrm>
           <a:prstGeom prst="rect">
             <a:avLst/>
@@ -5531,8 +5531,8 @@
         </p:nvSpPr>
         <p:spPr>
           <a:xfrm>
-            <a:off x="622080" y="951840"/>
-            <a:ext cx="6427800" cy="3594600"/>
+            <a:off x="622080" y="951480"/>
+            <a:ext cx="6427440" cy="3594960"/>
           </a:xfrm>
           <a:prstGeom prst="rect">
             <a:avLst/>
@@ -5805,13 +5805,13 @@
           <a:blip r:embed="rId2">
             <a:alphaModFix amt="69000"/>
           </a:blip>
-          <a:srcRect l="32775" t="-1899" r="17776" b="0"/>
+          <a:srcRect l="32771" t="-1899" r="17776" b="0"/>
           <a:stretch/>
         </p:blipFill>
         <p:spPr>
           <a:xfrm>
             <a:off x="7102800" y="1602360"/>
-            <a:ext cx="1398600" cy="1922400"/>
+            <a:ext cx="1398240" cy="1922040"/>
           </a:xfrm>
           <a:prstGeom prst="rect">
             <a:avLst/>
@@ -5854,14 +5854,14 @@
       </p:grpSpPr>
       <p:sp>
         <p:nvSpPr>
-          <p:cNvPr id="135" name="Shape 2"/>
+          <p:cNvPr id="136" name="Shape 2"/>
           <p:cNvSpPr/>
           <p:nvPr/>
         </p:nvSpPr>
         <p:spPr>
           <a:xfrm>
             <a:off x="228600" y="4453920"/>
-            <a:ext cx="8502840" cy="346320"/>
+            <a:ext cx="8502480" cy="345960"/>
           </a:xfrm>
           <a:prstGeom prst="rect">
             <a:avLst/>
@@ -5906,14 +5906,14 @@
       </p:sp>
       <p:sp>
         <p:nvSpPr>
-          <p:cNvPr id="136" name="Shape 1"/>
+          <p:cNvPr id="137" name="Shape 1"/>
           <p:cNvSpPr/>
           <p:nvPr/>
         </p:nvSpPr>
         <p:spPr>
           <a:xfrm>
             <a:off x="0" y="0"/>
-            <a:ext cx="9142920" cy="291600"/>
+            <a:ext cx="9142560" cy="291240"/>
           </a:xfrm>
           <a:prstGeom prst="rect">
             <a:avLst/>
@@ -5958,14 +5958,14 @@
       </p:sp>
       <p:sp>
         <p:nvSpPr>
-          <p:cNvPr id="137" name=""/>
+          <p:cNvPr id="138" name=""/>
           <p:cNvSpPr/>
           <p:nvPr/>
         </p:nvSpPr>
         <p:spPr>
           <a:xfrm>
             <a:off x="36000" y="45720"/>
-            <a:ext cx="3392640" cy="346320"/>
+            <a:ext cx="3392280" cy="345960"/>
           </a:xfrm>
           <a:prstGeom prst="rect">
             <a:avLst/>
@@ -6016,14 +6016,14 @@
       </p:sp>
       <p:sp>
         <p:nvSpPr>
-          <p:cNvPr id="138" name="Text 28"/>
+          <p:cNvPr id="139" name="Text 28"/>
           <p:cNvSpPr/>
           <p:nvPr/>
         </p:nvSpPr>
         <p:spPr>
           <a:xfrm>
             <a:off x="228600" y="914400"/>
-            <a:ext cx="2742840" cy="364680"/>
+            <a:ext cx="2742480" cy="364320"/>
           </a:xfrm>
           <a:prstGeom prst="rect">
             <a:avLst/>
@@ -6077,7 +6077,7 @@
       </p:sp>
       <p:pic>
         <p:nvPicPr>
-          <p:cNvPr id="139" name="" descr=""/>
+          <p:cNvPr id="140" name="" descr=""/>
           <p:cNvPicPr/>
           <p:nvPr/>
         </p:nvPicPr>
@@ -6088,7 +6088,7 @@
         <p:spPr>
           <a:xfrm>
             <a:off x="4343400" y="566280"/>
-            <a:ext cx="3776760" cy="3776760"/>
+            <a:ext cx="3776400" cy="3776400"/>
           </a:xfrm>
           <a:prstGeom prst="rect">
             <a:avLst/>
@@ -6101,14 +6101,14 @@
       </p:pic>
       <p:sp>
         <p:nvSpPr>
-          <p:cNvPr id="140" name=""/>
+          <p:cNvPr id="141" name=""/>
           <p:cNvSpPr/>
           <p:nvPr/>
         </p:nvSpPr>
         <p:spPr>
           <a:xfrm>
             <a:off x="489960" y="1818720"/>
-            <a:ext cx="2928600" cy="1838520"/>
+            <a:ext cx="2928240" cy="1838160"/>
           </a:xfrm>
           <a:prstGeom prst="rect">
             <a:avLst/>
@@ -6142,6 +6142,7 @@
                 <a:effectLst/>
                 <a:uFillTx/>
                 <a:latin typeface="Arial"/>
+                <a:ea typeface="DejaVu Sans"/>
               </a:rPr>
               <a:t>“An Easter bunny Fitness model goddess floating weightless legs wide with dynamic muscle tension in quads and glutes”</a:t>
             </a:r>
@@ -6156,6 +6157,7 @@
                 <a:effectLst/>
                 <a:uFillTx/>
                 <a:latin typeface="Arial"/>
+                <a:ea typeface="DejaVu Sans"/>
               </a:rPr>
               <a:t>Negative Filter: Clothes</a:t>
             </a:r>
@@ -6172,14 +6174,14 @@
       </p:sp>
       <p:sp>
         <p:nvSpPr>
-          <p:cNvPr id="141" name="Text 34"/>
+          <p:cNvPr id="142" name="Text 34"/>
           <p:cNvSpPr/>
           <p:nvPr/>
         </p:nvSpPr>
         <p:spPr>
           <a:xfrm>
             <a:off x="411480" y="4434840"/>
-            <a:ext cx="8319960" cy="346320"/>
+            <a:ext cx="8319600" cy="345960"/>
           </a:xfrm>
           <a:prstGeom prst="rect">
             <a:avLst/>
@@ -6282,14 +6284,14 @@
       </p:grpSpPr>
       <p:sp>
         <p:nvSpPr>
-          <p:cNvPr id="142" name="Shape 0"/>
+          <p:cNvPr id="143" name="Shape 0"/>
           <p:cNvSpPr/>
           <p:nvPr/>
         </p:nvSpPr>
         <p:spPr>
           <a:xfrm>
             <a:off x="0" y="0"/>
-            <a:ext cx="9142920" cy="291600"/>
+            <a:ext cx="9142560" cy="291240"/>
           </a:xfrm>
           <a:prstGeom prst="rect">
             <a:avLst/>
@@ -6334,14 +6336,14 @@
       </p:sp>
       <p:sp>
         <p:nvSpPr>
-          <p:cNvPr id="143" name="Text 1"/>
+          <p:cNvPr id="144" name="Text 1"/>
           <p:cNvSpPr/>
           <p:nvPr/>
         </p:nvSpPr>
         <p:spPr>
           <a:xfrm>
             <a:off x="164520" y="0"/>
-            <a:ext cx="8777160" cy="291600"/>
+            <a:ext cx="8776800" cy="291240"/>
           </a:xfrm>
           <a:prstGeom prst="rect">
             <a:avLst/>
@@ -6395,14 +6397,14 @@
       </p:sp>
       <p:sp>
         <p:nvSpPr>
-          <p:cNvPr id="144" name="Text 2"/>
+          <p:cNvPr id="145" name="Text 2"/>
           <p:cNvSpPr/>
           <p:nvPr/>
         </p:nvSpPr>
         <p:spPr>
           <a:xfrm>
             <a:off x="320040" y="502920"/>
-            <a:ext cx="8502840" cy="1187640"/>
+            <a:ext cx="8502480" cy="1187280"/>
           </a:xfrm>
           <a:prstGeom prst="rect">
             <a:avLst/>
@@ -6486,7 +6488,7 @@
       </p:sp>
       <p:sp>
         <p:nvSpPr>
-          <p:cNvPr id="145" name="Shape 3"/>
+          <p:cNvPr id="146" name="Shape 3"/>
           <p:cNvSpPr/>
           <p:nvPr/>
         </p:nvSpPr>
@@ -6530,14 +6532,14 @@
       </p:sp>
       <p:sp>
         <p:nvSpPr>
-          <p:cNvPr id="146" name="Text 4"/>
+          <p:cNvPr id="147" name="Text 4"/>
           <p:cNvSpPr/>
           <p:nvPr/>
         </p:nvSpPr>
         <p:spPr>
           <a:xfrm>
             <a:off x="457200" y="1920240"/>
-            <a:ext cx="8228520" cy="474480"/>
+            <a:ext cx="8228160" cy="474120"/>
           </a:xfrm>
           <a:prstGeom prst="rect">
             <a:avLst/>
@@ -6591,14 +6593,14 @@
       </p:sp>
       <p:sp>
         <p:nvSpPr>
-          <p:cNvPr id="147" name="Text 5"/>
+          <p:cNvPr id="148" name="Text 5"/>
           <p:cNvSpPr/>
           <p:nvPr/>
         </p:nvSpPr>
         <p:spPr>
           <a:xfrm>
             <a:off x="457200" y="2450520"/>
-            <a:ext cx="8228520" cy="474480"/>
+            <a:ext cx="8228160" cy="474120"/>
           </a:xfrm>
           <a:prstGeom prst="rect">
             <a:avLst/>
@@ -6652,14 +6654,14 @@
       </p:sp>
       <p:sp>
         <p:nvSpPr>
-          <p:cNvPr id="148" name="Text 6"/>
+          <p:cNvPr id="149" name="Text 6"/>
           <p:cNvSpPr/>
           <p:nvPr/>
         </p:nvSpPr>
         <p:spPr>
           <a:xfrm>
             <a:off x="457200" y="2980800"/>
-            <a:ext cx="8228520" cy="474480"/>
+            <a:ext cx="8228160" cy="474120"/>
           </a:xfrm>
           <a:prstGeom prst="rect">
             <a:avLst/>
@@ -6713,14 +6715,14 @@
       </p:sp>
       <p:sp>
         <p:nvSpPr>
-          <p:cNvPr id="149" name="Text 7"/>
+          <p:cNvPr id="150" name="Text 7"/>
           <p:cNvSpPr/>
           <p:nvPr/>
         </p:nvSpPr>
         <p:spPr>
           <a:xfrm>
             <a:off x="457200" y="3511440"/>
-            <a:ext cx="8228520" cy="474480"/>
+            <a:ext cx="8228160" cy="474120"/>
           </a:xfrm>
           <a:prstGeom prst="rect">
             <a:avLst/>
@@ -6774,14 +6776,14 @@
       </p:sp>
       <p:sp>
         <p:nvSpPr>
-          <p:cNvPr id="150" name="Shape 8"/>
+          <p:cNvPr id="151" name="Shape 8"/>
           <p:cNvSpPr/>
           <p:nvPr/>
         </p:nvSpPr>
         <p:spPr>
           <a:xfrm>
             <a:off x="320040" y="4434840"/>
-            <a:ext cx="8502840" cy="346320"/>
+            <a:ext cx="8502480" cy="345960"/>
           </a:xfrm>
           <a:prstGeom prst="rect">
             <a:avLst/>
@@ -6826,14 +6828,14 @@
       </p:sp>
       <p:sp>
         <p:nvSpPr>
-          <p:cNvPr id="151" name="Text 9"/>
+          <p:cNvPr id="152" name="Text 9"/>
           <p:cNvSpPr/>
           <p:nvPr/>
         </p:nvSpPr>
         <p:spPr>
           <a:xfrm>
             <a:off x="411480" y="4434840"/>
-            <a:ext cx="8319960" cy="346320"/>
+            <a:ext cx="8319600" cy="345960"/>
           </a:xfrm>
           <a:prstGeom prst="rect">
             <a:avLst/>
@@ -6899,14 +6901,14 @@
       </p:sp>
       <p:sp>
         <p:nvSpPr>
-          <p:cNvPr id="152" name="Shape 10"/>
+          <p:cNvPr id="153" name="Shape 10"/>
           <p:cNvSpPr/>
           <p:nvPr/>
         </p:nvSpPr>
         <p:spPr>
           <a:xfrm>
             <a:off x="0" y="4864680"/>
-            <a:ext cx="9142920" cy="277920"/>
+            <a:ext cx="9142560" cy="277560"/>
           </a:xfrm>
           <a:prstGeom prst="rect">
             <a:avLst/>
@@ -6951,14 +6953,14 @@
       </p:sp>
       <p:sp>
         <p:nvSpPr>
-          <p:cNvPr id="153" name="Text 11"/>
+          <p:cNvPr id="154" name="Text 11"/>
           <p:cNvSpPr/>
           <p:nvPr/>
         </p:nvSpPr>
         <p:spPr>
           <a:xfrm>
             <a:off x="164520" y="4864680"/>
-            <a:ext cx="8777160" cy="277920"/>
+            <a:ext cx="8776800" cy="277560"/>
           </a:xfrm>
           <a:prstGeom prst="rect">
             <a:avLst/>
@@ -7049,14 +7051,14 @@
       </p:grpSpPr>
       <p:sp>
         <p:nvSpPr>
-          <p:cNvPr id="154" name="Shape 0"/>
+          <p:cNvPr id="155" name="Shape 0"/>
           <p:cNvSpPr/>
           <p:nvPr/>
         </p:nvSpPr>
         <p:spPr>
           <a:xfrm>
             <a:off x="0" y="0"/>
-            <a:ext cx="9142920" cy="291600"/>
+            <a:ext cx="9142560" cy="291240"/>
           </a:xfrm>
           <a:prstGeom prst="rect">
             <a:avLst/>
@@ -7101,14 +7103,14 @@
       </p:sp>
       <p:sp>
         <p:nvSpPr>
-          <p:cNvPr id="155" name="Text 1"/>
+          <p:cNvPr id="156" name="Text 1"/>
           <p:cNvSpPr/>
           <p:nvPr/>
         </p:nvSpPr>
         <p:spPr>
           <a:xfrm>
             <a:off x="164520" y="0"/>
-            <a:ext cx="8777160" cy="291600"/>
+            <a:ext cx="8776800" cy="291240"/>
           </a:xfrm>
           <a:prstGeom prst="rect">
             <a:avLst/>
@@ -7162,14 +7164,14 @@
       </p:sp>
       <p:sp>
         <p:nvSpPr>
-          <p:cNvPr id="156" name="Text 2"/>
+          <p:cNvPr id="157" name="Text 2"/>
           <p:cNvSpPr/>
           <p:nvPr/>
         </p:nvSpPr>
         <p:spPr>
           <a:xfrm>
             <a:off x="320040" y="502920"/>
-            <a:ext cx="8502840" cy="547560"/>
+            <a:ext cx="8502480" cy="547200"/>
           </a:xfrm>
           <a:prstGeom prst="rect">
             <a:avLst/>
@@ -7223,7 +7225,7 @@
       </p:sp>
       <p:sp>
         <p:nvSpPr>
-          <p:cNvPr id="157" name="Shape 3"/>
+          <p:cNvPr id="158" name="Shape 3"/>
           <p:cNvSpPr/>
           <p:nvPr/>
         </p:nvSpPr>
@@ -7267,14 +7269,14 @@
       </p:sp>
       <p:sp>
         <p:nvSpPr>
-          <p:cNvPr id="158" name="Shape 4"/>
+          <p:cNvPr id="159" name="Shape 4"/>
           <p:cNvSpPr/>
           <p:nvPr/>
         </p:nvSpPr>
         <p:spPr>
           <a:xfrm>
             <a:off x="320040" y="1261800"/>
-            <a:ext cx="2650680" cy="2376360"/>
+            <a:ext cx="2650320" cy="2376000"/>
           </a:xfrm>
           <a:prstGeom prst="rect">
             <a:avLst/>
@@ -7319,14 +7321,14 @@
       </p:sp>
       <p:sp>
         <p:nvSpPr>
-          <p:cNvPr id="159" name="Text 5"/>
+          <p:cNvPr id="160" name="Text 5"/>
           <p:cNvSpPr/>
           <p:nvPr/>
         </p:nvSpPr>
         <p:spPr>
           <a:xfrm>
             <a:off x="320040" y="1371600"/>
-            <a:ext cx="2650680" cy="501840"/>
+            <a:ext cx="2650320" cy="501480"/>
           </a:xfrm>
           <a:prstGeom prst="rect">
             <a:avLst/>
@@ -7380,7 +7382,7 @@
       </p:sp>
       <p:sp>
         <p:nvSpPr>
-          <p:cNvPr id="160" name="Shape 6"/>
+          <p:cNvPr id="161" name="Shape 6"/>
           <p:cNvSpPr/>
           <p:nvPr/>
         </p:nvSpPr>
@@ -7424,14 +7426,14 @@
       </p:sp>
       <p:sp>
         <p:nvSpPr>
-          <p:cNvPr id="161" name="Text 7"/>
+          <p:cNvPr id="162" name="Text 7"/>
           <p:cNvSpPr/>
           <p:nvPr/>
         </p:nvSpPr>
         <p:spPr>
           <a:xfrm>
             <a:off x="320040" y="1993320"/>
-            <a:ext cx="2650680" cy="1507680"/>
+            <a:ext cx="2650320" cy="1507320"/>
           </a:xfrm>
           <a:prstGeom prst="rect">
             <a:avLst/>
@@ -7515,14 +7517,14 @@
       </p:sp>
       <p:sp>
         <p:nvSpPr>
-          <p:cNvPr id="162" name="Shape 8"/>
+          <p:cNvPr id="163" name="Shape 8"/>
           <p:cNvSpPr/>
           <p:nvPr/>
         </p:nvSpPr>
         <p:spPr>
           <a:xfrm>
             <a:off x="3173040" y="1261800"/>
-            <a:ext cx="2650680" cy="2376360"/>
+            <a:ext cx="2650320" cy="2376000"/>
           </a:xfrm>
           <a:prstGeom prst="rect">
             <a:avLst/>
@@ -7567,14 +7569,14 @@
       </p:sp>
       <p:sp>
         <p:nvSpPr>
-          <p:cNvPr id="163" name="Text 9"/>
+          <p:cNvPr id="164" name="Text 9"/>
           <p:cNvSpPr/>
           <p:nvPr/>
         </p:nvSpPr>
         <p:spPr>
           <a:xfrm>
             <a:off x="3173040" y="1371600"/>
-            <a:ext cx="2650680" cy="501840"/>
+            <a:ext cx="2650320" cy="501480"/>
           </a:xfrm>
           <a:prstGeom prst="rect">
             <a:avLst/>
@@ -7628,7 +7630,7 @@
       </p:sp>
       <p:sp>
         <p:nvSpPr>
-          <p:cNvPr id="164" name="Shape 10"/>
+          <p:cNvPr id="165" name="Shape 10"/>
           <p:cNvSpPr/>
           <p:nvPr/>
         </p:nvSpPr>
@@ -7672,14 +7674,14 @@
       </p:sp>
       <p:sp>
         <p:nvSpPr>
-          <p:cNvPr id="165" name="Text 11"/>
+          <p:cNvPr id="166" name="Text 11"/>
           <p:cNvSpPr/>
           <p:nvPr/>
         </p:nvSpPr>
         <p:spPr>
           <a:xfrm>
             <a:off x="3173040" y="1993320"/>
-            <a:ext cx="2650680" cy="1507680"/>
+            <a:ext cx="2650320" cy="1507320"/>
           </a:xfrm>
           <a:prstGeom prst="rect">
             <a:avLst/>
@@ -7763,14 +7765,14 @@
       </p:sp>
       <p:sp>
         <p:nvSpPr>
-          <p:cNvPr id="166" name="Shape 12"/>
+          <p:cNvPr id="167" name="Shape 12"/>
           <p:cNvSpPr/>
           <p:nvPr/>
         </p:nvSpPr>
         <p:spPr>
           <a:xfrm>
             <a:off x="6026040" y="1261800"/>
-            <a:ext cx="2650680" cy="2376360"/>
+            <a:ext cx="2650320" cy="2376000"/>
           </a:xfrm>
           <a:prstGeom prst="rect">
             <a:avLst/>
@@ -7815,14 +7817,14 @@
       </p:sp>
       <p:sp>
         <p:nvSpPr>
-          <p:cNvPr id="167" name="Text 13"/>
+          <p:cNvPr id="168" name="Text 13"/>
           <p:cNvSpPr/>
           <p:nvPr/>
         </p:nvSpPr>
         <p:spPr>
           <a:xfrm>
             <a:off x="6026040" y="1371600"/>
-            <a:ext cx="2650680" cy="501840"/>
+            <a:ext cx="2650320" cy="501480"/>
           </a:xfrm>
           <a:prstGeom prst="rect">
             <a:avLst/>
@@ -7876,7 +7878,7 @@
       </p:sp>
       <p:sp>
         <p:nvSpPr>
-          <p:cNvPr id="168" name="Shape 14"/>
+          <p:cNvPr id="169" name="Shape 14"/>
           <p:cNvSpPr/>
           <p:nvPr/>
         </p:nvSpPr>
@@ -7920,14 +7922,14 @@
       </p:sp>
       <p:sp>
         <p:nvSpPr>
-          <p:cNvPr id="169" name="Text 15"/>
+          <p:cNvPr id="170" name="Text 15"/>
           <p:cNvSpPr/>
           <p:nvPr/>
         </p:nvSpPr>
         <p:spPr>
           <a:xfrm>
             <a:off x="6026040" y="1993320"/>
-            <a:ext cx="2650680" cy="1507680"/>
+            <a:ext cx="2650320" cy="1507320"/>
           </a:xfrm>
           <a:prstGeom prst="rect">
             <a:avLst/>
@@ -8011,14 +8013,14 @@
       </p:sp>
       <p:sp>
         <p:nvSpPr>
-          <p:cNvPr id="170" name="Shape 16"/>
+          <p:cNvPr id="171" name="Shape 16"/>
           <p:cNvSpPr/>
           <p:nvPr/>
         </p:nvSpPr>
         <p:spPr>
           <a:xfrm>
             <a:off x="0" y="4864680"/>
-            <a:ext cx="9142920" cy="277920"/>
+            <a:ext cx="9142560" cy="277560"/>
           </a:xfrm>
           <a:prstGeom prst="rect">
             <a:avLst/>
@@ -8063,14 +8065,14 @@
       </p:sp>
       <p:sp>
         <p:nvSpPr>
-          <p:cNvPr id="171" name="Text 17"/>
+          <p:cNvPr id="172" name="Text 17"/>
           <p:cNvSpPr/>
           <p:nvPr/>
         </p:nvSpPr>
         <p:spPr>
           <a:xfrm>
             <a:off x="164520" y="4864680"/>
-            <a:ext cx="8777160" cy="277920"/>
+            <a:ext cx="8776800" cy="277560"/>
           </a:xfrm>
           <a:prstGeom prst="rect">
             <a:avLst/>
@@ -8161,14 +8163,14 @@
       </p:grpSpPr>
       <p:sp>
         <p:nvSpPr>
-          <p:cNvPr id="172" name="Shape 0"/>
+          <p:cNvPr id="173" name="Shape 0"/>
           <p:cNvSpPr/>
           <p:nvPr/>
         </p:nvSpPr>
         <p:spPr>
           <a:xfrm>
             <a:off x="0" y="0"/>
-            <a:ext cx="9142920" cy="291600"/>
+            <a:ext cx="9142560" cy="291240"/>
           </a:xfrm>
           <a:prstGeom prst="rect">
             <a:avLst/>
@@ -8213,14 +8215,14 @@
       </p:sp>
       <p:sp>
         <p:nvSpPr>
-          <p:cNvPr id="173" name="Text 1"/>
+          <p:cNvPr id="174" name="Text 1"/>
           <p:cNvSpPr/>
           <p:nvPr/>
         </p:nvSpPr>
         <p:spPr>
           <a:xfrm>
             <a:off x="164520" y="0"/>
-            <a:ext cx="8777160" cy="291600"/>
+            <a:ext cx="8776800" cy="291240"/>
           </a:xfrm>
           <a:prstGeom prst="rect">
             <a:avLst/>
@@ -8274,14 +8276,14 @@
       </p:sp>
       <p:sp>
         <p:nvSpPr>
-          <p:cNvPr id="174" name="Text 2"/>
+          <p:cNvPr id="175" name="Text 2"/>
           <p:cNvSpPr/>
           <p:nvPr/>
         </p:nvSpPr>
         <p:spPr>
           <a:xfrm>
             <a:off x="320040" y="502920"/>
-            <a:ext cx="8502840" cy="547560"/>
+            <a:ext cx="8502480" cy="547200"/>
           </a:xfrm>
           <a:prstGeom prst="rect">
             <a:avLst/>
@@ -8335,7 +8337,7 @@
       </p:sp>
       <p:sp>
         <p:nvSpPr>
-          <p:cNvPr id="175" name="Shape 3"/>
+          <p:cNvPr id="176" name="Shape 3"/>
           <p:cNvSpPr/>
           <p:nvPr/>
         </p:nvSpPr>
@@ -8379,14 +8381,14 @@
       </p:sp>
       <p:sp>
         <p:nvSpPr>
-          <p:cNvPr id="176" name="Text 4"/>
+          <p:cNvPr id="177" name="Text 4"/>
           <p:cNvSpPr/>
           <p:nvPr/>
         </p:nvSpPr>
         <p:spPr>
           <a:xfrm>
             <a:off x="320040" y="1234440"/>
-            <a:ext cx="8502840" cy="501840"/>
+            <a:ext cx="8502480" cy="501480"/>
           </a:xfrm>
           <a:prstGeom prst="rect">
             <a:avLst/>
@@ -8464,14 +8466,14 @@
       </p:sp>
       <p:sp>
         <p:nvSpPr>
-          <p:cNvPr id="177" name="Shape 5"/>
+          <p:cNvPr id="178" name="Shape 5"/>
           <p:cNvSpPr/>
           <p:nvPr/>
         </p:nvSpPr>
         <p:spPr>
           <a:xfrm>
             <a:off x="320040" y="1874520"/>
-            <a:ext cx="8502840" cy="620640"/>
+            <a:ext cx="8502480" cy="620280"/>
           </a:xfrm>
           <a:prstGeom prst="rect">
             <a:avLst/>
@@ -8516,14 +8518,14 @@
       </p:sp>
       <p:sp>
         <p:nvSpPr>
-          <p:cNvPr id="178" name="Shape 6"/>
+          <p:cNvPr id="179" name="Shape 6"/>
           <p:cNvSpPr/>
           <p:nvPr/>
         </p:nvSpPr>
         <p:spPr>
           <a:xfrm>
             <a:off x="320040" y="1874520"/>
-            <a:ext cx="108720" cy="620640"/>
+            <a:ext cx="108360" cy="620280"/>
           </a:xfrm>
           <a:prstGeom prst="rect">
             <a:avLst/>
@@ -8568,14 +8570,14 @@
       </p:sp>
       <p:sp>
         <p:nvSpPr>
-          <p:cNvPr id="179" name="Text 7"/>
+          <p:cNvPr id="180" name="Text 7"/>
           <p:cNvSpPr/>
           <p:nvPr/>
         </p:nvSpPr>
         <p:spPr>
           <a:xfrm>
             <a:off x="521280" y="1874520"/>
-            <a:ext cx="8228520" cy="620640"/>
+            <a:ext cx="8228160" cy="620280"/>
           </a:xfrm>
           <a:prstGeom prst="rect">
             <a:avLst/>
@@ -8641,14 +8643,14 @@
       </p:sp>
       <p:sp>
         <p:nvSpPr>
-          <p:cNvPr id="180" name="Shape 8"/>
+          <p:cNvPr id="181" name="Shape 8"/>
           <p:cNvSpPr/>
           <p:nvPr/>
         </p:nvSpPr>
         <p:spPr>
           <a:xfrm>
             <a:off x="320040" y="2624400"/>
-            <a:ext cx="8502840" cy="620640"/>
+            <a:ext cx="8502480" cy="620280"/>
           </a:xfrm>
           <a:prstGeom prst="rect">
             <a:avLst/>
@@ -8693,14 +8695,14 @@
       </p:sp>
       <p:sp>
         <p:nvSpPr>
-          <p:cNvPr id="181" name="Shape 9"/>
+          <p:cNvPr id="182" name="Shape 9"/>
           <p:cNvSpPr/>
           <p:nvPr/>
         </p:nvSpPr>
         <p:spPr>
           <a:xfrm>
             <a:off x="320040" y="2624400"/>
-            <a:ext cx="108720" cy="620640"/>
+            <a:ext cx="108360" cy="620280"/>
           </a:xfrm>
           <a:prstGeom prst="rect">
             <a:avLst/>
@@ -8745,14 +8747,14 @@
       </p:sp>
       <p:sp>
         <p:nvSpPr>
-          <p:cNvPr id="182" name="Text 10"/>
+          <p:cNvPr id="183" name="Text 10"/>
           <p:cNvSpPr/>
           <p:nvPr/>
         </p:nvSpPr>
         <p:spPr>
           <a:xfrm>
             <a:off x="521280" y="2624400"/>
-            <a:ext cx="8228520" cy="620640"/>
+            <a:ext cx="8228160" cy="620280"/>
           </a:xfrm>
           <a:prstGeom prst="rect">
             <a:avLst/>
@@ -8818,14 +8820,14 @@
       </p:sp>
       <p:sp>
         <p:nvSpPr>
-          <p:cNvPr id="183" name="Shape 11"/>
+          <p:cNvPr id="184" name="Shape 11"/>
           <p:cNvSpPr/>
           <p:nvPr/>
         </p:nvSpPr>
         <p:spPr>
           <a:xfrm>
             <a:off x="320040" y="3374280"/>
-            <a:ext cx="8502840" cy="620640"/>
+            <a:ext cx="8502480" cy="620280"/>
           </a:xfrm>
           <a:prstGeom prst="rect">
             <a:avLst/>
@@ -8870,14 +8872,14 @@
       </p:sp>
       <p:sp>
         <p:nvSpPr>
-          <p:cNvPr id="184" name="Shape 12"/>
+          <p:cNvPr id="185" name="Shape 12"/>
           <p:cNvSpPr/>
           <p:nvPr/>
         </p:nvSpPr>
         <p:spPr>
           <a:xfrm>
             <a:off x="320040" y="3374280"/>
-            <a:ext cx="108720" cy="620640"/>
+            <a:ext cx="108360" cy="620280"/>
           </a:xfrm>
           <a:prstGeom prst="rect">
             <a:avLst/>
@@ -8922,14 +8924,14 @@
       </p:sp>
       <p:sp>
         <p:nvSpPr>
-          <p:cNvPr id="185" name="Text 13"/>
+          <p:cNvPr id="186" name="Text 13"/>
           <p:cNvSpPr/>
           <p:nvPr/>
         </p:nvSpPr>
         <p:spPr>
           <a:xfrm>
             <a:off x="521280" y="3374280"/>
-            <a:ext cx="8228520" cy="620640"/>
+            <a:ext cx="8228160" cy="620280"/>
           </a:xfrm>
           <a:prstGeom prst="rect">
             <a:avLst/>
@@ -8995,14 +8997,14 @@
       </p:sp>
       <p:sp>
         <p:nvSpPr>
-          <p:cNvPr id="186" name="Shape 14"/>
+          <p:cNvPr id="187" name="Shape 14"/>
           <p:cNvSpPr/>
           <p:nvPr/>
         </p:nvSpPr>
         <p:spPr>
           <a:xfrm>
             <a:off x="320040" y="4434840"/>
-            <a:ext cx="8502840" cy="346320"/>
+            <a:ext cx="8502480" cy="345960"/>
           </a:xfrm>
           <a:prstGeom prst="rect">
             <a:avLst/>
@@ -9047,14 +9049,14 @@
       </p:sp>
       <p:sp>
         <p:nvSpPr>
-          <p:cNvPr id="187" name="Text 15"/>
+          <p:cNvPr id="188" name="Text 15"/>
           <p:cNvSpPr/>
           <p:nvPr/>
         </p:nvSpPr>
         <p:spPr>
           <a:xfrm>
             <a:off x="411480" y="4434840"/>
-            <a:ext cx="8319960" cy="346320"/>
+            <a:ext cx="8319600" cy="345960"/>
           </a:xfrm>
           <a:prstGeom prst="rect">
             <a:avLst/>
@@ -9120,14 +9122,14 @@
       </p:sp>
       <p:sp>
         <p:nvSpPr>
-          <p:cNvPr id="188" name="Shape 16"/>
+          <p:cNvPr id="189" name="Shape 16"/>
           <p:cNvSpPr/>
           <p:nvPr/>
         </p:nvSpPr>
         <p:spPr>
           <a:xfrm>
             <a:off x="0" y="4864680"/>
-            <a:ext cx="9142920" cy="277920"/>
+            <a:ext cx="9142560" cy="277560"/>
           </a:xfrm>
           <a:prstGeom prst="rect">
             <a:avLst/>
@@ -9172,14 +9174,14 @@
       </p:sp>
       <p:sp>
         <p:nvSpPr>
-          <p:cNvPr id="189" name="Text 17"/>
+          <p:cNvPr id="190" name="Text 17"/>
           <p:cNvSpPr/>
           <p:nvPr/>
         </p:nvSpPr>
         <p:spPr>
           <a:xfrm>
             <a:off x="164520" y="4864680"/>
-            <a:ext cx="8777160" cy="277920"/>
+            <a:ext cx="8776800" cy="277560"/>
           </a:xfrm>
           <a:prstGeom prst="rect">
             <a:avLst/>
@@ -9270,14 +9272,14 @@
       </p:grpSpPr>
       <p:sp>
         <p:nvSpPr>
-          <p:cNvPr id="190" name="Shape 0"/>
+          <p:cNvPr id="191" name="Shape 0"/>
           <p:cNvSpPr/>
           <p:nvPr/>
         </p:nvSpPr>
         <p:spPr>
           <a:xfrm>
             <a:off x="0" y="0"/>
-            <a:ext cx="9142920" cy="291600"/>
+            <a:ext cx="9142560" cy="291240"/>
           </a:xfrm>
           <a:prstGeom prst="rect">
             <a:avLst/>
@@ -9322,14 +9324,14 @@
       </p:sp>
       <p:sp>
         <p:nvSpPr>
-          <p:cNvPr id="191" name="Text 1"/>
+          <p:cNvPr id="192" name="Text 1"/>
           <p:cNvSpPr/>
           <p:nvPr/>
         </p:nvSpPr>
         <p:spPr>
           <a:xfrm>
             <a:off x="164520" y="0"/>
-            <a:ext cx="8777160" cy="291600"/>
+            <a:ext cx="8776800" cy="291240"/>
           </a:xfrm>
           <a:prstGeom prst="rect">
             <a:avLst/>
@@ -9383,14 +9385,14 @@
       </p:sp>
       <p:sp>
         <p:nvSpPr>
-          <p:cNvPr id="192" name="Text 2"/>
+          <p:cNvPr id="193" name="Text 2"/>
           <p:cNvSpPr/>
           <p:nvPr/>
         </p:nvSpPr>
         <p:spPr>
           <a:xfrm>
             <a:off x="320040" y="502920"/>
-            <a:ext cx="8502840" cy="547560"/>
+            <a:ext cx="8502480" cy="547200"/>
           </a:xfrm>
           <a:prstGeom prst="rect">
             <a:avLst/>
@@ -9444,7 +9446,7 @@
       </p:sp>
       <p:sp>
         <p:nvSpPr>
-          <p:cNvPr id="193" name="Shape 3"/>
+          <p:cNvPr id="194" name="Shape 3"/>
           <p:cNvSpPr/>
           <p:nvPr/>
         </p:nvSpPr>
@@ -9488,14 +9490,14 @@
       </p:sp>
       <p:sp>
         <p:nvSpPr>
-          <p:cNvPr id="194" name="Shape 4"/>
+          <p:cNvPr id="195" name="Shape 4"/>
           <p:cNvSpPr/>
           <p:nvPr/>
         </p:nvSpPr>
         <p:spPr>
           <a:xfrm>
             <a:off x="320040" y="1417320"/>
-            <a:ext cx="1873440" cy="821880"/>
+            <a:ext cx="1873080" cy="821520"/>
           </a:xfrm>
           <a:prstGeom prst="rect">
             <a:avLst/>
@@ -9540,14 +9542,14 @@
       </p:sp>
       <p:sp>
         <p:nvSpPr>
-          <p:cNvPr id="195" name="Text 5"/>
+          <p:cNvPr id="196" name="Text 5"/>
           <p:cNvSpPr/>
           <p:nvPr/>
         </p:nvSpPr>
         <p:spPr>
           <a:xfrm>
             <a:off x="320040" y="1417320"/>
-            <a:ext cx="1873440" cy="821880"/>
+            <a:ext cx="1873080" cy="821520"/>
           </a:xfrm>
           <a:prstGeom prst="rect">
             <a:avLst/>
@@ -9601,14 +9603,14 @@
       </p:sp>
       <p:sp>
         <p:nvSpPr>
-          <p:cNvPr id="196" name="Text 6"/>
+          <p:cNvPr id="197" name="Text 6"/>
           <p:cNvSpPr/>
           <p:nvPr/>
         </p:nvSpPr>
         <p:spPr>
           <a:xfrm>
             <a:off x="2194560" y="1645920"/>
-            <a:ext cx="273240" cy="364680"/>
+            <a:ext cx="272880" cy="364320"/>
           </a:xfrm>
           <a:prstGeom prst="rect">
             <a:avLst/>
@@ -9662,14 +9664,14 @@
       </p:sp>
       <p:sp>
         <p:nvSpPr>
-          <p:cNvPr id="197" name="Shape 7"/>
+          <p:cNvPr id="198" name="Shape 7"/>
           <p:cNvSpPr/>
           <p:nvPr/>
         </p:nvSpPr>
         <p:spPr>
           <a:xfrm>
             <a:off x="2468880" y="1417320"/>
-            <a:ext cx="1873440" cy="821880"/>
+            <a:ext cx="1873080" cy="821520"/>
           </a:xfrm>
           <a:prstGeom prst="rect">
             <a:avLst/>
@@ -9714,14 +9716,14 @@
       </p:sp>
       <p:sp>
         <p:nvSpPr>
-          <p:cNvPr id="198" name="Text 8"/>
+          <p:cNvPr id="199" name="Text 8"/>
           <p:cNvSpPr/>
           <p:nvPr/>
         </p:nvSpPr>
         <p:spPr>
           <a:xfrm>
             <a:off x="2468880" y="1417320"/>
-            <a:ext cx="1873440" cy="821880"/>
+            <a:ext cx="1873080" cy="821520"/>
           </a:xfrm>
           <a:prstGeom prst="rect">
             <a:avLst/>
@@ -9775,14 +9777,14 @@
       </p:sp>
       <p:sp>
         <p:nvSpPr>
-          <p:cNvPr id="199" name="Text 9"/>
+          <p:cNvPr id="200" name="Text 9"/>
           <p:cNvSpPr/>
           <p:nvPr/>
         </p:nvSpPr>
         <p:spPr>
           <a:xfrm>
             <a:off x="4343400" y="1645920"/>
-            <a:ext cx="273240" cy="364680"/>
+            <a:ext cx="272880" cy="364320"/>
           </a:xfrm>
           <a:prstGeom prst="rect">
             <a:avLst/>
@@ -9836,14 +9838,14 @@
       </p:sp>
       <p:sp>
         <p:nvSpPr>
-          <p:cNvPr id="200" name="Shape 10"/>
+          <p:cNvPr id="201" name="Shape 10"/>
           <p:cNvSpPr/>
           <p:nvPr/>
         </p:nvSpPr>
         <p:spPr>
           <a:xfrm>
             <a:off x="4617720" y="1417320"/>
-            <a:ext cx="1873440" cy="821880"/>
+            <a:ext cx="1873080" cy="821520"/>
           </a:xfrm>
           <a:prstGeom prst="rect">
             <a:avLst/>
@@ -9888,14 +9890,14 @@
       </p:sp>
       <p:sp>
         <p:nvSpPr>
-          <p:cNvPr id="201" name="Text 11"/>
+          <p:cNvPr id="202" name="Text 11"/>
           <p:cNvSpPr/>
           <p:nvPr/>
         </p:nvSpPr>
         <p:spPr>
           <a:xfrm>
             <a:off x="4617720" y="1417320"/>
-            <a:ext cx="1873440" cy="821880"/>
+            <a:ext cx="1873080" cy="821520"/>
           </a:xfrm>
           <a:prstGeom prst="rect">
             <a:avLst/>
@@ -9949,14 +9951,14 @@
       </p:sp>
       <p:sp>
         <p:nvSpPr>
-          <p:cNvPr id="202" name="Text 12"/>
+          <p:cNvPr id="203" name="Text 12"/>
           <p:cNvSpPr/>
           <p:nvPr/>
         </p:nvSpPr>
         <p:spPr>
           <a:xfrm>
             <a:off x="6492240" y="1645920"/>
-            <a:ext cx="273240" cy="364680"/>
+            <a:ext cx="272880" cy="364320"/>
           </a:xfrm>
           <a:prstGeom prst="rect">
             <a:avLst/>
@@ -10010,14 +10012,14 @@
       </p:sp>
       <p:sp>
         <p:nvSpPr>
-          <p:cNvPr id="203" name="Shape 13"/>
+          <p:cNvPr id="204" name="Shape 13"/>
           <p:cNvSpPr/>
           <p:nvPr/>
         </p:nvSpPr>
         <p:spPr>
           <a:xfrm>
             <a:off x="6766560" y="1417320"/>
-            <a:ext cx="1873440" cy="821880"/>
+            <a:ext cx="1873080" cy="821520"/>
           </a:xfrm>
           <a:prstGeom prst="rect">
             <a:avLst/>
@@ -10062,14 +10064,14 @@
       </p:sp>
       <p:sp>
         <p:nvSpPr>
-          <p:cNvPr id="204" name="Text 14"/>
+          <p:cNvPr id="205" name="Text 14"/>
           <p:cNvSpPr/>
           <p:nvPr/>
         </p:nvSpPr>
         <p:spPr>
           <a:xfrm>
             <a:off x="6766560" y="1417320"/>
-            <a:ext cx="1873440" cy="821880"/>
+            <a:ext cx="1873080" cy="821520"/>
           </a:xfrm>
           <a:prstGeom prst="rect">
             <a:avLst/>
@@ -10123,14 +10125,14 @@
       </p:sp>
       <p:sp>
         <p:nvSpPr>
-          <p:cNvPr id="205" name="Text 15"/>
+          <p:cNvPr id="206" name="Text 15"/>
           <p:cNvSpPr/>
           <p:nvPr/>
         </p:nvSpPr>
         <p:spPr>
           <a:xfrm>
             <a:off x="320040" y="2377440"/>
-            <a:ext cx="3839400" cy="364680"/>
+            <a:ext cx="3839040" cy="364320"/>
           </a:xfrm>
           <a:prstGeom prst="rect">
             <a:avLst/>
@@ -10184,7 +10186,7 @@
       </p:sp>
       <p:sp>
         <p:nvSpPr>
-          <p:cNvPr id="206" name="Shape 16"/>
+          <p:cNvPr id="207" name="Shape 16"/>
           <p:cNvSpPr/>
           <p:nvPr/>
         </p:nvSpPr>
@@ -10229,7 +10231,7 @@
       </p:sp>
       <p:sp>
         <p:nvSpPr>
-          <p:cNvPr id="207" name="Shape 17"/>
+          <p:cNvPr id="208" name="Shape 17"/>
           <p:cNvSpPr/>
           <p:nvPr/>
         </p:nvSpPr>
@@ -10274,14 +10276,14 @@
       </p:sp>
       <p:sp>
         <p:nvSpPr>
-          <p:cNvPr id="208" name="Text 18"/>
+          <p:cNvPr id="209" name="Text 18"/>
           <p:cNvSpPr/>
           <p:nvPr/>
         </p:nvSpPr>
         <p:spPr>
           <a:xfrm>
             <a:off x="320040" y="3310200"/>
-            <a:ext cx="8502840" cy="346320"/>
+            <a:ext cx="8502480" cy="345960"/>
           </a:xfrm>
           <a:prstGeom prst="rect">
             <a:avLst/>
@@ -10335,14 +10337,14 @@
       </p:sp>
       <p:sp>
         <p:nvSpPr>
-          <p:cNvPr id="209" name="Shape 19"/>
+          <p:cNvPr id="210" name="Shape 19"/>
           <p:cNvSpPr/>
           <p:nvPr/>
         </p:nvSpPr>
         <p:spPr>
           <a:xfrm>
             <a:off x="320040" y="4434840"/>
-            <a:ext cx="8502840" cy="346320"/>
+            <a:ext cx="8502480" cy="345960"/>
           </a:xfrm>
           <a:prstGeom prst="rect">
             <a:avLst/>
@@ -10387,14 +10389,14 @@
       </p:sp>
       <p:sp>
         <p:nvSpPr>
-          <p:cNvPr id="210" name="Text 20"/>
+          <p:cNvPr id="211" name="Text 20"/>
           <p:cNvSpPr/>
           <p:nvPr/>
         </p:nvSpPr>
         <p:spPr>
           <a:xfrm>
             <a:off x="411480" y="4434840"/>
-            <a:ext cx="8319960" cy="346320"/>
+            <a:ext cx="8319600" cy="345960"/>
           </a:xfrm>
           <a:prstGeom prst="rect">
             <a:avLst/>
@@ -10460,14 +10462,14 @@
       </p:sp>
       <p:sp>
         <p:nvSpPr>
-          <p:cNvPr id="211" name="Shape 21"/>
+          <p:cNvPr id="212" name="Shape 21"/>
           <p:cNvSpPr/>
           <p:nvPr/>
         </p:nvSpPr>
         <p:spPr>
           <a:xfrm>
             <a:off x="0" y="4864680"/>
-            <a:ext cx="9142920" cy="277920"/>
+            <a:ext cx="9142560" cy="277560"/>
           </a:xfrm>
           <a:prstGeom prst="rect">
             <a:avLst/>
@@ -10512,14 +10514,14 @@
       </p:sp>
       <p:sp>
         <p:nvSpPr>
-          <p:cNvPr id="212" name="Text 22"/>
+          <p:cNvPr id="213" name="Text 22"/>
           <p:cNvSpPr/>
           <p:nvPr/>
         </p:nvSpPr>
         <p:spPr>
           <a:xfrm>
             <a:off x="164520" y="4864680"/>
-            <a:ext cx="8777160" cy="277920"/>
+            <a:ext cx="8776800" cy="277560"/>
           </a:xfrm>
           <a:prstGeom prst="rect">
             <a:avLst/>
@@ -10610,14 +10612,14 @@
       </p:grpSpPr>
       <p:sp>
         <p:nvSpPr>
-          <p:cNvPr id="213" name="Shape 0"/>
+          <p:cNvPr id="214" name="Shape 0"/>
           <p:cNvSpPr/>
           <p:nvPr/>
         </p:nvSpPr>
         <p:spPr>
           <a:xfrm>
             <a:off x="0" y="0"/>
-            <a:ext cx="9142920" cy="291600"/>
+            <a:ext cx="9142560" cy="291240"/>
           </a:xfrm>
           <a:prstGeom prst="rect">
             <a:avLst/>
@@ -10662,14 +10664,14 @@
       </p:sp>
       <p:sp>
         <p:nvSpPr>
-          <p:cNvPr id="214" name="Text 1"/>
+          <p:cNvPr id="215" name="Text 1"/>
           <p:cNvSpPr/>
           <p:nvPr/>
         </p:nvSpPr>
         <p:spPr>
           <a:xfrm>
             <a:off x="164520" y="0"/>
-            <a:ext cx="8777160" cy="291600"/>
+            <a:ext cx="8776800" cy="291240"/>
           </a:xfrm>
           <a:prstGeom prst="rect">
             <a:avLst/>
@@ -10723,14 +10725,14 @@
       </p:sp>
       <p:sp>
         <p:nvSpPr>
-          <p:cNvPr id="215" name="Text 2"/>
+          <p:cNvPr id="216" name="Text 2"/>
           <p:cNvSpPr/>
           <p:nvPr/>
         </p:nvSpPr>
         <p:spPr>
           <a:xfrm>
             <a:off x="320040" y="502920"/>
-            <a:ext cx="8502840" cy="547560"/>
+            <a:ext cx="8502480" cy="547200"/>
           </a:xfrm>
           <a:prstGeom prst="rect">
             <a:avLst/>
@@ -10784,7 +10786,7 @@
       </p:sp>
       <p:sp>
         <p:nvSpPr>
-          <p:cNvPr id="216" name="Shape 3"/>
+          <p:cNvPr id="217" name="Shape 3"/>
           <p:cNvSpPr/>
           <p:nvPr/>
         </p:nvSpPr>
@@ -10828,14 +10830,14 @@
       </p:sp>
       <p:sp>
         <p:nvSpPr>
-          <p:cNvPr id="217" name="Text 4"/>
+          <p:cNvPr id="218" name="Text 4"/>
           <p:cNvSpPr/>
           <p:nvPr/>
         </p:nvSpPr>
         <p:spPr>
           <a:xfrm>
             <a:off x="320040" y="1234440"/>
-            <a:ext cx="8502840" cy="593280"/>
+            <a:ext cx="8502480" cy="592920"/>
           </a:xfrm>
           <a:prstGeom prst="rect">
             <a:avLst/>
@@ -10889,14 +10891,14 @@
       </p:sp>
       <p:sp>
         <p:nvSpPr>
-          <p:cNvPr id="218" name="Shape 5"/>
+          <p:cNvPr id="219" name="Shape 5"/>
           <p:cNvSpPr/>
           <p:nvPr/>
         </p:nvSpPr>
         <p:spPr>
           <a:xfrm>
             <a:off x="320040" y="1965960"/>
-            <a:ext cx="8502840" cy="529200"/>
+            <a:ext cx="8502480" cy="528840"/>
           </a:xfrm>
           <a:prstGeom prst="rect">
             <a:avLst/>
@@ -10941,14 +10943,14 @@
       </p:sp>
       <p:sp>
         <p:nvSpPr>
-          <p:cNvPr id="219" name="Text 6"/>
+          <p:cNvPr id="220" name="Text 6"/>
           <p:cNvSpPr/>
           <p:nvPr/>
         </p:nvSpPr>
         <p:spPr>
           <a:xfrm>
             <a:off x="457200" y="1965960"/>
-            <a:ext cx="8228520" cy="529200"/>
+            <a:ext cx="8228160" cy="528840"/>
           </a:xfrm>
           <a:prstGeom prst="rect">
             <a:avLst/>
@@ -11014,14 +11016,14 @@
       </p:sp>
       <p:sp>
         <p:nvSpPr>
-          <p:cNvPr id="220" name="Shape 7"/>
+          <p:cNvPr id="221" name="Shape 7"/>
           <p:cNvSpPr/>
           <p:nvPr/>
         </p:nvSpPr>
         <p:spPr>
           <a:xfrm>
             <a:off x="320040" y="2587680"/>
-            <a:ext cx="8502840" cy="529200"/>
+            <a:ext cx="8502480" cy="528840"/>
           </a:xfrm>
           <a:prstGeom prst="rect">
             <a:avLst/>
@@ -11066,14 +11068,14 @@
       </p:sp>
       <p:sp>
         <p:nvSpPr>
-          <p:cNvPr id="221" name="Text 8"/>
+          <p:cNvPr id="222" name="Text 8"/>
           <p:cNvSpPr/>
           <p:nvPr/>
         </p:nvSpPr>
         <p:spPr>
           <a:xfrm>
             <a:off x="457200" y="2587680"/>
-            <a:ext cx="8228520" cy="529200"/>
+            <a:ext cx="8228160" cy="528840"/>
           </a:xfrm>
           <a:prstGeom prst="rect">
             <a:avLst/>
@@ -11139,14 +11141,14 @@
       </p:sp>
       <p:sp>
         <p:nvSpPr>
-          <p:cNvPr id="222" name="Shape 9"/>
+          <p:cNvPr id="223" name="Shape 9"/>
           <p:cNvSpPr/>
           <p:nvPr/>
         </p:nvSpPr>
         <p:spPr>
           <a:xfrm>
             <a:off x="320040" y="3209400"/>
-            <a:ext cx="8502840" cy="529200"/>
+            <a:ext cx="8502480" cy="528840"/>
           </a:xfrm>
           <a:prstGeom prst="rect">
             <a:avLst/>
@@ -11191,14 +11193,14 @@
       </p:sp>
       <p:sp>
         <p:nvSpPr>
-          <p:cNvPr id="223" name="Text 10"/>
+          <p:cNvPr id="224" name="Text 10"/>
           <p:cNvSpPr/>
           <p:nvPr/>
         </p:nvSpPr>
         <p:spPr>
           <a:xfrm>
             <a:off x="457200" y="3209400"/>
-            <a:ext cx="8228520" cy="529200"/>
+            <a:ext cx="8228160" cy="528840"/>
           </a:xfrm>
           <a:prstGeom prst="rect">
             <a:avLst/>
@@ -11264,14 +11266,14 @@
       </p:sp>
       <p:sp>
         <p:nvSpPr>
-          <p:cNvPr id="224" name="Shape 11"/>
+          <p:cNvPr id="225" name="Shape 11"/>
           <p:cNvSpPr/>
           <p:nvPr/>
         </p:nvSpPr>
         <p:spPr>
           <a:xfrm>
             <a:off x="320040" y="3831480"/>
-            <a:ext cx="8502840" cy="529200"/>
+            <a:ext cx="8502480" cy="528840"/>
           </a:xfrm>
           <a:prstGeom prst="rect">
             <a:avLst/>
@@ -11316,14 +11318,14 @@
       </p:sp>
       <p:sp>
         <p:nvSpPr>
-          <p:cNvPr id="225" name="Text 12"/>
+          <p:cNvPr id="226" name="Text 12"/>
           <p:cNvSpPr/>
           <p:nvPr/>
         </p:nvSpPr>
         <p:spPr>
           <a:xfrm>
             <a:off x="457200" y="3831480"/>
-            <a:ext cx="8228520" cy="529200"/>
+            <a:ext cx="8228160" cy="528840"/>
           </a:xfrm>
           <a:prstGeom prst="rect">
             <a:avLst/>
@@ -11389,14 +11391,14 @@
       </p:sp>
       <p:sp>
         <p:nvSpPr>
-          <p:cNvPr id="226" name="Shape 13"/>
+          <p:cNvPr id="227" name="Shape 13"/>
           <p:cNvSpPr/>
           <p:nvPr/>
         </p:nvSpPr>
         <p:spPr>
           <a:xfrm>
             <a:off x="0" y="4864680"/>
-            <a:ext cx="9142920" cy="277920"/>
+            <a:ext cx="9142560" cy="277560"/>
           </a:xfrm>
           <a:prstGeom prst="rect">
             <a:avLst/>
@@ -11441,14 +11443,14 @@
       </p:sp>
       <p:sp>
         <p:nvSpPr>
-          <p:cNvPr id="227" name="Text 14"/>
+          <p:cNvPr id="228" name="Text 14"/>
           <p:cNvSpPr/>
           <p:nvPr/>
         </p:nvSpPr>
         <p:spPr>
           <a:xfrm>
             <a:off x="164520" y="4864680"/>
-            <a:ext cx="8777160" cy="277920"/>
+            <a:ext cx="8776800" cy="277560"/>
           </a:xfrm>
           <a:prstGeom prst="rect">
             <a:avLst/>
@@ -11539,14 +11541,14 @@
       </p:grpSpPr>
       <p:sp>
         <p:nvSpPr>
-          <p:cNvPr id="228" name="Shape 0"/>
+          <p:cNvPr id="229" name="Shape 0"/>
           <p:cNvSpPr/>
           <p:nvPr/>
         </p:nvSpPr>
         <p:spPr>
           <a:xfrm>
             <a:off x="0" y="0"/>
-            <a:ext cx="9142920" cy="291600"/>
+            <a:ext cx="9142560" cy="291240"/>
           </a:xfrm>
           <a:prstGeom prst="rect">
             <a:avLst/>
@@ -11591,14 +11593,14 @@
       </p:sp>
       <p:sp>
         <p:nvSpPr>
-          <p:cNvPr id="229" name="Text 1"/>
+          <p:cNvPr id="230" name="Text 1"/>
           <p:cNvSpPr/>
           <p:nvPr/>
         </p:nvSpPr>
         <p:spPr>
           <a:xfrm>
             <a:off x="164520" y="0"/>
-            <a:ext cx="8777160" cy="291600"/>
+            <a:ext cx="8776800" cy="291240"/>
           </a:xfrm>
           <a:prstGeom prst="rect">
             <a:avLst/>
@@ -11652,14 +11654,14 @@
       </p:sp>
       <p:sp>
         <p:nvSpPr>
-          <p:cNvPr id="230" name="Text 2"/>
+          <p:cNvPr id="231" name="Text 2"/>
           <p:cNvSpPr/>
           <p:nvPr/>
         </p:nvSpPr>
         <p:spPr>
           <a:xfrm>
             <a:off x="320040" y="685800"/>
-            <a:ext cx="8502840" cy="913320"/>
+            <a:ext cx="8502480" cy="912960"/>
           </a:xfrm>
           <a:prstGeom prst="rect">
             <a:avLst/>
@@ -11713,14 +11715,14 @@
       </p:sp>
       <p:sp>
         <p:nvSpPr>
-          <p:cNvPr id="231" name="Text 3"/>
+          <p:cNvPr id="232" name="Text 3"/>
           <p:cNvSpPr/>
           <p:nvPr/>
         </p:nvSpPr>
         <p:spPr>
           <a:xfrm>
             <a:off x="320040" y="1600200"/>
-            <a:ext cx="8502840" cy="913320"/>
+            <a:ext cx="8502480" cy="912960"/>
           </a:xfrm>
           <a:prstGeom prst="rect">
             <a:avLst/>
@@ -11774,7 +11776,7 @@
       </p:sp>
       <p:sp>
         <p:nvSpPr>
-          <p:cNvPr id="232" name="Shape 4"/>
+          <p:cNvPr id="233" name="Shape 4"/>
           <p:cNvSpPr/>
           <p:nvPr/>
         </p:nvSpPr>
@@ -11818,14 +11820,14 @@
       </p:sp>
       <p:sp>
         <p:nvSpPr>
-          <p:cNvPr id="233" name="Text 5"/>
+          <p:cNvPr id="234" name="Text 5"/>
           <p:cNvSpPr/>
           <p:nvPr/>
         </p:nvSpPr>
         <p:spPr>
           <a:xfrm>
             <a:off x="320040" y="2788920"/>
-            <a:ext cx="8502840" cy="456120"/>
+            <a:ext cx="8502480" cy="455760"/>
           </a:xfrm>
           <a:prstGeom prst="rect">
             <a:avLst/>
@@ -11879,14 +11881,14 @@
       </p:sp>
       <p:sp>
         <p:nvSpPr>
-          <p:cNvPr id="234" name="Text 6"/>
+          <p:cNvPr id="235" name="Text 6"/>
           <p:cNvSpPr/>
           <p:nvPr/>
         </p:nvSpPr>
         <p:spPr>
           <a:xfrm>
             <a:off x="320040" y="3246120"/>
-            <a:ext cx="8502840" cy="639000"/>
+            <a:ext cx="8502480" cy="638640"/>
           </a:xfrm>
           <a:prstGeom prst="rect">
             <a:avLst/>
@@ -11940,14 +11942,14 @@
       </p:sp>
       <p:sp>
         <p:nvSpPr>
-          <p:cNvPr id="235" name="Shape 7"/>
+          <p:cNvPr id="236" name="Shape 7"/>
           <p:cNvSpPr/>
           <p:nvPr/>
         </p:nvSpPr>
         <p:spPr>
           <a:xfrm>
             <a:off x="0" y="4864680"/>
-            <a:ext cx="9142920" cy="277920"/>
+            <a:ext cx="9142560" cy="277560"/>
           </a:xfrm>
           <a:prstGeom prst="rect">
             <a:avLst/>
@@ -11992,14 +11994,14 @@
       </p:sp>
       <p:sp>
         <p:nvSpPr>
-          <p:cNvPr id="236" name="Text 8"/>
+          <p:cNvPr id="237" name="Text 8"/>
           <p:cNvSpPr/>
           <p:nvPr/>
         </p:nvSpPr>
         <p:spPr>
           <a:xfrm>
             <a:off x="164520" y="4864680"/>
-            <a:ext cx="8777160" cy="277920"/>
+            <a:ext cx="8776800" cy="277560"/>
           </a:xfrm>
           <a:prstGeom prst="rect">
             <a:avLst/>
@@ -12090,14 +12092,14 @@
       </p:grpSpPr>
       <p:sp>
         <p:nvSpPr>
-          <p:cNvPr id="237" name="Shape 0"/>
+          <p:cNvPr id="238" name="Shape 0"/>
           <p:cNvSpPr/>
           <p:nvPr/>
         </p:nvSpPr>
         <p:spPr>
           <a:xfrm>
             <a:off x="0" y="0"/>
-            <a:ext cx="9142920" cy="291600"/>
+            <a:ext cx="9142560" cy="291240"/>
           </a:xfrm>
           <a:prstGeom prst="rect">
             <a:avLst/>
@@ -12142,14 +12144,14 @@
       </p:sp>
       <p:sp>
         <p:nvSpPr>
-          <p:cNvPr id="238" name="Text 1"/>
+          <p:cNvPr id="239" name="Text 1"/>
           <p:cNvSpPr/>
           <p:nvPr/>
         </p:nvSpPr>
         <p:spPr>
           <a:xfrm>
             <a:off x="164520" y="0"/>
-            <a:ext cx="8777160" cy="291600"/>
+            <a:ext cx="8776800" cy="291240"/>
           </a:xfrm>
           <a:prstGeom prst="rect">
             <a:avLst/>
@@ -12203,14 +12205,14 @@
       </p:sp>
       <p:sp>
         <p:nvSpPr>
-          <p:cNvPr id="239" name="Text 2"/>
+          <p:cNvPr id="240" name="Text 2"/>
           <p:cNvSpPr/>
           <p:nvPr/>
         </p:nvSpPr>
         <p:spPr>
           <a:xfrm>
             <a:off x="320040" y="502920"/>
-            <a:ext cx="8502840" cy="547560"/>
+            <a:ext cx="8502480" cy="547200"/>
           </a:xfrm>
           <a:prstGeom prst="rect">
             <a:avLst/>
@@ -12264,7 +12266,7 @@
       </p:sp>
       <p:sp>
         <p:nvSpPr>
-          <p:cNvPr id="240" name="Shape 3"/>
+          <p:cNvPr id="241" name="Shape 3"/>
           <p:cNvSpPr/>
           <p:nvPr/>
         </p:nvSpPr>
@@ -12308,14 +12310,14 @@
       </p:sp>
       <p:sp>
         <p:nvSpPr>
-          <p:cNvPr id="241" name="Shape 4"/>
+          <p:cNvPr id="242" name="Shape 4"/>
           <p:cNvSpPr/>
           <p:nvPr/>
         </p:nvSpPr>
         <p:spPr>
           <a:xfrm>
             <a:off x="320040" y="1261800"/>
-            <a:ext cx="501840" cy="501840"/>
+            <a:ext cx="501480" cy="501480"/>
           </a:xfrm>
           <a:prstGeom prst="rect">
             <a:avLst/>
@@ -12360,14 +12362,14 @@
       </p:sp>
       <p:sp>
         <p:nvSpPr>
-          <p:cNvPr id="242" name="Text 5"/>
+          <p:cNvPr id="243" name="Text 5"/>
           <p:cNvSpPr/>
           <p:nvPr/>
         </p:nvSpPr>
         <p:spPr>
           <a:xfrm>
             <a:off x="320040" y="1261800"/>
-            <a:ext cx="501840" cy="501840"/>
+            <a:ext cx="501480" cy="501480"/>
           </a:xfrm>
           <a:prstGeom prst="rect">
             <a:avLst/>
@@ -12421,14 +12423,14 @@
       </p:sp>
       <p:sp>
         <p:nvSpPr>
-          <p:cNvPr id="243" name="Text 6"/>
+          <p:cNvPr id="244" name="Text 6"/>
           <p:cNvSpPr/>
           <p:nvPr/>
         </p:nvSpPr>
         <p:spPr>
           <a:xfrm>
             <a:off x="960120" y="1289160"/>
-            <a:ext cx="7771320" cy="474480"/>
+            <a:ext cx="7770960" cy="474120"/>
           </a:xfrm>
           <a:prstGeom prst="rect">
             <a:avLst/>
@@ -12482,14 +12484,14 @@
       </p:sp>
       <p:sp>
         <p:nvSpPr>
-          <p:cNvPr id="244" name="Shape 7"/>
+          <p:cNvPr id="245" name="Shape 7"/>
           <p:cNvSpPr/>
           <p:nvPr/>
         </p:nvSpPr>
         <p:spPr>
           <a:xfrm>
             <a:off x="320040" y="1883520"/>
-            <a:ext cx="501840" cy="501840"/>
+            <a:ext cx="501480" cy="501480"/>
           </a:xfrm>
           <a:prstGeom prst="rect">
             <a:avLst/>
@@ -12534,14 +12536,14 @@
       </p:sp>
       <p:sp>
         <p:nvSpPr>
-          <p:cNvPr id="245" name="Text 8"/>
+          <p:cNvPr id="246" name="Text 8"/>
           <p:cNvSpPr/>
           <p:nvPr/>
         </p:nvSpPr>
         <p:spPr>
           <a:xfrm>
             <a:off x="320040" y="1883520"/>
-            <a:ext cx="501840" cy="501840"/>
+            <a:ext cx="501480" cy="501480"/>
           </a:xfrm>
           <a:prstGeom prst="rect">
             <a:avLst/>
@@ -12595,14 +12597,14 @@
       </p:sp>
       <p:sp>
         <p:nvSpPr>
-          <p:cNvPr id="246" name="Text 9"/>
+          <p:cNvPr id="247" name="Text 9"/>
           <p:cNvSpPr/>
           <p:nvPr/>
         </p:nvSpPr>
         <p:spPr>
           <a:xfrm>
             <a:off x="960120" y="1911240"/>
-            <a:ext cx="7771320" cy="474480"/>
+            <a:ext cx="7770960" cy="474120"/>
           </a:xfrm>
           <a:prstGeom prst="rect">
             <a:avLst/>
@@ -12656,14 +12658,14 @@
       </p:sp>
       <p:sp>
         <p:nvSpPr>
-          <p:cNvPr id="247" name="Shape 10"/>
+          <p:cNvPr id="248" name="Shape 10"/>
           <p:cNvSpPr/>
           <p:nvPr/>
         </p:nvSpPr>
         <p:spPr>
           <a:xfrm>
             <a:off x="320040" y="2505600"/>
-            <a:ext cx="501840" cy="501840"/>
+            <a:ext cx="501480" cy="501480"/>
           </a:xfrm>
           <a:prstGeom prst="rect">
             <a:avLst/>
@@ -12708,14 +12710,14 @@
       </p:sp>
       <p:sp>
         <p:nvSpPr>
-          <p:cNvPr id="248" name="Text 11"/>
+          <p:cNvPr id="249" name="Text 11"/>
           <p:cNvSpPr/>
           <p:nvPr/>
         </p:nvSpPr>
         <p:spPr>
           <a:xfrm>
             <a:off x="320040" y="2505600"/>
-            <a:ext cx="501840" cy="501840"/>
+            <a:ext cx="501480" cy="501480"/>
           </a:xfrm>
           <a:prstGeom prst="rect">
             <a:avLst/>
@@ -12769,14 +12771,14 @@
       </p:sp>
       <p:sp>
         <p:nvSpPr>
-          <p:cNvPr id="249" name="Text 12"/>
+          <p:cNvPr id="250" name="Text 12"/>
           <p:cNvSpPr/>
           <p:nvPr/>
         </p:nvSpPr>
         <p:spPr>
           <a:xfrm>
             <a:off x="960120" y="2532960"/>
-            <a:ext cx="7771320" cy="474480"/>
+            <a:ext cx="7770960" cy="474120"/>
           </a:xfrm>
           <a:prstGeom prst="rect">
             <a:avLst/>
@@ -12830,14 +12832,14 @@
       </p:sp>
       <p:sp>
         <p:nvSpPr>
-          <p:cNvPr id="250" name="Shape 13"/>
+          <p:cNvPr id="251" name="Shape 13"/>
           <p:cNvSpPr/>
           <p:nvPr/>
         </p:nvSpPr>
         <p:spPr>
           <a:xfrm>
             <a:off x="320040" y="3127320"/>
-            <a:ext cx="501840" cy="501840"/>
+            <a:ext cx="501480" cy="501480"/>
           </a:xfrm>
           <a:prstGeom prst="rect">
             <a:avLst/>
@@ -12882,14 +12884,14 @@
       </p:sp>
       <p:sp>
         <p:nvSpPr>
-          <p:cNvPr id="251" name="Text 14"/>
+          <p:cNvPr id="252" name="Text 14"/>
           <p:cNvSpPr/>
           <p:nvPr/>
         </p:nvSpPr>
         <p:spPr>
           <a:xfrm>
             <a:off x="320040" y="3127320"/>
-            <a:ext cx="501840" cy="501840"/>
+            <a:ext cx="501480" cy="501480"/>
           </a:xfrm>
           <a:prstGeom prst="rect">
             <a:avLst/>
@@ -12943,14 +12945,14 @@
       </p:sp>
       <p:sp>
         <p:nvSpPr>
-          <p:cNvPr id="252" name="Text 15"/>
+          <p:cNvPr id="253" name="Text 15"/>
           <p:cNvSpPr/>
           <p:nvPr/>
         </p:nvSpPr>
         <p:spPr>
           <a:xfrm>
             <a:off x="960120" y="3154680"/>
-            <a:ext cx="7771320" cy="474480"/>
+            <a:ext cx="7770960" cy="474120"/>
           </a:xfrm>
           <a:prstGeom prst="rect">
             <a:avLst/>
@@ -13004,14 +13006,14 @@
       </p:sp>
       <p:sp>
         <p:nvSpPr>
-          <p:cNvPr id="253" name="Shape 16"/>
+          <p:cNvPr id="254" name="Shape 16"/>
           <p:cNvSpPr/>
           <p:nvPr/>
         </p:nvSpPr>
         <p:spPr>
           <a:xfrm>
             <a:off x="320040" y="3749040"/>
-            <a:ext cx="501840" cy="501840"/>
+            <a:ext cx="501480" cy="501480"/>
           </a:xfrm>
           <a:prstGeom prst="rect">
             <a:avLst/>
@@ -13056,14 +13058,14 @@
       </p:sp>
       <p:sp>
         <p:nvSpPr>
-          <p:cNvPr id="254" name="Text 17"/>
+          <p:cNvPr id="255" name="Text 17"/>
           <p:cNvSpPr/>
           <p:nvPr/>
         </p:nvSpPr>
         <p:spPr>
           <a:xfrm>
             <a:off x="320040" y="3749040"/>
-            <a:ext cx="501840" cy="501840"/>
+            <a:ext cx="501480" cy="501480"/>
           </a:xfrm>
           <a:prstGeom prst="rect">
             <a:avLst/>
@@ -13117,14 +13119,14 @@
       </p:sp>
       <p:sp>
         <p:nvSpPr>
-          <p:cNvPr id="255" name="Text 18"/>
+          <p:cNvPr id="256" name="Text 18"/>
           <p:cNvSpPr/>
           <p:nvPr/>
         </p:nvSpPr>
         <p:spPr>
           <a:xfrm>
             <a:off x="960120" y="3776400"/>
-            <a:ext cx="7771320" cy="474480"/>
+            <a:ext cx="7770960" cy="474120"/>
           </a:xfrm>
           <a:prstGeom prst="rect">
             <a:avLst/>
@@ -13178,14 +13180,14 @@
       </p:sp>
       <p:sp>
         <p:nvSpPr>
-          <p:cNvPr id="256" name="Shape 19"/>
+          <p:cNvPr id="257" name="Shape 19"/>
           <p:cNvSpPr/>
           <p:nvPr/>
         </p:nvSpPr>
         <p:spPr>
           <a:xfrm>
             <a:off x="320040" y="4434840"/>
-            <a:ext cx="8502840" cy="346320"/>
+            <a:ext cx="8502480" cy="345960"/>
           </a:xfrm>
           <a:prstGeom prst="rect">
             <a:avLst/>
@@ -13230,14 +13232,14 @@
       </p:sp>
       <p:sp>
         <p:nvSpPr>
-          <p:cNvPr id="257" name="Text 20"/>
+          <p:cNvPr id="258" name="Text 20"/>
           <p:cNvSpPr/>
           <p:nvPr/>
         </p:nvSpPr>
         <p:spPr>
           <a:xfrm>
             <a:off x="411480" y="4434840"/>
-            <a:ext cx="8319960" cy="346320"/>
+            <a:ext cx="8319600" cy="345960"/>
           </a:xfrm>
           <a:prstGeom prst="rect">
             <a:avLst/>
@@ -13303,14 +13305,14 @@
       </p:sp>
       <p:sp>
         <p:nvSpPr>
-          <p:cNvPr id="258" name="Shape 21"/>
+          <p:cNvPr id="259" name="Shape 21"/>
           <p:cNvSpPr/>
           <p:nvPr/>
         </p:nvSpPr>
         <p:spPr>
           <a:xfrm>
             <a:off x="0" y="4864680"/>
-            <a:ext cx="9142920" cy="277920"/>
+            <a:ext cx="9142560" cy="277560"/>
           </a:xfrm>
           <a:prstGeom prst="rect">
             <a:avLst/>
@@ -13355,14 +13357,14 @@
       </p:sp>
       <p:sp>
         <p:nvSpPr>
-          <p:cNvPr id="259" name="Text 22"/>
+          <p:cNvPr id="260" name="Text 22"/>
           <p:cNvSpPr/>
           <p:nvPr/>
         </p:nvSpPr>
         <p:spPr>
           <a:xfrm>
             <a:off x="164520" y="4864680"/>
-            <a:ext cx="8777160" cy="277920"/>
+            <a:ext cx="8776800" cy="277560"/>
           </a:xfrm>
           <a:prstGeom prst="rect">
             <a:avLst/>
@@ -13453,14 +13455,14 @@
       </p:grpSpPr>
       <p:sp>
         <p:nvSpPr>
-          <p:cNvPr id="260" name="Shape 0"/>
+          <p:cNvPr id="261" name="Shape 0"/>
           <p:cNvSpPr/>
           <p:nvPr/>
         </p:nvSpPr>
         <p:spPr>
           <a:xfrm>
             <a:off x="0" y="0"/>
-            <a:ext cx="9142920" cy="291600"/>
+            <a:ext cx="9142560" cy="291240"/>
           </a:xfrm>
           <a:prstGeom prst="rect">
             <a:avLst/>
@@ -13505,14 +13507,14 @@
       </p:sp>
       <p:sp>
         <p:nvSpPr>
-          <p:cNvPr id="261" name="Text 1"/>
+          <p:cNvPr id="262" name="Text 1"/>
           <p:cNvSpPr/>
           <p:nvPr/>
         </p:nvSpPr>
         <p:spPr>
           <a:xfrm>
             <a:off x="164520" y="0"/>
-            <a:ext cx="8777160" cy="291600"/>
+            <a:ext cx="8776800" cy="291240"/>
           </a:xfrm>
           <a:prstGeom prst="rect">
             <a:avLst/>
@@ -13566,14 +13568,14 @@
       </p:sp>
       <p:sp>
         <p:nvSpPr>
-          <p:cNvPr id="262" name="Text 2"/>
+          <p:cNvPr id="263" name="Text 2"/>
           <p:cNvSpPr/>
           <p:nvPr/>
         </p:nvSpPr>
         <p:spPr>
           <a:xfrm>
             <a:off x="320040" y="502920"/>
-            <a:ext cx="8502840" cy="547560"/>
+            <a:ext cx="8502480" cy="547200"/>
           </a:xfrm>
           <a:prstGeom prst="rect">
             <a:avLst/>
@@ -13627,7 +13629,7 @@
       </p:sp>
       <p:sp>
         <p:nvSpPr>
-          <p:cNvPr id="263" name="Shape 3"/>
+          <p:cNvPr id="264" name="Shape 3"/>
           <p:cNvSpPr/>
           <p:nvPr/>
         </p:nvSpPr>
@@ -13671,14 +13673,14 @@
       </p:sp>
       <p:sp>
         <p:nvSpPr>
-          <p:cNvPr id="264" name="Text 4"/>
+          <p:cNvPr id="265" name="Text 4"/>
           <p:cNvSpPr/>
           <p:nvPr/>
         </p:nvSpPr>
         <p:spPr>
           <a:xfrm>
             <a:off x="320040" y="1234440"/>
-            <a:ext cx="4113720" cy="410400"/>
+            <a:ext cx="4113360" cy="410040"/>
           </a:xfrm>
           <a:prstGeom prst="rect">
             <a:avLst/>
@@ -13732,7 +13734,7 @@
       </p:sp>
       <p:sp>
         <p:nvSpPr>
-          <p:cNvPr id="265" name="Shape 5"/>
+          <p:cNvPr id="266" name="Shape 5"/>
           <p:cNvSpPr/>
           <p:nvPr/>
         </p:nvSpPr>
@@ -13776,14 +13778,14 @@
       </p:sp>
       <p:sp>
         <p:nvSpPr>
-          <p:cNvPr id="266" name="Text 6"/>
+          <p:cNvPr id="267" name="Text 6"/>
           <p:cNvSpPr/>
           <p:nvPr/>
         </p:nvSpPr>
         <p:spPr>
           <a:xfrm>
             <a:off x="457200" y="1810440"/>
-            <a:ext cx="3839400" cy="474480"/>
+            <a:ext cx="3839040" cy="474120"/>
           </a:xfrm>
           <a:prstGeom prst="rect">
             <a:avLst/>
@@ -13837,14 +13839,14 @@
       </p:sp>
       <p:sp>
         <p:nvSpPr>
-          <p:cNvPr id="267" name="Text 7"/>
+          <p:cNvPr id="268" name="Text 7"/>
           <p:cNvSpPr/>
           <p:nvPr/>
         </p:nvSpPr>
         <p:spPr>
           <a:xfrm>
             <a:off x="457200" y="2359080"/>
-            <a:ext cx="3839400" cy="474480"/>
+            <a:ext cx="3839040" cy="474120"/>
           </a:xfrm>
           <a:prstGeom prst="rect">
             <a:avLst/>
@@ -13898,14 +13900,14 @@
       </p:sp>
       <p:sp>
         <p:nvSpPr>
-          <p:cNvPr id="268" name="Text 8"/>
+          <p:cNvPr id="269" name="Text 8"/>
           <p:cNvSpPr/>
           <p:nvPr/>
         </p:nvSpPr>
         <p:spPr>
           <a:xfrm>
             <a:off x="457200" y="2907720"/>
-            <a:ext cx="3839400" cy="474480"/>
+            <a:ext cx="3839040" cy="474120"/>
           </a:xfrm>
           <a:prstGeom prst="rect">
             <a:avLst/>
@@ -13959,14 +13961,14 @@
       </p:sp>
       <p:sp>
         <p:nvSpPr>
-          <p:cNvPr id="269" name="Text 9"/>
+          <p:cNvPr id="270" name="Text 9"/>
           <p:cNvSpPr/>
           <p:nvPr/>
         </p:nvSpPr>
         <p:spPr>
           <a:xfrm>
             <a:off x="457200" y="3456360"/>
-            <a:ext cx="3839400" cy="474480"/>
+            <a:ext cx="3839040" cy="474120"/>
           </a:xfrm>
           <a:prstGeom prst="rect">
             <a:avLst/>
@@ -14020,14 +14022,14 @@
       </p:sp>
       <p:sp>
         <p:nvSpPr>
-          <p:cNvPr id="270" name="Text 10"/>
+          <p:cNvPr id="271" name="Text 10"/>
           <p:cNvSpPr/>
           <p:nvPr/>
         </p:nvSpPr>
         <p:spPr>
           <a:xfrm>
             <a:off x="4709160" y="1234440"/>
-            <a:ext cx="4113720" cy="410400"/>
+            <a:ext cx="4113360" cy="410040"/>
           </a:xfrm>
           <a:prstGeom prst="rect">
             <a:avLst/>
@@ -14081,7 +14083,7 @@
       </p:sp>
       <p:sp>
         <p:nvSpPr>
-          <p:cNvPr id="271" name="Shape 11"/>
+          <p:cNvPr id="272" name="Shape 11"/>
           <p:cNvSpPr/>
           <p:nvPr/>
         </p:nvSpPr>
@@ -14125,14 +14127,14 @@
       </p:sp>
       <p:sp>
         <p:nvSpPr>
-          <p:cNvPr id="272" name="Text 12"/>
+          <p:cNvPr id="273" name="Text 12"/>
           <p:cNvSpPr/>
           <p:nvPr/>
         </p:nvSpPr>
         <p:spPr>
           <a:xfrm>
             <a:off x="4846320" y="1810440"/>
-            <a:ext cx="3839400" cy="474480"/>
+            <a:ext cx="3839040" cy="474120"/>
           </a:xfrm>
           <a:prstGeom prst="rect">
             <a:avLst/>
@@ -14186,14 +14188,14 @@
       </p:sp>
       <p:sp>
         <p:nvSpPr>
-          <p:cNvPr id="273" name="Text 13"/>
+          <p:cNvPr id="274" name="Text 13"/>
           <p:cNvSpPr/>
           <p:nvPr/>
         </p:nvSpPr>
         <p:spPr>
           <a:xfrm>
             <a:off x="4846320" y="2359080"/>
-            <a:ext cx="3839400" cy="474480"/>
+            <a:ext cx="3839040" cy="474120"/>
           </a:xfrm>
           <a:prstGeom prst="rect">
             <a:avLst/>
@@ -14247,14 +14249,14 @@
       </p:sp>
       <p:sp>
         <p:nvSpPr>
-          <p:cNvPr id="274" name="Text 14"/>
+          <p:cNvPr id="275" name="Text 14"/>
           <p:cNvSpPr/>
           <p:nvPr/>
         </p:nvSpPr>
         <p:spPr>
           <a:xfrm>
             <a:off x="4846320" y="2907720"/>
-            <a:ext cx="3839400" cy="474480"/>
+            <a:ext cx="3839040" cy="474120"/>
           </a:xfrm>
           <a:prstGeom prst="rect">
             <a:avLst/>
@@ -14308,14 +14310,14 @@
       </p:sp>
       <p:sp>
         <p:nvSpPr>
-          <p:cNvPr id="275" name="Text 15"/>
+          <p:cNvPr id="276" name="Text 15"/>
           <p:cNvSpPr/>
           <p:nvPr/>
         </p:nvSpPr>
         <p:spPr>
           <a:xfrm>
             <a:off x="4846320" y="3456360"/>
-            <a:ext cx="3839400" cy="474480"/>
+            <a:ext cx="3839040" cy="474120"/>
           </a:xfrm>
           <a:prstGeom prst="rect">
             <a:avLst/>
@@ -14369,14 +14371,14 @@
       </p:sp>
       <p:sp>
         <p:nvSpPr>
-          <p:cNvPr id="276" name="Text 16"/>
+          <p:cNvPr id="277" name="Text 16"/>
           <p:cNvSpPr/>
           <p:nvPr/>
         </p:nvSpPr>
         <p:spPr>
           <a:xfrm>
             <a:off x="4206240" y="2468880"/>
-            <a:ext cx="730440" cy="547560"/>
+            <a:ext cx="730080" cy="547200"/>
           </a:xfrm>
           <a:prstGeom prst="rect">
             <a:avLst/>
@@ -14430,14 +14432,14 @@
       </p:sp>
       <p:sp>
         <p:nvSpPr>
-          <p:cNvPr id="277" name="Shape 17"/>
+          <p:cNvPr id="278" name="Shape 17"/>
           <p:cNvSpPr/>
           <p:nvPr/>
         </p:nvSpPr>
         <p:spPr>
           <a:xfrm>
             <a:off x="0" y="4864680"/>
-            <a:ext cx="9142920" cy="277920"/>
+            <a:ext cx="9142560" cy="277560"/>
           </a:xfrm>
           <a:prstGeom prst="rect">
             <a:avLst/>
@@ -14482,14 +14484,14 @@
       </p:sp>
       <p:sp>
         <p:nvSpPr>
-          <p:cNvPr id="278" name="Text 18"/>
+          <p:cNvPr id="279" name="Text 18"/>
           <p:cNvSpPr/>
           <p:nvPr/>
         </p:nvSpPr>
         <p:spPr>
           <a:xfrm>
             <a:off x="164520" y="4864680"/>
-            <a:ext cx="8777160" cy="277920"/>
+            <a:ext cx="8776800" cy="277560"/>
           </a:xfrm>
           <a:prstGeom prst="rect">
             <a:avLst/>
@@ -14580,14 +14582,14 @@
       </p:grpSpPr>
       <p:sp>
         <p:nvSpPr>
-          <p:cNvPr id="279" name="Shape 0"/>
+          <p:cNvPr id="280" name="Shape 0"/>
           <p:cNvSpPr/>
           <p:nvPr/>
         </p:nvSpPr>
         <p:spPr>
           <a:xfrm>
             <a:off x="0" y="0"/>
-            <a:ext cx="9142920" cy="291600"/>
+            <a:ext cx="9142560" cy="291240"/>
           </a:xfrm>
           <a:prstGeom prst="rect">
             <a:avLst/>
@@ -14632,14 +14634,14 @@
       </p:sp>
       <p:sp>
         <p:nvSpPr>
-          <p:cNvPr id="280" name="Text 1"/>
+          <p:cNvPr id="281" name="Text 1"/>
           <p:cNvSpPr/>
           <p:nvPr/>
         </p:nvSpPr>
         <p:spPr>
           <a:xfrm>
             <a:off x="164520" y="0"/>
-            <a:ext cx="8777160" cy="291600"/>
+            <a:ext cx="8776800" cy="291240"/>
           </a:xfrm>
           <a:prstGeom prst="rect">
             <a:avLst/>
@@ -14693,14 +14695,14 @@
       </p:sp>
       <p:sp>
         <p:nvSpPr>
-          <p:cNvPr id="281" name="Text 2"/>
+          <p:cNvPr id="282" name="Text 2"/>
           <p:cNvSpPr/>
           <p:nvPr/>
         </p:nvSpPr>
         <p:spPr>
           <a:xfrm>
             <a:off x="320040" y="502920"/>
-            <a:ext cx="8502840" cy="547560"/>
+            <a:ext cx="8502480" cy="547200"/>
           </a:xfrm>
           <a:prstGeom prst="rect">
             <a:avLst/>
@@ -14754,7 +14756,7 @@
       </p:sp>
       <p:sp>
         <p:nvSpPr>
-          <p:cNvPr id="282" name="Shape 3"/>
+          <p:cNvPr id="283" name="Shape 3"/>
           <p:cNvSpPr/>
           <p:nvPr/>
         </p:nvSpPr>
@@ -14798,14 +14800,14 @@
       </p:sp>
       <p:sp>
         <p:nvSpPr>
-          <p:cNvPr id="283" name="Shape 4"/>
+          <p:cNvPr id="284" name="Shape 4"/>
           <p:cNvSpPr/>
           <p:nvPr/>
         </p:nvSpPr>
         <p:spPr>
           <a:xfrm>
             <a:off x="320040" y="1170360"/>
-            <a:ext cx="8502840" cy="383040"/>
+            <a:ext cx="8502480" cy="382680"/>
           </a:xfrm>
           <a:prstGeom prst="rect">
             <a:avLst/>
@@ -14850,14 +14852,14 @@
       </p:sp>
       <p:sp>
         <p:nvSpPr>
-          <p:cNvPr id="284" name="Text 5"/>
+          <p:cNvPr id="285" name="Text 5"/>
           <p:cNvSpPr/>
           <p:nvPr/>
         </p:nvSpPr>
         <p:spPr>
           <a:xfrm>
             <a:off x="457200" y="1170360"/>
-            <a:ext cx="1644840" cy="383040"/>
+            <a:ext cx="1644480" cy="382680"/>
           </a:xfrm>
           <a:prstGeom prst="rect">
             <a:avLst/>
@@ -14911,14 +14913,14 @@
       </p:sp>
       <p:sp>
         <p:nvSpPr>
-          <p:cNvPr id="285" name="Text 6"/>
+          <p:cNvPr id="286" name="Text 6"/>
           <p:cNvSpPr/>
           <p:nvPr/>
         </p:nvSpPr>
         <p:spPr>
           <a:xfrm>
             <a:off x="2743200" y="1170360"/>
-            <a:ext cx="913320" cy="383040"/>
+            <a:ext cx="912960" cy="382680"/>
           </a:xfrm>
           <a:prstGeom prst="rect">
             <a:avLst/>
@@ -14972,14 +14974,14 @@
       </p:sp>
       <p:sp>
         <p:nvSpPr>
-          <p:cNvPr id="286" name="Text 7"/>
+          <p:cNvPr id="287" name="Text 7"/>
           <p:cNvSpPr/>
           <p:nvPr/>
         </p:nvSpPr>
         <p:spPr>
           <a:xfrm>
             <a:off x="3977640" y="1170360"/>
-            <a:ext cx="1644840" cy="383040"/>
+            <a:ext cx="1644480" cy="382680"/>
           </a:xfrm>
           <a:prstGeom prst="rect">
             <a:avLst/>
@@ -15033,14 +15035,14 @@
       </p:sp>
       <p:sp>
         <p:nvSpPr>
-          <p:cNvPr id="287" name="Text 8"/>
+          <p:cNvPr id="288" name="Text 8"/>
           <p:cNvSpPr/>
           <p:nvPr/>
         </p:nvSpPr>
         <p:spPr>
           <a:xfrm>
             <a:off x="5897880" y="1170360"/>
-            <a:ext cx="821880" cy="383040"/>
+            <a:ext cx="821520" cy="382680"/>
           </a:xfrm>
           <a:prstGeom prst="rect">
             <a:avLst/>
@@ -15094,14 +15096,14 @@
       </p:sp>
       <p:sp>
         <p:nvSpPr>
-          <p:cNvPr id="288" name="Text 9"/>
+          <p:cNvPr id="289" name="Text 9"/>
           <p:cNvSpPr/>
           <p:nvPr/>
         </p:nvSpPr>
         <p:spPr>
           <a:xfrm>
             <a:off x="6995160" y="1170360"/>
-            <a:ext cx="1644840" cy="383040"/>
+            <a:ext cx="1644480" cy="382680"/>
           </a:xfrm>
           <a:prstGeom prst="rect">
             <a:avLst/>
@@ -15155,14 +15157,14 @@
       </p:sp>
       <p:sp>
         <p:nvSpPr>
-          <p:cNvPr id="289" name="Shape 10"/>
+          <p:cNvPr id="290" name="Shape 10"/>
           <p:cNvSpPr/>
           <p:nvPr/>
         </p:nvSpPr>
         <p:spPr>
           <a:xfrm>
             <a:off x="320040" y="1591200"/>
-            <a:ext cx="8502840" cy="602280"/>
+            <a:ext cx="8502480" cy="601920"/>
           </a:xfrm>
           <a:prstGeom prst="rect">
             <a:avLst/>
@@ -15207,14 +15209,14 @@
       </p:sp>
       <p:sp>
         <p:nvSpPr>
-          <p:cNvPr id="290" name="Text 11"/>
+          <p:cNvPr id="291" name="Text 11"/>
           <p:cNvSpPr/>
           <p:nvPr/>
         </p:nvSpPr>
         <p:spPr>
           <a:xfrm>
             <a:off x="457200" y="1591200"/>
-            <a:ext cx="2102040" cy="602280"/>
+            <a:ext cx="2101680" cy="601920"/>
           </a:xfrm>
           <a:prstGeom prst="rect">
             <a:avLst/>
@@ -15268,14 +15270,14 @@
       </p:sp>
       <p:sp>
         <p:nvSpPr>
-          <p:cNvPr id="291" name="Text 12"/>
+          <p:cNvPr id="292" name="Text 12"/>
           <p:cNvSpPr/>
           <p:nvPr/>
         </p:nvSpPr>
         <p:spPr>
           <a:xfrm>
             <a:off x="2743200" y="1591200"/>
-            <a:ext cx="1050480" cy="602280"/>
+            <a:ext cx="1050120" cy="601920"/>
           </a:xfrm>
           <a:prstGeom prst="rect">
             <a:avLst/>
@@ -15329,14 +15331,14 @@
       </p:sp>
       <p:sp>
         <p:nvSpPr>
-          <p:cNvPr id="292" name="Text 13"/>
+          <p:cNvPr id="293" name="Text 13"/>
           <p:cNvSpPr/>
           <p:nvPr/>
         </p:nvSpPr>
         <p:spPr>
           <a:xfrm>
             <a:off x="3977640" y="1591200"/>
-            <a:ext cx="1690560" cy="602280"/>
+            <a:ext cx="1690200" cy="601920"/>
           </a:xfrm>
           <a:prstGeom prst="rect">
             <a:avLst/>
@@ -15390,14 +15392,14 @@
       </p:sp>
       <p:sp>
         <p:nvSpPr>
-          <p:cNvPr id="293" name="Text 14"/>
+          <p:cNvPr id="294" name="Text 14"/>
           <p:cNvSpPr/>
           <p:nvPr/>
         </p:nvSpPr>
         <p:spPr>
           <a:xfrm>
             <a:off x="5897880" y="1591200"/>
-            <a:ext cx="867600" cy="602280"/>
+            <a:ext cx="867240" cy="601920"/>
           </a:xfrm>
           <a:prstGeom prst="rect">
             <a:avLst/>
@@ -15451,14 +15453,14 @@
       </p:sp>
       <p:sp>
         <p:nvSpPr>
-          <p:cNvPr id="294" name="Text 15"/>
+          <p:cNvPr id="295" name="Text 15"/>
           <p:cNvSpPr/>
           <p:nvPr/>
         </p:nvSpPr>
         <p:spPr>
           <a:xfrm>
             <a:off x="6995160" y="1591200"/>
-            <a:ext cx="1736280" cy="602280"/>
+            <a:ext cx="1735920" cy="601920"/>
           </a:xfrm>
           <a:prstGeom prst="rect">
             <a:avLst/>
@@ -15512,14 +15514,14 @@
       </p:sp>
       <p:sp>
         <p:nvSpPr>
-          <p:cNvPr id="295" name="Shape 16"/>
+          <p:cNvPr id="296" name="Shape 16"/>
           <p:cNvSpPr/>
           <p:nvPr/>
         </p:nvSpPr>
         <p:spPr>
           <a:xfrm>
             <a:off x="320040" y="2258640"/>
-            <a:ext cx="8502840" cy="602280"/>
+            <a:ext cx="8502480" cy="601920"/>
           </a:xfrm>
           <a:prstGeom prst="rect">
             <a:avLst/>
@@ -15564,14 +15566,14 @@
       </p:sp>
       <p:sp>
         <p:nvSpPr>
-          <p:cNvPr id="296" name="Text 17"/>
+          <p:cNvPr id="297" name="Text 17"/>
           <p:cNvSpPr/>
           <p:nvPr/>
         </p:nvSpPr>
         <p:spPr>
           <a:xfrm>
             <a:off x="457200" y="2258640"/>
-            <a:ext cx="2102040" cy="602280"/>
+            <a:ext cx="2101680" cy="601920"/>
           </a:xfrm>
           <a:prstGeom prst="rect">
             <a:avLst/>
@@ -15625,14 +15627,14 @@
       </p:sp>
       <p:sp>
         <p:nvSpPr>
-          <p:cNvPr id="297" name="Text 18"/>
+          <p:cNvPr id="298" name="Text 18"/>
           <p:cNvSpPr/>
           <p:nvPr/>
         </p:nvSpPr>
         <p:spPr>
           <a:xfrm>
             <a:off x="2743200" y="2258640"/>
-            <a:ext cx="1050480" cy="602280"/>
+            <a:ext cx="1050120" cy="601920"/>
           </a:xfrm>
           <a:prstGeom prst="rect">
             <a:avLst/>
@@ -15686,14 +15688,14 @@
       </p:sp>
       <p:sp>
         <p:nvSpPr>
-          <p:cNvPr id="298" name="Text 19"/>
+          <p:cNvPr id="299" name="Text 19"/>
           <p:cNvSpPr/>
           <p:nvPr/>
         </p:nvSpPr>
         <p:spPr>
           <a:xfrm>
             <a:off x="3977640" y="2258640"/>
-            <a:ext cx="1690560" cy="602280"/>
+            <a:ext cx="1690200" cy="601920"/>
           </a:xfrm>
           <a:prstGeom prst="rect">
             <a:avLst/>
@@ -15747,14 +15749,14 @@
       </p:sp>
       <p:sp>
         <p:nvSpPr>
-          <p:cNvPr id="299" name="Text 20"/>
+          <p:cNvPr id="300" name="Text 20"/>
           <p:cNvSpPr/>
           <p:nvPr/>
         </p:nvSpPr>
         <p:spPr>
           <a:xfrm>
             <a:off x="5897880" y="2258640"/>
-            <a:ext cx="867600" cy="602280"/>
+            <a:ext cx="867240" cy="601920"/>
           </a:xfrm>
           <a:prstGeom prst="rect">
             <a:avLst/>
@@ -15808,14 +15810,14 @@
       </p:sp>
       <p:sp>
         <p:nvSpPr>
-          <p:cNvPr id="300" name="Text 21"/>
+          <p:cNvPr id="301" name="Text 21"/>
           <p:cNvSpPr/>
           <p:nvPr/>
         </p:nvSpPr>
         <p:spPr>
           <a:xfrm>
             <a:off x="6995160" y="2258640"/>
-            <a:ext cx="1736280" cy="602280"/>
+            <a:ext cx="1735920" cy="601920"/>
           </a:xfrm>
           <a:prstGeom prst="rect">
             <a:avLst/>
@@ -15869,14 +15871,14 @@
       </p:sp>
       <p:sp>
         <p:nvSpPr>
-          <p:cNvPr id="301" name="Shape 22"/>
+          <p:cNvPr id="302" name="Shape 22"/>
           <p:cNvSpPr/>
           <p:nvPr/>
         </p:nvSpPr>
         <p:spPr>
           <a:xfrm>
             <a:off x="320040" y="2926080"/>
-            <a:ext cx="8502840" cy="602280"/>
+            <a:ext cx="8502480" cy="601920"/>
           </a:xfrm>
           <a:prstGeom prst="rect">
             <a:avLst/>
@@ -15921,14 +15923,14 @@
       </p:sp>
       <p:sp>
         <p:nvSpPr>
-          <p:cNvPr id="302" name="Text 23"/>
+          <p:cNvPr id="303" name="Text 23"/>
           <p:cNvSpPr/>
           <p:nvPr/>
         </p:nvSpPr>
         <p:spPr>
           <a:xfrm>
             <a:off x="457200" y="2926080"/>
-            <a:ext cx="2102040" cy="602280"/>
+            <a:ext cx="2101680" cy="601920"/>
           </a:xfrm>
           <a:prstGeom prst="rect">
             <a:avLst/>
@@ -15982,14 +15984,14 @@
       </p:sp>
       <p:sp>
         <p:nvSpPr>
-          <p:cNvPr id="303" name="Text 24"/>
+          <p:cNvPr id="304" name="Text 24"/>
           <p:cNvSpPr/>
           <p:nvPr/>
         </p:nvSpPr>
         <p:spPr>
           <a:xfrm>
             <a:off x="2743200" y="2926080"/>
-            <a:ext cx="1050480" cy="602280"/>
+            <a:ext cx="1050120" cy="601920"/>
           </a:xfrm>
           <a:prstGeom prst="rect">
             <a:avLst/>
@@ -16043,14 +16045,14 @@
       </p:sp>
       <p:sp>
         <p:nvSpPr>
-          <p:cNvPr id="304" name="Text 25"/>
+          <p:cNvPr id="305" name="Text 25"/>
           <p:cNvSpPr/>
           <p:nvPr/>
         </p:nvSpPr>
         <p:spPr>
           <a:xfrm>
             <a:off x="3977640" y="2926080"/>
-            <a:ext cx="1690560" cy="602280"/>
+            <a:ext cx="1690200" cy="601920"/>
           </a:xfrm>
           <a:prstGeom prst="rect">
             <a:avLst/>
@@ -16104,14 +16106,14 @@
       </p:sp>
       <p:sp>
         <p:nvSpPr>
-          <p:cNvPr id="305" name="Text 26"/>
+          <p:cNvPr id="306" name="Text 26"/>
           <p:cNvSpPr/>
           <p:nvPr/>
         </p:nvSpPr>
         <p:spPr>
           <a:xfrm>
             <a:off x="5897880" y="2926080"/>
-            <a:ext cx="867600" cy="602280"/>
+            <a:ext cx="867240" cy="601920"/>
           </a:xfrm>
           <a:prstGeom prst="rect">
             <a:avLst/>
@@ -16165,14 +16167,14 @@
       </p:sp>
       <p:sp>
         <p:nvSpPr>
-          <p:cNvPr id="306" name="Text 27"/>
+          <p:cNvPr id="307" name="Text 27"/>
           <p:cNvSpPr/>
           <p:nvPr/>
         </p:nvSpPr>
         <p:spPr>
           <a:xfrm>
             <a:off x="6995160" y="2926080"/>
-            <a:ext cx="1736280" cy="602280"/>
+            <a:ext cx="1735920" cy="601920"/>
           </a:xfrm>
           <a:prstGeom prst="rect">
             <a:avLst/>
@@ -16226,14 +16228,14 @@
       </p:sp>
       <p:sp>
         <p:nvSpPr>
-          <p:cNvPr id="307" name="Shape 28"/>
+          <p:cNvPr id="308" name="Shape 28"/>
           <p:cNvSpPr/>
           <p:nvPr/>
         </p:nvSpPr>
         <p:spPr>
           <a:xfrm>
             <a:off x="320040" y="3593520"/>
-            <a:ext cx="8502840" cy="602280"/>
+            <a:ext cx="8502480" cy="601920"/>
           </a:xfrm>
           <a:prstGeom prst="rect">
             <a:avLst/>
@@ -16278,14 +16280,14 @@
       </p:sp>
       <p:sp>
         <p:nvSpPr>
-          <p:cNvPr id="308" name="Text 29"/>
+          <p:cNvPr id="309" name="Text 29"/>
           <p:cNvSpPr/>
           <p:nvPr/>
         </p:nvSpPr>
         <p:spPr>
           <a:xfrm>
             <a:off x="457200" y="3593520"/>
-            <a:ext cx="2102040" cy="602280"/>
+            <a:ext cx="2101680" cy="601920"/>
           </a:xfrm>
           <a:prstGeom prst="rect">
             <a:avLst/>
@@ -16339,14 +16341,14 @@
       </p:sp>
       <p:sp>
         <p:nvSpPr>
-          <p:cNvPr id="309" name="Text 30"/>
+          <p:cNvPr id="310" name="Text 30"/>
           <p:cNvSpPr/>
           <p:nvPr/>
         </p:nvSpPr>
         <p:spPr>
           <a:xfrm>
             <a:off x="2743200" y="3593520"/>
-            <a:ext cx="1050480" cy="602280"/>
+            <a:ext cx="1050120" cy="601920"/>
           </a:xfrm>
           <a:prstGeom prst="rect">
             <a:avLst/>
@@ -16400,14 +16402,14 @@
       </p:sp>
       <p:sp>
         <p:nvSpPr>
-          <p:cNvPr id="310" name="Text 31"/>
+          <p:cNvPr id="311" name="Text 31"/>
           <p:cNvSpPr/>
           <p:nvPr/>
         </p:nvSpPr>
         <p:spPr>
           <a:xfrm>
             <a:off x="3977640" y="3593520"/>
-            <a:ext cx="1690560" cy="602280"/>
+            <a:ext cx="1690200" cy="601920"/>
           </a:xfrm>
           <a:prstGeom prst="rect">
             <a:avLst/>
@@ -16461,14 +16463,14 @@
       </p:sp>
       <p:sp>
         <p:nvSpPr>
-          <p:cNvPr id="311" name="Text 32"/>
+          <p:cNvPr id="312" name="Text 32"/>
           <p:cNvSpPr/>
           <p:nvPr/>
         </p:nvSpPr>
         <p:spPr>
           <a:xfrm>
             <a:off x="5897880" y="3593520"/>
-            <a:ext cx="867600" cy="602280"/>
+            <a:ext cx="867240" cy="601920"/>
           </a:xfrm>
           <a:prstGeom prst="rect">
             <a:avLst/>
@@ -16522,14 +16524,14 @@
       </p:sp>
       <p:sp>
         <p:nvSpPr>
-          <p:cNvPr id="312" name="Text 33"/>
+          <p:cNvPr id="313" name="Text 33"/>
           <p:cNvSpPr/>
           <p:nvPr/>
         </p:nvSpPr>
         <p:spPr>
           <a:xfrm>
             <a:off x="6995160" y="3593520"/>
-            <a:ext cx="1736280" cy="602280"/>
+            <a:ext cx="1735920" cy="601920"/>
           </a:xfrm>
           <a:prstGeom prst="rect">
             <a:avLst/>
@@ -16583,14 +16585,14 @@
       </p:sp>
       <p:sp>
         <p:nvSpPr>
-          <p:cNvPr id="313" name="Shape 34"/>
+          <p:cNvPr id="314" name="Shape 34"/>
           <p:cNvSpPr/>
           <p:nvPr/>
         </p:nvSpPr>
         <p:spPr>
           <a:xfrm>
             <a:off x="0" y="4864680"/>
-            <a:ext cx="9142920" cy="277920"/>
+            <a:ext cx="9142560" cy="277560"/>
           </a:xfrm>
           <a:prstGeom prst="rect">
             <a:avLst/>
@@ -16635,14 +16637,14 @@
       </p:sp>
       <p:sp>
         <p:nvSpPr>
-          <p:cNvPr id="314" name="Text 35"/>
+          <p:cNvPr id="315" name="Text 35"/>
           <p:cNvSpPr/>
           <p:nvPr/>
         </p:nvSpPr>
         <p:spPr>
           <a:xfrm>
             <a:off x="164520" y="4864680"/>
-            <a:ext cx="8777160" cy="277920"/>
+            <a:ext cx="8776800" cy="277560"/>
           </a:xfrm>
           <a:prstGeom prst="rect">
             <a:avLst/>
@@ -16739,7 +16741,7 @@
         <p:spPr>
           <a:xfrm>
             <a:off x="2583000" y="1203120"/>
-            <a:ext cx="3976560" cy="2982600"/>
+            <a:ext cx="3976200" cy="2982240"/>
           </a:xfrm>
           <a:prstGeom prst="rect">
             <a:avLst/>
@@ -16762,8 +16764,8 @@
         </p:nvSpPr>
         <p:spPr>
           <a:xfrm>
-            <a:off x="457200" y="204480"/>
-            <a:ext cx="8228520" cy="859320"/>
+            <a:off x="457200" y="204120"/>
+            <a:ext cx="8228160" cy="859680"/>
           </a:xfrm>
           <a:prstGeom prst="rect">
             <a:avLst/>
@@ -16821,8 +16823,8 @@
         </p:nvSpPr>
         <p:spPr>
           <a:xfrm>
-            <a:off x="803520" y="1027800"/>
-            <a:ext cx="7882200" cy="3427560"/>
+            <a:off x="803520" y="1027440"/>
+            <a:ext cx="7881840" cy="3427920"/>
           </a:xfrm>
           <a:prstGeom prst="rect">
             <a:avLst/>
@@ -17027,14 +17029,14 @@
       </p:grpSpPr>
       <p:sp>
         <p:nvSpPr>
-          <p:cNvPr id="315" name="Shape 0"/>
+          <p:cNvPr id="316" name="Shape 0"/>
           <p:cNvSpPr/>
           <p:nvPr/>
         </p:nvSpPr>
         <p:spPr>
           <a:xfrm>
             <a:off x="0" y="0"/>
-            <a:ext cx="9142920" cy="291600"/>
+            <a:ext cx="9142560" cy="291240"/>
           </a:xfrm>
           <a:prstGeom prst="rect">
             <a:avLst/>
@@ -17079,14 +17081,14 @@
       </p:sp>
       <p:sp>
         <p:nvSpPr>
-          <p:cNvPr id="316" name="Text 1"/>
+          <p:cNvPr id="317" name="Text 1"/>
           <p:cNvSpPr/>
           <p:nvPr/>
         </p:nvSpPr>
         <p:spPr>
           <a:xfrm>
             <a:off x="164520" y="0"/>
-            <a:ext cx="8777160" cy="291600"/>
+            <a:ext cx="8776800" cy="291240"/>
           </a:xfrm>
           <a:prstGeom prst="rect">
             <a:avLst/>
@@ -17140,14 +17142,14 @@
       </p:sp>
       <p:sp>
         <p:nvSpPr>
-          <p:cNvPr id="317" name="Text 2"/>
+          <p:cNvPr id="318" name="Text 2"/>
           <p:cNvSpPr/>
           <p:nvPr/>
         </p:nvSpPr>
         <p:spPr>
           <a:xfrm>
             <a:off x="320040" y="502920"/>
-            <a:ext cx="8502840" cy="547560"/>
+            <a:ext cx="8502480" cy="547200"/>
           </a:xfrm>
           <a:prstGeom prst="rect">
             <a:avLst/>
@@ -17201,7 +17203,7 @@
       </p:sp>
       <p:sp>
         <p:nvSpPr>
-          <p:cNvPr id="318" name="Shape 3"/>
+          <p:cNvPr id="319" name="Shape 3"/>
           <p:cNvSpPr/>
           <p:nvPr/>
         </p:nvSpPr>
@@ -17245,14 +17247,14 @@
       </p:sp>
       <p:sp>
         <p:nvSpPr>
-          <p:cNvPr id="319" name="Shape 4"/>
+          <p:cNvPr id="320" name="Shape 4"/>
           <p:cNvSpPr/>
           <p:nvPr/>
         </p:nvSpPr>
         <p:spPr>
           <a:xfrm>
             <a:off x="320040" y="1325880"/>
-            <a:ext cx="8502840" cy="821880"/>
+            <a:ext cx="8502480" cy="821520"/>
           </a:xfrm>
           <a:prstGeom prst="rect">
             <a:avLst/>
@@ -17297,14 +17299,14 @@
       </p:sp>
       <p:sp>
         <p:nvSpPr>
-          <p:cNvPr id="320" name="Text 5"/>
+          <p:cNvPr id="321" name="Text 5"/>
           <p:cNvSpPr/>
           <p:nvPr/>
         </p:nvSpPr>
         <p:spPr>
           <a:xfrm>
             <a:off x="502920" y="1371600"/>
-            <a:ext cx="8228520" cy="346320"/>
+            <a:ext cx="8228160" cy="345960"/>
           </a:xfrm>
           <a:prstGeom prst="rect">
             <a:avLst/>
@@ -17358,14 +17360,14 @@
       </p:sp>
       <p:sp>
         <p:nvSpPr>
-          <p:cNvPr id="321" name="Text 6"/>
+          <p:cNvPr id="322" name="Text 6"/>
           <p:cNvSpPr/>
           <p:nvPr/>
         </p:nvSpPr>
         <p:spPr>
           <a:xfrm>
             <a:off x="502920" y="1728360"/>
-            <a:ext cx="8228520" cy="346320"/>
+            <a:ext cx="8228160" cy="345960"/>
           </a:xfrm>
           <a:prstGeom prst="rect">
             <a:avLst/>
@@ -17419,14 +17421,14 @@
       </p:sp>
       <p:sp>
         <p:nvSpPr>
-          <p:cNvPr id="322" name="Shape 7"/>
+          <p:cNvPr id="323" name="Shape 7"/>
           <p:cNvSpPr/>
           <p:nvPr/>
         </p:nvSpPr>
         <p:spPr>
           <a:xfrm>
             <a:off x="320040" y="2331720"/>
-            <a:ext cx="8502840" cy="821880"/>
+            <a:ext cx="8502480" cy="821520"/>
           </a:xfrm>
           <a:prstGeom prst="rect">
             <a:avLst/>
@@ -17471,14 +17473,14 @@
       </p:sp>
       <p:sp>
         <p:nvSpPr>
-          <p:cNvPr id="323" name="Text 8"/>
+          <p:cNvPr id="324" name="Text 8"/>
           <p:cNvSpPr/>
           <p:nvPr/>
         </p:nvSpPr>
         <p:spPr>
           <a:xfrm>
             <a:off x="502920" y="2377440"/>
-            <a:ext cx="8228520" cy="346320"/>
+            <a:ext cx="8228160" cy="345960"/>
           </a:xfrm>
           <a:prstGeom prst="rect">
             <a:avLst/>
@@ -17532,14 +17534,14 @@
       </p:sp>
       <p:sp>
         <p:nvSpPr>
-          <p:cNvPr id="324" name="Text 9"/>
+          <p:cNvPr id="325" name="Text 9"/>
           <p:cNvSpPr/>
           <p:nvPr/>
         </p:nvSpPr>
         <p:spPr>
           <a:xfrm>
             <a:off x="502920" y="2734200"/>
-            <a:ext cx="8228520" cy="346320"/>
+            <a:ext cx="8228160" cy="345960"/>
           </a:xfrm>
           <a:prstGeom prst="rect">
             <a:avLst/>
@@ -17593,14 +17595,14 @@
       </p:sp>
       <p:sp>
         <p:nvSpPr>
-          <p:cNvPr id="325" name="Shape 10"/>
+          <p:cNvPr id="326" name="Shape 10"/>
           <p:cNvSpPr/>
           <p:nvPr/>
         </p:nvSpPr>
         <p:spPr>
           <a:xfrm>
             <a:off x="320040" y="3337560"/>
-            <a:ext cx="8502840" cy="821880"/>
+            <a:ext cx="8502480" cy="821520"/>
           </a:xfrm>
           <a:prstGeom prst="rect">
             <a:avLst/>
@@ -17645,14 +17647,14 @@
       </p:sp>
       <p:sp>
         <p:nvSpPr>
-          <p:cNvPr id="326" name="Text 11"/>
+          <p:cNvPr id="327" name="Text 11"/>
           <p:cNvSpPr/>
           <p:nvPr/>
         </p:nvSpPr>
         <p:spPr>
           <a:xfrm>
             <a:off x="502920" y="3383280"/>
-            <a:ext cx="8228520" cy="346320"/>
+            <a:ext cx="8228160" cy="345960"/>
           </a:xfrm>
           <a:prstGeom prst="rect">
             <a:avLst/>
@@ -17706,14 +17708,14 @@
       </p:sp>
       <p:sp>
         <p:nvSpPr>
-          <p:cNvPr id="327" name="Text 12"/>
+          <p:cNvPr id="328" name="Text 12"/>
           <p:cNvSpPr/>
           <p:nvPr/>
         </p:nvSpPr>
         <p:spPr>
           <a:xfrm>
             <a:off x="502920" y="3740040"/>
-            <a:ext cx="8228520" cy="346320"/>
+            <a:ext cx="8228160" cy="345960"/>
           </a:xfrm>
           <a:prstGeom prst="rect">
             <a:avLst/>
@@ -17767,14 +17769,14 @@
       </p:sp>
       <p:sp>
         <p:nvSpPr>
-          <p:cNvPr id="328" name="Shape 13"/>
+          <p:cNvPr id="329" name="Shape 13"/>
           <p:cNvSpPr/>
           <p:nvPr/>
         </p:nvSpPr>
         <p:spPr>
           <a:xfrm>
             <a:off x="320040" y="4434840"/>
-            <a:ext cx="8502840" cy="346320"/>
+            <a:ext cx="8502480" cy="345960"/>
           </a:xfrm>
           <a:prstGeom prst="rect">
             <a:avLst/>
@@ -17819,14 +17821,14 @@
       </p:sp>
       <p:sp>
         <p:nvSpPr>
-          <p:cNvPr id="329" name="Text 14"/>
+          <p:cNvPr id="330" name="Text 14"/>
           <p:cNvSpPr/>
           <p:nvPr/>
         </p:nvSpPr>
         <p:spPr>
           <a:xfrm>
             <a:off x="411480" y="4434840"/>
-            <a:ext cx="8319960" cy="346320"/>
+            <a:ext cx="8319600" cy="345960"/>
           </a:xfrm>
           <a:prstGeom prst="rect">
             <a:avLst/>
@@ -17892,14 +17894,14 @@
       </p:sp>
       <p:sp>
         <p:nvSpPr>
-          <p:cNvPr id="330" name="Shape 15"/>
+          <p:cNvPr id="331" name="Shape 15"/>
           <p:cNvSpPr/>
           <p:nvPr/>
         </p:nvSpPr>
         <p:spPr>
           <a:xfrm>
             <a:off x="0" y="4864680"/>
-            <a:ext cx="9142920" cy="277920"/>
+            <a:ext cx="9142560" cy="277560"/>
           </a:xfrm>
           <a:prstGeom prst="rect">
             <a:avLst/>
@@ -17944,14 +17946,14 @@
       </p:sp>
       <p:sp>
         <p:nvSpPr>
-          <p:cNvPr id="331" name="Text 16"/>
+          <p:cNvPr id="332" name="Text 16"/>
           <p:cNvSpPr/>
           <p:nvPr/>
         </p:nvSpPr>
         <p:spPr>
           <a:xfrm>
             <a:off x="164520" y="4864680"/>
-            <a:ext cx="8777160" cy="277920"/>
+            <a:ext cx="8776800" cy="277560"/>
           </a:xfrm>
           <a:prstGeom prst="rect">
             <a:avLst/>
@@ -18042,14 +18044,14 @@
       </p:grpSpPr>
       <p:sp>
         <p:nvSpPr>
-          <p:cNvPr id="332" name="Shape 0"/>
+          <p:cNvPr id="333" name="Shape 0"/>
           <p:cNvSpPr/>
           <p:nvPr/>
         </p:nvSpPr>
         <p:spPr>
           <a:xfrm>
             <a:off x="0" y="0"/>
-            <a:ext cx="9142920" cy="291600"/>
+            <a:ext cx="9142560" cy="291240"/>
           </a:xfrm>
           <a:prstGeom prst="rect">
             <a:avLst/>
@@ -18094,14 +18096,14 @@
       </p:sp>
       <p:sp>
         <p:nvSpPr>
-          <p:cNvPr id="333" name="Text 1"/>
+          <p:cNvPr id="334" name="Text 1"/>
           <p:cNvSpPr/>
           <p:nvPr/>
         </p:nvSpPr>
         <p:spPr>
           <a:xfrm>
             <a:off x="164520" y="0"/>
-            <a:ext cx="8777160" cy="291600"/>
+            <a:ext cx="8776800" cy="291240"/>
           </a:xfrm>
           <a:prstGeom prst="rect">
             <a:avLst/>
@@ -18155,14 +18157,14 @@
       </p:sp>
       <p:sp>
         <p:nvSpPr>
-          <p:cNvPr id="334" name="Text 2"/>
+          <p:cNvPr id="335" name="Text 2"/>
           <p:cNvSpPr/>
           <p:nvPr/>
         </p:nvSpPr>
         <p:spPr>
           <a:xfrm>
             <a:off x="320040" y="502920"/>
-            <a:ext cx="8502840" cy="547560"/>
+            <a:ext cx="8502480" cy="547200"/>
           </a:xfrm>
           <a:prstGeom prst="rect">
             <a:avLst/>
@@ -18216,7 +18218,7 @@
       </p:sp>
       <p:sp>
         <p:nvSpPr>
-          <p:cNvPr id="335" name="Shape 3"/>
+          <p:cNvPr id="336" name="Shape 3"/>
           <p:cNvSpPr/>
           <p:nvPr/>
         </p:nvSpPr>
@@ -18260,14 +18262,14 @@
       </p:sp>
       <p:sp>
         <p:nvSpPr>
-          <p:cNvPr id="336" name="Shape 4"/>
+          <p:cNvPr id="337" name="Shape 4"/>
           <p:cNvSpPr/>
           <p:nvPr/>
         </p:nvSpPr>
         <p:spPr>
           <a:xfrm>
             <a:off x="320040" y="1261800"/>
-            <a:ext cx="8502840" cy="547560"/>
+            <a:ext cx="8502480" cy="547200"/>
           </a:xfrm>
           <a:prstGeom prst="rect">
             <a:avLst/>
@@ -18312,14 +18314,14 @@
       </p:sp>
       <p:sp>
         <p:nvSpPr>
-          <p:cNvPr id="337" name="Shape 5"/>
+          <p:cNvPr id="338" name="Shape 5"/>
           <p:cNvSpPr/>
           <p:nvPr/>
         </p:nvSpPr>
         <p:spPr>
           <a:xfrm>
             <a:off x="320040" y="1261800"/>
-            <a:ext cx="90360" cy="547560"/>
+            <a:ext cx="90000" cy="547200"/>
           </a:xfrm>
           <a:prstGeom prst="rect">
             <a:avLst/>
@@ -18364,14 +18366,14 @@
       </p:sp>
       <p:sp>
         <p:nvSpPr>
-          <p:cNvPr id="338" name="Text 6"/>
+          <p:cNvPr id="339" name="Text 6"/>
           <p:cNvSpPr/>
           <p:nvPr/>
         </p:nvSpPr>
         <p:spPr>
           <a:xfrm>
             <a:off x="502920" y="1261800"/>
-            <a:ext cx="8228520" cy="547560"/>
+            <a:ext cx="8228160" cy="547200"/>
           </a:xfrm>
           <a:prstGeom prst="rect">
             <a:avLst/>
@@ -18437,14 +18439,14 @@
       </p:sp>
       <p:sp>
         <p:nvSpPr>
-          <p:cNvPr id="339" name="Shape 7"/>
+          <p:cNvPr id="340" name="Shape 7"/>
           <p:cNvSpPr/>
           <p:nvPr/>
         </p:nvSpPr>
         <p:spPr>
           <a:xfrm>
             <a:off x="320040" y="1883520"/>
-            <a:ext cx="8502840" cy="547560"/>
+            <a:ext cx="8502480" cy="547200"/>
           </a:xfrm>
           <a:prstGeom prst="rect">
             <a:avLst/>
@@ -18489,14 +18491,14 @@
       </p:sp>
       <p:sp>
         <p:nvSpPr>
-          <p:cNvPr id="340" name="Shape 8"/>
+          <p:cNvPr id="341" name="Shape 8"/>
           <p:cNvSpPr/>
           <p:nvPr/>
         </p:nvSpPr>
         <p:spPr>
           <a:xfrm>
             <a:off x="320040" y="1883520"/>
-            <a:ext cx="90360" cy="547560"/>
+            <a:ext cx="90000" cy="547200"/>
           </a:xfrm>
           <a:prstGeom prst="rect">
             <a:avLst/>
@@ -18541,14 +18543,14 @@
       </p:sp>
       <p:sp>
         <p:nvSpPr>
-          <p:cNvPr id="341" name="Text 9"/>
+          <p:cNvPr id="342" name="Text 9"/>
           <p:cNvSpPr/>
           <p:nvPr/>
         </p:nvSpPr>
         <p:spPr>
           <a:xfrm>
             <a:off x="502920" y="1883520"/>
-            <a:ext cx="8228520" cy="547560"/>
+            <a:ext cx="8228160" cy="547200"/>
           </a:xfrm>
           <a:prstGeom prst="rect">
             <a:avLst/>
@@ -18614,14 +18616,14 @@
       </p:sp>
       <p:sp>
         <p:nvSpPr>
-          <p:cNvPr id="342" name="Shape 10"/>
+          <p:cNvPr id="343" name="Shape 10"/>
           <p:cNvSpPr/>
           <p:nvPr/>
         </p:nvSpPr>
         <p:spPr>
           <a:xfrm>
             <a:off x="320040" y="2505600"/>
-            <a:ext cx="8502840" cy="547560"/>
+            <a:ext cx="8502480" cy="547200"/>
           </a:xfrm>
           <a:prstGeom prst="rect">
             <a:avLst/>
@@ -18666,14 +18668,14 @@
       </p:sp>
       <p:sp>
         <p:nvSpPr>
-          <p:cNvPr id="343" name="Shape 11"/>
+          <p:cNvPr id="344" name="Shape 11"/>
           <p:cNvSpPr/>
           <p:nvPr/>
         </p:nvSpPr>
         <p:spPr>
           <a:xfrm>
             <a:off x="320040" y="2505600"/>
-            <a:ext cx="90360" cy="547560"/>
+            <a:ext cx="90000" cy="547200"/>
           </a:xfrm>
           <a:prstGeom prst="rect">
             <a:avLst/>
@@ -18718,14 +18720,14 @@
       </p:sp>
       <p:sp>
         <p:nvSpPr>
-          <p:cNvPr id="344" name="Text 12"/>
+          <p:cNvPr id="345" name="Text 12"/>
           <p:cNvSpPr/>
           <p:nvPr/>
         </p:nvSpPr>
         <p:spPr>
           <a:xfrm>
             <a:off x="502920" y="2505600"/>
-            <a:ext cx="8228520" cy="547560"/>
+            <a:ext cx="8228160" cy="547200"/>
           </a:xfrm>
           <a:prstGeom prst="rect">
             <a:avLst/>
@@ -18791,14 +18793,14 @@
       </p:sp>
       <p:sp>
         <p:nvSpPr>
-          <p:cNvPr id="345" name="Shape 13"/>
+          <p:cNvPr id="346" name="Shape 13"/>
           <p:cNvSpPr/>
           <p:nvPr/>
         </p:nvSpPr>
         <p:spPr>
           <a:xfrm>
             <a:off x="320040" y="3127320"/>
-            <a:ext cx="8502840" cy="547560"/>
+            <a:ext cx="8502480" cy="547200"/>
           </a:xfrm>
           <a:prstGeom prst="rect">
             <a:avLst/>
@@ -18843,14 +18845,14 @@
       </p:sp>
       <p:sp>
         <p:nvSpPr>
-          <p:cNvPr id="346" name="Shape 14"/>
+          <p:cNvPr id="347" name="Shape 14"/>
           <p:cNvSpPr/>
           <p:nvPr/>
         </p:nvSpPr>
         <p:spPr>
           <a:xfrm>
             <a:off x="320040" y="3127320"/>
-            <a:ext cx="90360" cy="547560"/>
+            <a:ext cx="90000" cy="547200"/>
           </a:xfrm>
           <a:prstGeom prst="rect">
             <a:avLst/>
@@ -18895,14 +18897,14 @@
       </p:sp>
       <p:sp>
         <p:nvSpPr>
-          <p:cNvPr id="347" name="Text 15"/>
+          <p:cNvPr id="348" name="Text 15"/>
           <p:cNvSpPr/>
           <p:nvPr/>
         </p:nvSpPr>
         <p:spPr>
           <a:xfrm>
             <a:off x="502920" y="3127320"/>
-            <a:ext cx="8228520" cy="547560"/>
+            <a:ext cx="8228160" cy="547200"/>
           </a:xfrm>
           <a:prstGeom prst="rect">
             <a:avLst/>
@@ -18968,14 +18970,14 @@
       </p:sp>
       <p:sp>
         <p:nvSpPr>
-          <p:cNvPr id="348" name="Shape 16"/>
+          <p:cNvPr id="349" name="Shape 16"/>
           <p:cNvSpPr/>
           <p:nvPr/>
         </p:nvSpPr>
         <p:spPr>
           <a:xfrm>
             <a:off x="320040" y="3749040"/>
-            <a:ext cx="8502840" cy="547560"/>
+            <a:ext cx="8502480" cy="547200"/>
           </a:xfrm>
           <a:prstGeom prst="rect">
             <a:avLst/>
@@ -19020,14 +19022,14 @@
       </p:sp>
       <p:sp>
         <p:nvSpPr>
-          <p:cNvPr id="349" name="Shape 17"/>
+          <p:cNvPr id="350" name="Shape 17"/>
           <p:cNvSpPr/>
           <p:nvPr/>
         </p:nvSpPr>
         <p:spPr>
           <a:xfrm>
             <a:off x="320040" y="3749040"/>
-            <a:ext cx="90360" cy="547560"/>
+            <a:ext cx="90000" cy="547200"/>
           </a:xfrm>
           <a:prstGeom prst="rect">
             <a:avLst/>
@@ -19072,14 +19074,14 @@
       </p:sp>
       <p:sp>
         <p:nvSpPr>
-          <p:cNvPr id="350" name="Text 18"/>
+          <p:cNvPr id="351" name="Text 18"/>
           <p:cNvSpPr/>
           <p:nvPr/>
         </p:nvSpPr>
         <p:spPr>
           <a:xfrm>
             <a:off x="502920" y="3749040"/>
-            <a:ext cx="8228520" cy="547560"/>
+            <a:ext cx="8228160" cy="547200"/>
           </a:xfrm>
           <a:prstGeom prst="rect">
             <a:avLst/>
@@ -19145,14 +19147,14 @@
       </p:sp>
       <p:sp>
         <p:nvSpPr>
-          <p:cNvPr id="351" name="Shape 19"/>
+          <p:cNvPr id="352" name="Shape 19"/>
           <p:cNvSpPr/>
           <p:nvPr/>
         </p:nvSpPr>
         <p:spPr>
           <a:xfrm>
             <a:off x="0" y="4864680"/>
-            <a:ext cx="9142920" cy="277920"/>
+            <a:ext cx="9142560" cy="277560"/>
           </a:xfrm>
           <a:prstGeom prst="rect">
             <a:avLst/>
@@ -19197,14 +19199,14 @@
       </p:sp>
       <p:sp>
         <p:nvSpPr>
-          <p:cNvPr id="352" name="Text 20"/>
+          <p:cNvPr id="353" name="Text 20"/>
           <p:cNvSpPr/>
           <p:nvPr/>
         </p:nvSpPr>
         <p:spPr>
           <a:xfrm>
             <a:off x="164520" y="4864680"/>
-            <a:ext cx="8777160" cy="277920"/>
+            <a:ext cx="8776800" cy="277560"/>
           </a:xfrm>
           <a:prstGeom prst="rect">
             <a:avLst/>
@@ -19295,14 +19297,14 @@
       </p:grpSpPr>
       <p:sp>
         <p:nvSpPr>
-          <p:cNvPr id="353" name="Shape 0"/>
+          <p:cNvPr id="354" name="Shape 0"/>
           <p:cNvSpPr/>
           <p:nvPr/>
         </p:nvSpPr>
         <p:spPr>
           <a:xfrm>
             <a:off x="0" y="0"/>
-            <a:ext cx="9142920" cy="291600"/>
+            <a:ext cx="9142560" cy="291240"/>
           </a:xfrm>
           <a:prstGeom prst="rect">
             <a:avLst/>
@@ -19347,14 +19349,14 @@
       </p:sp>
       <p:sp>
         <p:nvSpPr>
-          <p:cNvPr id="354" name="Text 1"/>
+          <p:cNvPr id="355" name="Text 1"/>
           <p:cNvSpPr/>
           <p:nvPr/>
         </p:nvSpPr>
         <p:spPr>
           <a:xfrm>
             <a:off x="164520" y="0"/>
-            <a:ext cx="8777160" cy="291600"/>
+            <a:ext cx="8776800" cy="291240"/>
           </a:xfrm>
           <a:prstGeom prst="rect">
             <a:avLst/>
@@ -19408,14 +19410,14 @@
       </p:sp>
       <p:sp>
         <p:nvSpPr>
-          <p:cNvPr id="355" name="Text 2"/>
+          <p:cNvPr id="356" name="Text 2"/>
           <p:cNvSpPr/>
           <p:nvPr/>
         </p:nvSpPr>
         <p:spPr>
           <a:xfrm>
             <a:off x="320040" y="502920"/>
-            <a:ext cx="8502840" cy="547560"/>
+            <a:ext cx="8502480" cy="547200"/>
           </a:xfrm>
           <a:prstGeom prst="rect">
             <a:avLst/>
@@ -19469,7 +19471,7 @@
       </p:sp>
       <p:sp>
         <p:nvSpPr>
-          <p:cNvPr id="356" name="Shape 3"/>
+          <p:cNvPr id="357" name="Shape 3"/>
           <p:cNvSpPr/>
           <p:nvPr/>
         </p:nvSpPr>
@@ -19513,14 +19515,14 @@
       </p:sp>
       <p:sp>
         <p:nvSpPr>
-          <p:cNvPr id="357" name="Shape 4"/>
+          <p:cNvPr id="358" name="Shape 4"/>
           <p:cNvSpPr/>
           <p:nvPr/>
         </p:nvSpPr>
         <p:spPr>
           <a:xfrm>
             <a:off x="320040" y="1298520"/>
-            <a:ext cx="8502840" cy="712080"/>
+            <a:ext cx="8502480" cy="711720"/>
           </a:xfrm>
           <a:prstGeom prst="rect">
             <a:avLst/>
@@ -19565,14 +19567,14 @@
       </p:sp>
       <p:sp>
         <p:nvSpPr>
-          <p:cNvPr id="358" name="Text 5"/>
+          <p:cNvPr id="359" name="Text 5"/>
           <p:cNvSpPr/>
           <p:nvPr/>
         </p:nvSpPr>
         <p:spPr>
           <a:xfrm>
             <a:off x="411480" y="1298520"/>
-            <a:ext cx="501840" cy="712080"/>
+            <a:ext cx="501480" cy="711720"/>
           </a:xfrm>
           <a:prstGeom prst="rect">
             <a:avLst/>
@@ -19626,7 +19628,7 @@
       </p:sp>
       <p:sp>
         <p:nvSpPr>
-          <p:cNvPr id="359" name="Shape 6"/>
+          <p:cNvPr id="360" name="Shape 6"/>
           <p:cNvSpPr/>
           <p:nvPr/>
         </p:nvSpPr>
@@ -19670,14 +19672,14 @@
       </p:sp>
       <p:sp>
         <p:nvSpPr>
-          <p:cNvPr id="360" name="Text 7"/>
+          <p:cNvPr id="361" name="Text 7"/>
           <p:cNvSpPr/>
           <p:nvPr/>
         </p:nvSpPr>
         <p:spPr>
           <a:xfrm>
             <a:off x="1143000" y="1353240"/>
-            <a:ext cx="7497000" cy="291600"/>
+            <a:ext cx="7496640" cy="291240"/>
           </a:xfrm>
           <a:prstGeom prst="rect">
             <a:avLst/>
@@ -19731,14 +19733,14 @@
       </p:sp>
       <p:sp>
         <p:nvSpPr>
-          <p:cNvPr id="361" name="Text 8"/>
+          <p:cNvPr id="362" name="Text 8"/>
           <p:cNvSpPr/>
           <p:nvPr/>
         </p:nvSpPr>
         <p:spPr>
           <a:xfrm>
             <a:off x="1143000" y="1664280"/>
-            <a:ext cx="7497000" cy="291600"/>
+            <a:ext cx="7496640" cy="291240"/>
           </a:xfrm>
           <a:prstGeom prst="rect">
             <a:avLst/>
@@ -19792,14 +19794,14 @@
       </p:sp>
       <p:sp>
         <p:nvSpPr>
-          <p:cNvPr id="362" name="Shape 9"/>
+          <p:cNvPr id="363" name="Shape 9"/>
           <p:cNvSpPr/>
           <p:nvPr/>
         </p:nvSpPr>
         <p:spPr>
           <a:xfrm>
             <a:off x="320040" y="2121480"/>
-            <a:ext cx="8502840" cy="712080"/>
+            <a:ext cx="8502480" cy="711720"/>
           </a:xfrm>
           <a:prstGeom prst="rect">
             <a:avLst/>
@@ -19844,14 +19846,14 @@
       </p:sp>
       <p:sp>
         <p:nvSpPr>
-          <p:cNvPr id="363" name="Text 10"/>
+          <p:cNvPr id="364" name="Text 10"/>
           <p:cNvSpPr/>
           <p:nvPr/>
         </p:nvSpPr>
         <p:spPr>
           <a:xfrm>
             <a:off x="411480" y="2121480"/>
-            <a:ext cx="501840" cy="712080"/>
+            <a:ext cx="501480" cy="711720"/>
           </a:xfrm>
           <a:prstGeom prst="rect">
             <a:avLst/>
@@ -19905,7 +19907,7 @@
       </p:sp>
       <p:sp>
         <p:nvSpPr>
-          <p:cNvPr id="364" name="Shape 11"/>
+          <p:cNvPr id="365" name="Shape 11"/>
           <p:cNvSpPr/>
           <p:nvPr/>
         </p:nvSpPr>
@@ -19949,14 +19951,14 @@
       </p:sp>
       <p:sp>
         <p:nvSpPr>
-          <p:cNvPr id="365" name="Text 12"/>
+          <p:cNvPr id="366" name="Text 12"/>
           <p:cNvSpPr/>
           <p:nvPr/>
         </p:nvSpPr>
         <p:spPr>
           <a:xfrm>
             <a:off x="1143000" y="2176200"/>
-            <a:ext cx="7497000" cy="291600"/>
+            <a:ext cx="7496640" cy="291240"/>
           </a:xfrm>
           <a:prstGeom prst="rect">
             <a:avLst/>
@@ -20010,14 +20012,14 @@
       </p:sp>
       <p:sp>
         <p:nvSpPr>
-          <p:cNvPr id="366" name="Text 13"/>
+          <p:cNvPr id="367" name="Text 13"/>
           <p:cNvSpPr/>
           <p:nvPr/>
         </p:nvSpPr>
         <p:spPr>
           <a:xfrm>
             <a:off x="1143000" y="2487240"/>
-            <a:ext cx="7497000" cy="291600"/>
+            <a:ext cx="7496640" cy="291240"/>
           </a:xfrm>
           <a:prstGeom prst="rect">
             <a:avLst/>
@@ -20071,14 +20073,14 @@
       </p:sp>
       <p:sp>
         <p:nvSpPr>
-          <p:cNvPr id="367" name="Shape 14"/>
+          <p:cNvPr id="368" name="Shape 14"/>
           <p:cNvSpPr/>
           <p:nvPr/>
         </p:nvSpPr>
         <p:spPr>
           <a:xfrm>
             <a:off x="320040" y="2944440"/>
-            <a:ext cx="8502840" cy="712080"/>
+            <a:ext cx="8502480" cy="711720"/>
           </a:xfrm>
           <a:prstGeom prst="rect">
             <a:avLst/>
@@ -20123,14 +20125,14 @@
       </p:sp>
       <p:sp>
         <p:nvSpPr>
-          <p:cNvPr id="368" name="Text 15"/>
+          <p:cNvPr id="369" name="Text 15"/>
           <p:cNvSpPr/>
           <p:nvPr/>
         </p:nvSpPr>
         <p:spPr>
           <a:xfrm>
             <a:off x="411480" y="2944440"/>
-            <a:ext cx="501840" cy="712080"/>
+            <a:ext cx="501480" cy="711720"/>
           </a:xfrm>
           <a:prstGeom prst="rect">
             <a:avLst/>
@@ -20184,7 +20186,7 @@
       </p:sp>
       <p:sp>
         <p:nvSpPr>
-          <p:cNvPr id="369" name="Shape 16"/>
+          <p:cNvPr id="370" name="Shape 16"/>
           <p:cNvSpPr/>
           <p:nvPr/>
         </p:nvSpPr>
@@ -20228,14 +20230,14 @@
       </p:sp>
       <p:sp>
         <p:nvSpPr>
-          <p:cNvPr id="370" name="Text 17"/>
+          <p:cNvPr id="371" name="Text 17"/>
           <p:cNvSpPr/>
           <p:nvPr/>
         </p:nvSpPr>
         <p:spPr>
           <a:xfrm>
             <a:off x="1143000" y="2999160"/>
-            <a:ext cx="7497000" cy="291600"/>
+            <a:ext cx="7496640" cy="291240"/>
           </a:xfrm>
           <a:prstGeom prst="rect">
             <a:avLst/>
@@ -20289,14 +20291,14 @@
       </p:sp>
       <p:sp>
         <p:nvSpPr>
-          <p:cNvPr id="371" name="Text 18"/>
+          <p:cNvPr id="372" name="Text 18"/>
           <p:cNvSpPr/>
           <p:nvPr/>
         </p:nvSpPr>
         <p:spPr>
           <a:xfrm>
             <a:off x="1143000" y="3310200"/>
-            <a:ext cx="7497000" cy="291600"/>
+            <a:ext cx="7496640" cy="291240"/>
           </a:xfrm>
           <a:prstGeom prst="rect">
             <a:avLst/>
@@ -20350,14 +20352,14 @@
       </p:sp>
       <p:sp>
         <p:nvSpPr>
-          <p:cNvPr id="372" name="Shape 19"/>
+          <p:cNvPr id="373" name="Shape 19"/>
           <p:cNvSpPr/>
           <p:nvPr/>
         </p:nvSpPr>
         <p:spPr>
           <a:xfrm>
             <a:off x="320040" y="3767400"/>
-            <a:ext cx="8502840" cy="712080"/>
+            <a:ext cx="8502480" cy="711720"/>
           </a:xfrm>
           <a:prstGeom prst="rect">
             <a:avLst/>
@@ -20402,14 +20404,14 @@
       </p:sp>
       <p:sp>
         <p:nvSpPr>
-          <p:cNvPr id="373" name="Text 20"/>
+          <p:cNvPr id="374" name="Text 20"/>
           <p:cNvSpPr/>
           <p:nvPr/>
         </p:nvSpPr>
         <p:spPr>
           <a:xfrm>
             <a:off x="411480" y="3767400"/>
-            <a:ext cx="501840" cy="712080"/>
+            <a:ext cx="501480" cy="711720"/>
           </a:xfrm>
           <a:prstGeom prst="rect">
             <a:avLst/>
@@ -20463,7 +20465,7 @@
       </p:sp>
       <p:sp>
         <p:nvSpPr>
-          <p:cNvPr id="374" name="Shape 21"/>
+          <p:cNvPr id="375" name="Shape 21"/>
           <p:cNvSpPr/>
           <p:nvPr/>
         </p:nvSpPr>
@@ -20507,14 +20509,14 @@
       </p:sp>
       <p:sp>
         <p:nvSpPr>
-          <p:cNvPr id="375" name="Text 22"/>
+          <p:cNvPr id="376" name="Text 22"/>
           <p:cNvSpPr/>
           <p:nvPr/>
         </p:nvSpPr>
         <p:spPr>
           <a:xfrm>
             <a:off x="1143000" y="3822120"/>
-            <a:ext cx="7497000" cy="291600"/>
+            <a:ext cx="7496640" cy="291240"/>
           </a:xfrm>
           <a:prstGeom prst="rect">
             <a:avLst/>
@@ -20568,14 +20570,14 @@
       </p:sp>
       <p:sp>
         <p:nvSpPr>
-          <p:cNvPr id="376" name="Text 23"/>
+          <p:cNvPr id="377" name="Text 23"/>
           <p:cNvSpPr/>
           <p:nvPr/>
         </p:nvSpPr>
         <p:spPr>
           <a:xfrm>
             <a:off x="1143000" y="4133160"/>
-            <a:ext cx="7497000" cy="291600"/>
+            <a:ext cx="7496640" cy="291240"/>
           </a:xfrm>
           <a:prstGeom prst="rect">
             <a:avLst/>
@@ -20629,14 +20631,14 @@
       </p:sp>
       <p:sp>
         <p:nvSpPr>
-          <p:cNvPr id="377" name="Shape 24"/>
+          <p:cNvPr id="378" name="Shape 24"/>
           <p:cNvSpPr/>
           <p:nvPr/>
         </p:nvSpPr>
         <p:spPr>
           <a:xfrm>
             <a:off x="0" y="4864680"/>
-            <a:ext cx="9142920" cy="277920"/>
+            <a:ext cx="9142560" cy="277560"/>
           </a:xfrm>
           <a:prstGeom prst="rect">
             <a:avLst/>
@@ -20681,14 +20683,14 @@
       </p:sp>
       <p:sp>
         <p:nvSpPr>
-          <p:cNvPr id="378" name="Text 25"/>
+          <p:cNvPr id="379" name="Text 25"/>
           <p:cNvSpPr/>
           <p:nvPr/>
         </p:nvSpPr>
         <p:spPr>
           <a:xfrm>
             <a:off x="164520" y="4864680"/>
-            <a:ext cx="8777160" cy="277920"/>
+            <a:ext cx="8776800" cy="277560"/>
           </a:xfrm>
           <a:prstGeom prst="rect">
             <a:avLst/>
@@ -20779,14 +20781,14 @@
       </p:grpSpPr>
       <p:sp>
         <p:nvSpPr>
-          <p:cNvPr id="379" name="Shape 0"/>
+          <p:cNvPr id="380" name="Shape 0"/>
           <p:cNvSpPr/>
           <p:nvPr/>
         </p:nvSpPr>
         <p:spPr>
           <a:xfrm>
             <a:off x="0" y="0"/>
-            <a:ext cx="9142920" cy="291600"/>
+            <a:ext cx="9142560" cy="291240"/>
           </a:xfrm>
           <a:prstGeom prst="rect">
             <a:avLst/>
@@ -20831,14 +20833,14 @@
       </p:sp>
       <p:sp>
         <p:nvSpPr>
-          <p:cNvPr id="380" name="Text 1"/>
+          <p:cNvPr id="381" name="Text 1"/>
           <p:cNvSpPr/>
           <p:nvPr/>
         </p:nvSpPr>
         <p:spPr>
           <a:xfrm>
             <a:off x="164520" y="0"/>
-            <a:ext cx="8777160" cy="291600"/>
+            <a:ext cx="8776800" cy="291240"/>
           </a:xfrm>
           <a:prstGeom prst="rect">
             <a:avLst/>
@@ -20892,14 +20894,14 @@
       </p:sp>
       <p:sp>
         <p:nvSpPr>
-          <p:cNvPr id="381" name="Text 2"/>
+          <p:cNvPr id="382" name="Text 2"/>
           <p:cNvSpPr/>
           <p:nvPr/>
         </p:nvSpPr>
         <p:spPr>
           <a:xfrm>
             <a:off x="320040" y="502920"/>
-            <a:ext cx="8502840" cy="547560"/>
+            <a:ext cx="8502480" cy="547200"/>
           </a:xfrm>
           <a:prstGeom prst="rect">
             <a:avLst/>
@@ -20953,7 +20955,7 @@
       </p:sp>
       <p:sp>
         <p:nvSpPr>
-          <p:cNvPr id="382" name="Shape 3"/>
+          <p:cNvPr id="383" name="Shape 3"/>
           <p:cNvSpPr/>
           <p:nvPr/>
         </p:nvSpPr>
@@ -20997,14 +20999,14 @@
       </p:sp>
       <p:sp>
         <p:nvSpPr>
-          <p:cNvPr id="383" name="Text 4"/>
+          <p:cNvPr id="384" name="Text 4"/>
           <p:cNvSpPr/>
           <p:nvPr/>
         </p:nvSpPr>
         <p:spPr>
           <a:xfrm>
             <a:off x="320040" y="1261800"/>
-            <a:ext cx="8502840" cy="364680"/>
+            <a:ext cx="8502480" cy="364320"/>
           </a:xfrm>
           <a:prstGeom prst="rect">
             <a:avLst/>
@@ -21058,14 +21060,14 @@
       </p:sp>
       <p:sp>
         <p:nvSpPr>
-          <p:cNvPr id="384" name="Shape 5"/>
+          <p:cNvPr id="385" name="Shape 5"/>
           <p:cNvSpPr/>
           <p:nvPr/>
         </p:nvSpPr>
         <p:spPr>
           <a:xfrm>
             <a:off x="320040" y="1664280"/>
-            <a:ext cx="8502840" cy="2513520"/>
+            <a:ext cx="8502480" cy="2513160"/>
           </a:xfrm>
           <a:prstGeom prst="rect">
             <a:avLst/>
@@ -21110,14 +21112,14 @@
       </p:sp>
       <p:sp>
         <p:nvSpPr>
-          <p:cNvPr id="385" name="Text 6"/>
+          <p:cNvPr id="386" name="Text 6"/>
           <p:cNvSpPr/>
           <p:nvPr/>
         </p:nvSpPr>
         <p:spPr>
           <a:xfrm>
             <a:off x="548640" y="1792080"/>
-            <a:ext cx="8045640" cy="401400"/>
+            <a:ext cx="8045280" cy="401040"/>
           </a:xfrm>
           <a:prstGeom prst="rect">
             <a:avLst/>
@@ -21171,14 +21173,14 @@
       </p:sp>
       <p:sp>
         <p:nvSpPr>
-          <p:cNvPr id="386" name="Text 7"/>
+          <p:cNvPr id="387" name="Text 7"/>
           <p:cNvSpPr/>
           <p:nvPr/>
         </p:nvSpPr>
         <p:spPr>
           <a:xfrm>
             <a:off x="548640" y="2249280"/>
-            <a:ext cx="8045640" cy="401400"/>
+            <a:ext cx="8045280" cy="401040"/>
           </a:xfrm>
           <a:prstGeom prst="rect">
             <a:avLst/>
@@ -21232,14 +21234,14 @@
       </p:sp>
       <p:sp>
         <p:nvSpPr>
-          <p:cNvPr id="387" name="Text 8"/>
+          <p:cNvPr id="388" name="Text 8"/>
           <p:cNvSpPr/>
           <p:nvPr/>
         </p:nvSpPr>
         <p:spPr>
           <a:xfrm>
             <a:off x="548640" y="2706480"/>
-            <a:ext cx="8045640" cy="401400"/>
+            <a:ext cx="8045280" cy="401040"/>
           </a:xfrm>
           <a:prstGeom prst="rect">
             <a:avLst/>
@@ -21293,14 +21295,14 @@
       </p:sp>
       <p:sp>
         <p:nvSpPr>
-          <p:cNvPr id="388" name="Text 9"/>
+          <p:cNvPr id="389" name="Text 9"/>
           <p:cNvSpPr/>
           <p:nvPr/>
         </p:nvSpPr>
         <p:spPr>
           <a:xfrm>
             <a:off x="548640" y="3163680"/>
-            <a:ext cx="8045640" cy="401400"/>
+            <a:ext cx="8045280" cy="401040"/>
           </a:xfrm>
           <a:prstGeom prst="rect">
             <a:avLst/>
@@ -21354,14 +21356,14 @@
       </p:sp>
       <p:sp>
         <p:nvSpPr>
-          <p:cNvPr id="389" name="Text 10"/>
+          <p:cNvPr id="390" name="Text 10"/>
           <p:cNvSpPr/>
           <p:nvPr/>
         </p:nvSpPr>
         <p:spPr>
           <a:xfrm>
             <a:off x="548640" y="3620880"/>
-            <a:ext cx="8045640" cy="401400"/>
+            <a:ext cx="8045280" cy="401040"/>
           </a:xfrm>
           <a:prstGeom prst="rect">
             <a:avLst/>
@@ -21415,14 +21417,14 @@
       </p:sp>
       <p:sp>
         <p:nvSpPr>
-          <p:cNvPr id="390" name="Shape 11"/>
+          <p:cNvPr id="391" name="Shape 11"/>
           <p:cNvSpPr/>
           <p:nvPr/>
         </p:nvSpPr>
         <p:spPr>
           <a:xfrm>
             <a:off x="0" y="4864680"/>
-            <a:ext cx="9142920" cy="277920"/>
+            <a:ext cx="9142560" cy="277560"/>
           </a:xfrm>
           <a:prstGeom prst="rect">
             <a:avLst/>
@@ -21467,14 +21469,14 @@
       </p:sp>
       <p:sp>
         <p:nvSpPr>
-          <p:cNvPr id="391" name="Text 12"/>
+          <p:cNvPr id="392" name="Text 12"/>
           <p:cNvSpPr/>
           <p:nvPr/>
         </p:nvSpPr>
         <p:spPr>
           <a:xfrm>
             <a:off x="164520" y="4864680"/>
-            <a:ext cx="8777160" cy="277920"/>
+            <a:ext cx="8776800" cy="277560"/>
           </a:xfrm>
           <a:prstGeom prst="rect">
             <a:avLst/>
@@ -21565,14 +21567,14 @@
       </p:grpSpPr>
       <p:sp>
         <p:nvSpPr>
-          <p:cNvPr id="392" name="Shape 0"/>
+          <p:cNvPr id="393" name="Shape 0"/>
           <p:cNvSpPr/>
           <p:nvPr/>
         </p:nvSpPr>
         <p:spPr>
           <a:xfrm>
             <a:off x="0" y="0"/>
-            <a:ext cx="9142920" cy="291600"/>
+            <a:ext cx="9142560" cy="291240"/>
           </a:xfrm>
           <a:prstGeom prst="rect">
             <a:avLst/>
@@ -21617,14 +21619,14 @@
       </p:sp>
       <p:sp>
         <p:nvSpPr>
-          <p:cNvPr id="393" name="Text 1"/>
+          <p:cNvPr id="394" name="Text 1"/>
           <p:cNvSpPr/>
           <p:nvPr/>
         </p:nvSpPr>
         <p:spPr>
           <a:xfrm>
             <a:off x="164520" y="0"/>
-            <a:ext cx="8777160" cy="291600"/>
+            <a:ext cx="8776800" cy="291240"/>
           </a:xfrm>
           <a:prstGeom prst="rect">
             <a:avLst/>
@@ -21678,14 +21680,14 @@
       </p:sp>
       <p:sp>
         <p:nvSpPr>
-          <p:cNvPr id="394" name="Text 2"/>
+          <p:cNvPr id="395" name="Text 2"/>
           <p:cNvSpPr/>
           <p:nvPr/>
         </p:nvSpPr>
         <p:spPr>
           <a:xfrm>
             <a:off x="320040" y="502920"/>
-            <a:ext cx="8502840" cy="547560"/>
+            <a:ext cx="8502480" cy="547200"/>
           </a:xfrm>
           <a:prstGeom prst="rect">
             <a:avLst/>
@@ -21739,7 +21741,7 @@
       </p:sp>
       <p:sp>
         <p:nvSpPr>
-          <p:cNvPr id="395" name="Shape 3"/>
+          <p:cNvPr id="396" name="Shape 3"/>
           <p:cNvSpPr/>
           <p:nvPr/>
         </p:nvSpPr>
@@ -21783,14 +21785,14 @@
       </p:sp>
       <p:sp>
         <p:nvSpPr>
-          <p:cNvPr id="396" name="Shape 4"/>
+          <p:cNvPr id="397" name="Shape 4"/>
           <p:cNvSpPr/>
           <p:nvPr/>
         </p:nvSpPr>
         <p:spPr>
           <a:xfrm>
             <a:off x="320040" y="1298520"/>
-            <a:ext cx="8502840" cy="684720"/>
+            <a:ext cx="8502480" cy="684360"/>
           </a:xfrm>
           <a:prstGeom prst="rect">
             <a:avLst/>
@@ -21835,14 +21837,14 @@
       </p:sp>
       <p:sp>
         <p:nvSpPr>
-          <p:cNvPr id="397" name="Shape 5"/>
+          <p:cNvPr id="398" name="Shape 5"/>
           <p:cNvSpPr/>
           <p:nvPr/>
         </p:nvSpPr>
         <p:spPr>
           <a:xfrm>
             <a:off x="320040" y="1298520"/>
-            <a:ext cx="108720" cy="684720"/>
+            <a:ext cx="108360" cy="684360"/>
           </a:xfrm>
           <a:prstGeom prst="rect">
             <a:avLst/>
@@ -21887,14 +21889,14 @@
       </p:sp>
       <p:sp>
         <p:nvSpPr>
-          <p:cNvPr id="398" name="Text 6"/>
+          <p:cNvPr id="399" name="Text 6"/>
           <p:cNvSpPr/>
           <p:nvPr/>
         </p:nvSpPr>
         <p:spPr>
           <a:xfrm>
             <a:off x="530280" y="1344240"/>
-            <a:ext cx="8228520" cy="273240"/>
+            <a:ext cx="8228160" cy="272880"/>
           </a:xfrm>
           <a:prstGeom prst="rect">
             <a:avLst/>
@@ -21948,14 +21950,14 @@
       </p:sp>
       <p:sp>
         <p:nvSpPr>
-          <p:cNvPr id="399" name="Text 7"/>
+          <p:cNvPr id="400" name="Text 7"/>
           <p:cNvSpPr/>
           <p:nvPr/>
         </p:nvSpPr>
         <p:spPr>
           <a:xfrm>
             <a:off x="530280" y="1645920"/>
-            <a:ext cx="8228520" cy="273240"/>
+            <a:ext cx="8228160" cy="272880"/>
           </a:xfrm>
           <a:prstGeom prst="rect">
             <a:avLst/>
@@ -22009,14 +22011,14 @@
       </p:sp>
       <p:sp>
         <p:nvSpPr>
-          <p:cNvPr id="400" name="Shape 8"/>
+          <p:cNvPr id="401" name="Shape 8"/>
           <p:cNvSpPr/>
           <p:nvPr/>
         </p:nvSpPr>
         <p:spPr>
           <a:xfrm>
             <a:off x="320040" y="2121480"/>
-            <a:ext cx="8502840" cy="684720"/>
+            <a:ext cx="8502480" cy="684360"/>
           </a:xfrm>
           <a:prstGeom prst="rect">
             <a:avLst/>
@@ -22061,14 +22063,14 @@
       </p:sp>
       <p:sp>
         <p:nvSpPr>
-          <p:cNvPr id="401" name="Shape 9"/>
+          <p:cNvPr id="402" name="Shape 9"/>
           <p:cNvSpPr/>
           <p:nvPr/>
         </p:nvSpPr>
         <p:spPr>
           <a:xfrm>
             <a:off x="320040" y="2121480"/>
-            <a:ext cx="108720" cy="684720"/>
+            <a:ext cx="108360" cy="684360"/>
           </a:xfrm>
           <a:prstGeom prst="rect">
             <a:avLst/>
@@ -22113,14 +22115,14 @@
       </p:sp>
       <p:sp>
         <p:nvSpPr>
-          <p:cNvPr id="402" name="Text 10"/>
+          <p:cNvPr id="403" name="Text 10"/>
           <p:cNvSpPr/>
           <p:nvPr/>
         </p:nvSpPr>
         <p:spPr>
           <a:xfrm>
             <a:off x="530280" y="2167200"/>
-            <a:ext cx="8228520" cy="273240"/>
+            <a:ext cx="8228160" cy="272880"/>
           </a:xfrm>
           <a:prstGeom prst="rect">
             <a:avLst/>
@@ -22174,14 +22176,14 @@
       </p:sp>
       <p:sp>
         <p:nvSpPr>
-          <p:cNvPr id="403" name="Text 11"/>
+          <p:cNvPr id="404" name="Text 11"/>
           <p:cNvSpPr/>
           <p:nvPr/>
         </p:nvSpPr>
         <p:spPr>
           <a:xfrm>
             <a:off x="530280" y="2468880"/>
-            <a:ext cx="8228520" cy="273240"/>
+            <a:ext cx="8228160" cy="272880"/>
           </a:xfrm>
           <a:prstGeom prst="rect">
             <a:avLst/>
@@ -22235,14 +22237,14 @@
       </p:sp>
       <p:sp>
         <p:nvSpPr>
-          <p:cNvPr id="404" name="Shape 12"/>
+          <p:cNvPr id="405" name="Shape 12"/>
           <p:cNvSpPr/>
           <p:nvPr/>
         </p:nvSpPr>
         <p:spPr>
           <a:xfrm>
             <a:off x="320040" y="2944440"/>
-            <a:ext cx="8502840" cy="684720"/>
+            <a:ext cx="8502480" cy="684360"/>
           </a:xfrm>
           <a:prstGeom prst="rect">
             <a:avLst/>
@@ -22287,14 +22289,14 @@
       </p:sp>
       <p:sp>
         <p:nvSpPr>
-          <p:cNvPr id="405" name="Shape 13"/>
+          <p:cNvPr id="406" name="Shape 13"/>
           <p:cNvSpPr/>
           <p:nvPr/>
         </p:nvSpPr>
         <p:spPr>
           <a:xfrm>
             <a:off x="320040" y="2944440"/>
-            <a:ext cx="108720" cy="684720"/>
+            <a:ext cx="108360" cy="684360"/>
           </a:xfrm>
           <a:prstGeom prst="rect">
             <a:avLst/>
@@ -22339,14 +22341,14 @@
       </p:sp>
       <p:sp>
         <p:nvSpPr>
-          <p:cNvPr id="406" name="Text 14"/>
+          <p:cNvPr id="407" name="Text 14"/>
           <p:cNvSpPr/>
           <p:nvPr/>
         </p:nvSpPr>
         <p:spPr>
           <a:xfrm>
             <a:off x="530280" y="2990160"/>
-            <a:ext cx="8228520" cy="273240"/>
+            <a:ext cx="8228160" cy="272880"/>
           </a:xfrm>
           <a:prstGeom prst="rect">
             <a:avLst/>
@@ -22400,14 +22402,14 @@
       </p:sp>
       <p:sp>
         <p:nvSpPr>
-          <p:cNvPr id="407" name="Text 15"/>
+          <p:cNvPr id="408" name="Text 15"/>
           <p:cNvSpPr/>
           <p:nvPr/>
         </p:nvSpPr>
         <p:spPr>
           <a:xfrm>
             <a:off x="530280" y="3291840"/>
-            <a:ext cx="8228520" cy="273240"/>
+            <a:ext cx="8228160" cy="272880"/>
           </a:xfrm>
           <a:prstGeom prst="rect">
             <a:avLst/>
@@ -22461,14 +22463,14 @@
       </p:sp>
       <p:sp>
         <p:nvSpPr>
-          <p:cNvPr id="408" name="Shape 16"/>
+          <p:cNvPr id="409" name="Shape 16"/>
           <p:cNvSpPr/>
           <p:nvPr/>
         </p:nvSpPr>
         <p:spPr>
           <a:xfrm>
             <a:off x="320040" y="3767400"/>
-            <a:ext cx="8502840" cy="684720"/>
+            <a:ext cx="8502480" cy="684360"/>
           </a:xfrm>
           <a:prstGeom prst="rect">
             <a:avLst/>
@@ -22513,14 +22515,14 @@
       </p:sp>
       <p:sp>
         <p:nvSpPr>
-          <p:cNvPr id="409" name="Shape 17"/>
+          <p:cNvPr id="410" name="Shape 17"/>
           <p:cNvSpPr/>
           <p:nvPr/>
         </p:nvSpPr>
         <p:spPr>
           <a:xfrm>
             <a:off x="320040" y="3767400"/>
-            <a:ext cx="108720" cy="684720"/>
+            <a:ext cx="108360" cy="684360"/>
           </a:xfrm>
           <a:prstGeom prst="rect">
             <a:avLst/>
@@ -22565,14 +22567,14 @@
       </p:sp>
       <p:sp>
         <p:nvSpPr>
-          <p:cNvPr id="410" name="Text 18"/>
+          <p:cNvPr id="411" name="Text 18"/>
           <p:cNvSpPr/>
           <p:nvPr/>
         </p:nvSpPr>
         <p:spPr>
           <a:xfrm>
             <a:off x="530280" y="3813120"/>
-            <a:ext cx="8228520" cy="273240"/>
+            <a:ext cx="8228160" cy="272880"/>
           </a:xfrm>
           <a:prstGeom prst="rect">
             <a:avLst/>
@@ -22626,14 +22628,14 @@
       </p:sp>
       <p:sp>
         <p:nvSpPr>
-          <p:cNvPr id="411" name="Text 19"/>
+          <p:cNvPr id="412" name="Text 19"/>
           <p:cNvSpPr/>
           <p:nvPr/>
         </p:nvSpPr>
         <p:spPr>
           <a:xfrm>
             <a:off x="530280" y="4114800"/>
-            <a:ext cx="8228520" cy="273240"/>
+            <a:ext cx="8228160" cy="272880"/>
           </a:xfrm>
           <a:prstGeom prst="rect">
             <a:avLst/>
@@ -22687,14 +22689,14 @@
       </p:sp>
       <p:sp>
         <p:nvSpPr>
-          <p:cNvPr id="412" name="Shape 20"/>
+          <p:cNvPr id="413" name="Shape 20"/>
           <p:cNvSpPr/>
           <p:nvPr/>
         </p:nvSpPr>
         <p:spPr>
           <a:xfrm>
             <a:off x="0" y="4864680"/>
-            <a:ext cx="9142920" cy="277920"/>
+            <a:ext cx="9142560" cy="277560"/>
           </a:xfrm>
           <a:prstGeom prst="rect">
             <a:avLst/>
@@ -22739,14 +22741,14 @@
       </p:sp>
       <p:sp>
         <p:nvSpPr>
-          <p:cNvPr id="413" name="Text 21"/>
+          <p:cNvPr id="414" name="Text 21"/>
           <p:cNvSpPr/>
           <p:nvPr/>
         </p:nvSpPr>
         <p:spPr>
           <a:xfrm>
             <a:off x="164520" y="4864680"/>
-            <a:ext cx="8777160" cy="277920"/>
+            <a:ext cx="8776800" cy="277560"/>
           </a:xfrm>
           <a:prstGeom prst="rect">
             <a:avLst/>
@@ -22837,14 +22839,14 @@
       </p:grpSpPr>
       <p:sp>
         <p:nvSpPr>
-          <p:cNvPr id="414" name="Shape 0"/>
+          <p:cNvPr id="415" name="Shape 0"/>
           <p:cNvSpPr/>
           <p:nvPr/>
         </p:nvSpPr>
         <p:spPr>
           <a:xfrm>
             <a:off x="0" y="0"/>
-            <a:ext cx="9142920" cy="291600"/>
+            <a:ext cx="9142560" cy="291240"/>
           </a:xfrm>
           <a:prstGeom prst="rect">
             <a:avLst/>
@@ -22889,14 +22891,14 @@
       </p:sp>
       <p:sp>
         <p:nvSpPr>
-          <p:cNvPr id="415" name="Text 1"/>
+          <p:cNvPr id="416" name="Text 1"/>
           <p:cNvSpPr/>
           <p:nvPr/>
         </p:nvSpPr>
         <p:spPr>
           <a:xfrm>
             <a:off x="164520" y="0"/>
-            <a:ext cx="8777160" cy="291600"/>
+            <a:ext cx="8776800" cy="291240"/>
           </a:xfrm>
           <a:prstGeom prst="rect">
             <a:avLst/>
@@ -22950,14 +22952,14 @@
       </p:sp>
       <p:sp>
         <p:nvSpPr>
-          <p:cNvPr id="416" name="Text 2"/>
+          <p:cNvPr id="417" name="Text 2"/>
           <p:cNvSpPr/>
           <p:nvPr/>
         </p:nvSpPr>
         <p:spPr>
           <a:xfrm>
             <a:off x="320040" y="567000"/>
-            <a:ext cx="8502840" cy="867600"/>
+            <a:ext cx="8502480" cy="867240"/>
           </a:xfrm>
           <a:prstGeom prst="rect">
             <a:avLst/>
@@ -23011,14 +23013,14 @@
       </p:sp>
       <p:sp>
         <p:nvSpPr>
-          <p:cNvPr id="417" name="Text 3"/>
+          <p:cNvPr id="418" name="Text 3"/>
           <p:cNvSpPr/>
           <p:nvPr/>
         </p:nvSpPr>
         <p:spPr>
           <a:xfrm>
             <a:off x="320040" y="1417320"/>
-            <a:ext cx="8502840" cy="867600"/>
+            <a:ext cx="8502480" cy="867240"/>
           </a:xfrm>
           <a:prstGeom prst="rect">
             <a:avLst/>
@@ -23072,7 +23074,7 @@
       </p:sp>
       <p:sp>
         <p:nvSpPr>
-          <p:cNvPr id="418" name="Shape 4"/>
+          <p:cNvPr id="419" name="Shape 4"/>
           <p:cNvSpPr/>
           <p:nvPr/>
         </p:nvSpPr>
@@ -23116,14 +23118,14 @@
       </p:sp>
       <p:sp>
         <p:nvSpPr>
-          <p:cNvPr id="419" name="Text 5"/>
+          <p:cNvPr id="420" name="Text 5"/>
           <p:cNvSpPr/>
           <p:nvPr/>
         </p:nvSpPr>
         <p:spPr>
           <a:xfrm>
             <a:off x="457200" y="2541960"/>
-            <a:ext cx="8228520" cy="501840"/>
+            <a:ext cx="8228160" cy="501480"/>
           </a:xfrm>
           <a:prstGeom prst="rect">
             <a:avLst/>
@@ -23177,14 +23179,14 @@
       </p:sp>
       <p:sp>
         <p:nvSpPr>
-          <p:cNvPr id="420" name="Text 6"/>
+          <p:cNvPr id="421" name="Text 6"/>
           <p:cNvSpPr/>
           <p:nvPr/>
         </p:nvSpPr>
         <p:spPr>
           <a:xfrm>
             <a:off x="457200" y="3136320"/>
-            <a:ext cx="8228520" cy="501840"/>
+            <a:ext cx="8228160" cy="501480"/>
           </a:xfrm>
           <a:prstGeom prst="rect">
             <a:avLst/>
@@ -23238,14 +23240,14 @@
       </p:sp>
       <p:sp>
         <p:nvSpPr>
-          <p:cNvPr id="421" name="Text 7"/>
+          <p:cNvPr id="422" name="Text 7"/>
           <p:cNvSpPr/>
           <p:nvPr/>
         </p:nvSpPr>
         <p:spPr>
           <a:xfrm>
             <a:off x="320040" y="3749040"/>
-            <a:ext cx="8502840" cy="318960"/>
+            <a:ext cx="8502480" cy="318600"/>
           </a:xfrm>
           <a:prstGeom prst="rect">
             <a:avLst/>
@@ -23299,14 +23301,14 @@
       </p:sp>
       <p:sp>
         <p:nvSpPr>
-          <p:cNvPr id="422" name="Shape 8"/>
+          <p:cNvPr id="423" name="Shape 8"/>
           <p:cNvSpPr/>
           <p:nvPr/>
         </p:nvSpPr>
         <p:spPr>
           <a:xfrm>
             <a:off x="320040" y="4434840"/>
-            <a:ext cx="8502840" cy="346320"/>
+            <a:ext cx="8502480" cy="345960"/>
           </a:xfrm>
           <a:prstGeom prst="rect">
             <a:avLst/>
@@ -23351,14 +23353,14 @@
       </p:sp>
       <p:sp>
         <p:nvSpPr>
-          <p:cNvPr id="423" name="Text 9"/>
+          <p:cNvPr id="424" name="Text 9"/>
           <p:cNvSpPr/>
           <p:nvPr/>
         </p:nvSpPr>
         <p:spPr>
           <a:xfrm>
             <a:off x="411480" y="4434840"/>
-            <a:ext cx="8319960" cy="346320"/>
+            <a:ext cx="8319600" cy="345960"/>
           </a:xfrm>
           <a:prstGeom prst="rect">
             <a:avLst/>
@@ -23497,7 +23499,7 @@
         <p:spPr>
           <a:xfrm>
             <a:off x="2583000" y="1203120"/>
-            <a:ext cx="3976560" cy="2982600"/>
+            <a:ext cx="3976200" cy="2982240"/>
           </a:xfrm>
           <a:prstGeom prst="rect">
             <a:avLst/>
@@ -23520,8 +23522,8 @@
         </p:nvSpPr>
         <p:spPr>
           <a:xfrm>
-            <a:off x="457200" y="204480"/>
-            <a:ext cx="8228520" cy="859320"/>
+            <a:off x="457200" y="204120"/>
+            <a:ext cx="8228160" cy="859680"/>
           </a:xfrm>
           <a:prstGeom prst="rect">
             <a:avLst/>
@@ -23555,18 +23557,7 @@
                 <a:latin typeface="Arial"/>
                 <a:ea typeface="DejaVu Sans"/>
               </a:rPr>
-              <a:t>(brief) Bio...</a:t>
-            </a:r>
-            <a:r>
-              <a:rPr b="0" lang="en-US" sz="3200" strike="noStrike" u="none">
-                <a:solidFill>
-                  <a:srgbClr val="00ff78"/>
-                </a:solidFill>
-                <a:effectLst/>
-                <a:uFillTx/>
-                <a:latin typeface="Arial"/>
-              </a:rPr>
-              <a:t>scp...</a:t>
+              <a:t>(brief) Bio...scp...</a:t>
             </a:r>
             <a:endParaRPr b="0" lang="en-US" sz="3200" strike="noStrike" u="none">
               <a:solidFill>
@@ -23591,8 +23582,8 @@
         </p:nvSpPr>
         <p:spPr>
           <a:xfrm>
-            <a:off x="685800" y="914400"/>
-            <a:ext cx="7882200" cy="3427560"/>
+            <a:off x="2743200" y="1144080"/>
+            <a:ext cx="3429000" cy="2742120"/>
           </a:xfrm>
           <a:prstGeom prst="rect">
             <a:avLst/>
@@ -23617,7 +23608,7 @@
               </a:tabLst>
             </a:pPr>
             <a:r>
-              <a:rPr b="0" lang="en-US" sz="2200" strike="noStrike" u="none">
+              <a:rPr b="0" lang="en-US" sz="1600" strike="noStrike" u="none">
                 <a:solidFill>
                   <a:srgbClr val="00ff78"/>
                 </a:solidFill>
@@ -23628,10 +23619,10 @@
               <a:t>*MS ITACS 2019</a:t>
             </a:r>
             <a:br>
-              <a:rPr sz="2200"/>
+              <a:rPr sz="1600"/>
             </a:br>
             <a:r>
-              <a:rPr b="0" lang="en-US" sz="2200" strike="noStrike" u="none">
+              <a:rPr b="0" lang="en-US" sz="1400" strike="noStrike" u="none">
                 <a:solidFill>
                   <a:srgbClr val="00ff78"/>
                 </a:solidFill>
@@ -23641,7 +23632,7 @@
               </a:rPr>
               <a:t>https://www.linkedin.com/in/steve-pote/</a:t>
             </a:r>
-            <a:endParaRPr b="0" lang="en-US" sz="2200" strike="noStrike" u="none">
+            <a:endParaRPr b="0" lang="en-US" sz="1400" strike="noStrike" u="none">
               <a:solidFill>
                 <a:srgbClr val="ffffff"/>
               </a:solidFill>
@@ -23661,7 +23652,7 @@
               </a:tabLst>
             </a:pPr>
             <a:r>
-              <a:rPr b="0" lang="en-US" sz="2200" strike="noStrike" u="none">
+              <a:rPr b="0" lang="en-US" sz="1400" strike="noStrike" u="none">
                 <a:solidFill>
                   <a:srgbClr val="00ff78"/>
                 </a:solidFill>
@@ -23671,7 +23662,7 @@
               </a:rPr>
               <a:t>https://github.com/scp-localhost/itacs-ratdev-remix</a:t>
             </a:r>
-            <a:endParaRPr b="0" lang="en-US" sz="2200" strike="noStrike" u="none">
+            <a:endParaRPr b="0" lang="en-US" sz="1400" strike="noStrike" u="none">
               <a:solidFill>
                 <a:srgbClr val="ffffff"/>
               </a:solidFill>
@@ -23691,7 +23682,7 @@
               </a:tabLst>
             </a:pPr>
             <a:r>
-              <a:rPr b="0" lang="en-US" sz="2200" strike="noStrike" u="none">
+              <a:rPr b="0" lang="en-US" sz="1400" strike="noStrike" u="none">
                 <a:solidFill>
                   <a:srgbClr val="00ff78"/>
                 </a:solidFill>
@@ -23701,55 +23692,42 @@
               </a:rPr>
               <a:t>https://www.internationalsos.com/</a:t>
             </a:r>
-            <a:endParaRPr b="0" lang="en-US" sz="2200" strike="noStrike" u="none">
-              <a:solidFill>
-                <a:srgbClr val="ffffff"/>
-              </a:solidFill>
-              <a:effectLst/>
-              <a:uFillTx/>
-              <a:latin typeface="Arial"/>
-            </a:endParaRPr>
-          </a:p>
-          <a:p>
-            <a:pPr indent="0" algn="ctr">
-              <a:lnSpc>
-                <a:spcPct val="100000"/>
-              </a:lnSpc>
-              <a:buNone/>
-              <a:tabLst>
-                <a:tab algn="l" pos="0"/>
-              </a:tabLst>
-            </a:pPr>
-            <a:endParaRPr b="0" lang="en-US" sz="1350" strike="noStrike" u="none">
-              <a:solidFill>
-                <a:srgbClr val="ffffff"/>
-              </a:solidFill>
-              <a:effectLst/>
-              <a:uFillTx/>
-              <a:latin typeface="Arial"/>
-            </a:endParaRPr>
-          </a:p>
-          <a:p>
-            <a:pPr indent="0" algn="ctr">
-              <a:lnSpc>
-                <a:spcPct val="100000"/>
-              </a:lnSpc>
-              <a:buNone/>
-              <a:tabLst>
-                <a:tab algn="l" pos="0"/>
-              </a:tabLst>
-            </a:pPr>
-            <a:endParaRPr b="0" lang="en-US" sz="1350" strike="noStrike" u="none">
-              <a:solidFill>
-                <a:srgbClr val="ffffff"/>
-              </a:solidFill>
-              <a:effectLst/>
-              <a:uFillTx/>
-              <a:latin typeface="Arial"/>
-            </a:endParaRPr>
-          </a:p>
-        </p:txBody>
-      </p:sp>
+            <a:endParaRPr b="0" lang="en-US" sz="1400" strike="noStrike" u="none">
+              <a:solidFill>
+                <a:srgbClr val="ffffff"/>
+              </a:solidFill>
+              <a:effectLst/>
+              <a:uFillTx/>
+              <a:latin typeface="Arial"/>
+            </a:endParaRPr>
+          </a:p>
+        </p:txBody>
+      </p:sp>
+      <p:pic>
+        <p:nvPicPr>
+          <p:cNvPr id="22" name="" descr=""/>
+          <p:cNvPicPr/>
+          <p:nvPr/>
+        </p:nvPicPr>
+        <p:blipFill>
+          <a:blip r:embed="rId2"/>
+          <a:srcRect l="8176" t="10483" r="0" b="0"/>
+          <a:stretch/>
+        </p:blipFill>
+        <p:spPr>
+          <a:xfrm>
+            <a:off x="6580800" y="457200"/>
+            <a:ext cx="2286000" cy="2971800"/>
+          </a:xfrm>
+          <a:prstGeom prst="rect">
+            <a:avLst/>
+          </a:prstGeom>
+          <a:noFill/>
+          <a:ln w="0">
+            <a:noFill/>
+          </a:ln>
+        </p:spPr>
+      </p:pic>
     </p:spTree>
   </p:cSld>
   <mc:AlternateContent>
@@ -23789,14 +23767,14 @@
       </p:grpSpPr>
       <p:sp>
         <p:nvSpPr>
-          <p:cNvPr id="22" name="Shape 0"/>
+          <p:cNvPr id="23" name="Shape 0"/>
           <p:cNvSpPr/>
           <p:nvPr/>
         </p:nvSpPr>
         <p:spPr>
           <a:xfrm>
             <a:off x="0" y="0"/>
-            <a:ext cx="9142920" cy="291600"/>
+            <a:ext cx="9142560" cy="291240"/>
           </a:xfrm>
           <a:prstGeom prst="rect">
             <a:avLst/>
@@ -23841,14 +23819,14 @@
       </p:sp>
       <p:sp>
         <p:nvSpPr>
-          <p:cNvPr id="23" name="Text 1"/>
+          <p:cNvPr id="24" name="Text 1"/>
           <p:cNvSpPr/>
           <p:nvPr/>
         </p:nvSpPr>
         <p:spPr>
           <a:xfrm>
             <a:off x="164520" y="0"/>
-            <a:ext cx="8777160" cy="291600"/>
+            <a:ext cx="8776800" cy="291240"/>
           </a:xfrm>
           <a:prstGeom prst="rect">
             <a:avLst/>
@@ -23902,14 +23880,14 @@
       </p:sp>
       <p:sp>
         <p:nvSpPr>
-          <p:cNvPr id="24" name="Text 2"/>
+          <p:cNvPr id="25" name="Text 2"/>
           <p:cNvSpPr/>
           <p:nvPr/>
         </p:nvSpPr>
         <p:spPr>
           <a:xfrm>
             <a:off x="457200" y="749880"/>
-            <a:ext cx="8228520" cy="410400"/>
+            <a:ext cx="8228160" cy="410040"/>
           </a:xfrm>
           <a:prstGeom prst="rect">
             <a:avLst/>
@@ -23963,14 +23941,14 @@
       </p:sp>
       <p:sp>
         <p:nvSpPr>
-          <p:cNvPr id="25" name="Text 3"/>
+          <p:cNvPr id="26" name="Text 3"/>
           <p:cNvSpPr/>
           <p:nvPr/>
         </p:nvSpPr>
         <p:spPr>
           <a:xfrm>
             <a:off x="457200" y="1188720"/>
-            <a:ext cx="8228520" cy="410400"/>
+            <a:ext cx="8228160" cy="410040"/>
           </a:xfrm>
           <a:prstGeom prst="rect">
             <a:avLst/>
@@ -24024,14 +24002,14 @@
       </p:sp>
       <p:sp>
         <p:nvSpPr>
-          <p:cNvPr id="26" name="Text 4"/>
+          <p:cNvPr id="27" name="Text 4"/>
           <p:cNvSpPr/>
           <p:nvPr/>
         </p:nvSpPr>
         <p:spPr>
           <a:xfrm>
             <a:off x="457200" y="1627560"/>
-            <a:ext cx="8228520" cy="410400"/>
+            <a:ext cx="8228160" cy="410040"/>
           </a:xfrm>
           <a:prstGeom prst="rect">
             <a:avLst/>
@@ -24085,14 +24063,14 @@
       </p:sp>
       <p:sp>
         <p:nvSpPr>
-          <p:cNvPr id="27" name="Text 5"/>
+          <p:cNvPr id="28" name="Text 5"/>
           <p:cNvSpPr/>
           <p:nvPr/>
         </p:nvSpPr>
         <p:spPr>
           <a:xfrm>
             <a:off x="457200" y="2066400"/>
-            <a:ext cx="8228520" cy="410400"/>
+            <a:ext cx="8228160" cy="410040"/>
           </a:xfrm>
           <a:prstGeom prst="rect">
             <a:avLst/>
@@ -24146,14 +24124,14 @@
       </p:sp>
       <p:sp>
         <p:nvSpPr>
-          <p:cNvPr id="28" name="Text 6"/>
+          <p:cNvPr id="29" name="Text 6"/>
           <p:cNvSpPr/>
           <p:nvPr/>
         </p:nvSpPr>
         <p:spPr>
           <a:xfrm>
             <a:off x="457200" y="2944440"/>
-            <a:ext cx="8228520" cy="410400"/>
+            <a:ext cx="8228160" cy="410040"/>
           </a:xfrm>
           <a:prstGeom prst="rect">
             <a:avLst/>
@@ -24207,14 +24185,14 @@
       </p:sp>
       <p:sp>
         <p:nvSpPr>
-          <p:cNvPr id="29" name="Text 7"/>
+          <p:cNvPr id="30" name="Text 7"/>
           <p:cNvSpPr/>
           <p:nvPr/>
         </p:nvSpPr>
         <p:spPr>
           <a:xfrm>
             <a:off x="457200" y="3383280"/>
-            <a:ext cx="8228520" cy="410400"/>
+            <a:ext cx="8228160" cy="410040"/>
           </a:xfrm>
           <a:prstGeom prst="rect">
             <a:avLst/>
@@ -24268,14 +24246,14 @@
       </p:sp>
       <p:sp>
         <p:nvSpPr>
-          <p:cNvPr id="30" name="Text 8"/>
+          <p:cNvPr id="31" name="Text 8"/>
           <p:cNvSpPr/>
           <p:nvPr/>
         </p:nvSpPr>
         <p:spPr>
           <a:xfrm>
             <a:off x="457200" y="3822120"/>
-            <a:ext cx="8228520" cy="410400"/>
+            <a:ext cx="8228160" cy="410040"/>
           </a:xfrm>
           <a:prstGeom prst="rect">
             <a:avLst/>
@@ -24329,14 +24307,14 @@
       </p:sp>
       <p:sp>
         <p:nvSpPr>
-          <p:cNvPr id="31" name="Text 9"/>
+          <p:cNvPr id="32" name="Text 9"/>
           <p:cNvSpPr/>
           <p:nvPr/>
         </p:nvSpPr>
         <p:spPr>
           <a:xfrm>
             <a:off x="457200" y="4260960"/>
-            <a:ext cx="8228520" cy="410400"/>
+            <a:ext cx="8228160" cy="410040"/>
           </a:xfrm>
           <a:prstGeom prst="rect">
             <a:avLst/>
@@ -24390,14 +24368,14 @@
       </p:sp>
       <p:sp>
         <p:nvSpPr>
-          <p:cNvPr id="32" name="Text 10"/>
+          <p:cNvPr id="33" name="Text 10"/>
           <p:cNvSpPr/>
           <p:nvPr/>
         </p:nvSpPr>
         <p:spPr>
           <a:xfrm>
             <a:off x="320040" y="4572000"/>
-            <a:ext cx="8502840" cy="254880"/>
+            <a:ext cx="8502480" cy="254520"/>
           </a:xfrm>
           <a:prstGeom prst="rect">
             <a:avLst/>
@@ -24451,14 +24429,14 @@
       </p:sp>
       <p:sp>
         <p:nvSpPr>
-          <p:cNvPr id="33" name="Shape 11"/>
+          <p:cNvPr id="34" name="Shape 11"/>
           <p:cNvSpPr/>
           <p:nvPr/>
         </p:nvSpPr>
         <p:spPr>
           <a:xfrm>
             <a:off x="0" y="4864680"/>
-            <a:ext cx="9142920" cy="277920"/>
+            <a:ext cx="9142560" cy="277560"/>
           </a:xfrm>
           <a:prstGeom prst="rect">
             <a:avLst/>
@@ -24503,14 +24481,14 @@
       </p:sp>
       <p:sp>
         <p:nvSpPr>
-          <p:cNvPr id="34" name="Text 12"/>
+          <p:cNvPr id="35" name="Text 12"/>
           <p:cNvSpPr/>
           <p:nvPr/>
         </p:nvSpPr>
         <p:spPr>
           <a:xfrm>
             <a:off x="164520" y="4864680"/>
-            <a:ext cx="8777160" cy="277920"/>
+            <a:ext cx="8776800" cy="277560"/>
           </a:xfrm>
           <a:prstGeom prst="rect">
             <a:avLst/>
@@ -24601,14 +24579,14 @@
       </p:grpSpPr>
       <p:sp>
         <p:nvSpPr>
-          <p:cNvPr id="35" name="Shape 0"/>
+          <p:cNvPr id="36" name="Shape 0"/>
           <p:cNvSpPr/>
           <p:nvPr/>
         </p:nvSpPr>
         <p:spPr>
           <a:xfrm>
             <a:off x="0" y="0"/>
-            <a:ext cx="9142920" cy="291600"/>
+            <a:ext cx="9142560" cy="291240"/>
           </a:xfrm>
           <a:prstGeom prst="rect">
             <a:avLst/>
@@ -24653,14 +24631,14 @@
       </p:sp>
       <p:sp>
         <p:nvSpPr>
-          <p:cNvPr id="36" name="Text 1"/>
+          <p:cNvPr id="37" name="Text 1"/>
           <p:cNvSpPr/>
           <p:nvPr/>
         </p:nvSpPr>
         <p:spPr>
           <a:xfrm>
             <a:off x="164520" y="0"/>
-            <a:ext cx="8777160" cy="291600"/>
+            <a:ext cx="8776800" cy="291240"/>
           </a:xfrm>
           <a:prstGeom prst="rect">
             <a:avLst/>
@@ -24714,14 +24692,14 @@
       </p:sp>
       <p:sp>
         <p:nvSpPr>
-          <p:cNvPr id="37" name="Text 2"/>
+          <p:cNvPr id="38" name="Text 2"/>
           <p:cNvSpPr/>
           <p:nvPr/>
         </p:nvSpPr>
         <p:spPr>
           <a:xfrm>
             <a:off x="320040" y="502920"/>
-            <a:ext cx="8502840" cy="547560"/>
+            <a:ext cx="8502480" cy="547200"/>
           </a:xfrm>
           <a:prstGeom prst="rect">
             <a:avLst/>
@@ -24775,7 +24753,7 @@
       </p:sp>
       <p:sp>
         <p:nvSpPr>
-          <p:cNvPr id="38" name="Shape 3"/>
+          <p:cNvPr id="39" name="Shape 3"/>
           <p:cNvSpPr/>
           <p:nvPr/>
         </p:nvSpPr>
@@ -24819,14 +24797,14 @@
       </p:sp>
       <p:sp>
         <p:nvSpPr>
-          <p:cNvPr id="39" name="Shape 4"/>
+          <p:cNvPr id="40" name="Shape 4"/>
           <p:cNvSpPr/>
           <p:nvPr/>
         </p:nvSpPr>
         <p:spPr>
           <a:xfrm>
             <a:off x="320040" y="1261800"/>
-            <a:ext cx="8502840" cy="620640"/>
+            <a:ext cx="8502480" cy="620280"/>
           </a:xfrm>
           <a:prstGeom prst="rect">
             <a:avLst/>
@@ -24871,14 +24849,14 @@
       </p:sp>
       <p:sp>
         <p:nvSpPr>
-          <p:cNvPr id="40" name="Shape 5"/>
+          <p:cNvPr id="41" name="Shape 5"/>
           <p:cNvSpPr/>
           <p:nvPr/>
         </p:nvSpPr>
         <p:spPr>
           <a:xfrm>
             <a:off x="320040" y="1261800"/>
-            <a:ext cx="108720" cy="620640"/>
+            <a:ext cx="108360" cy="620280"/>
           </a:xfrm>
           <a:prstGeom prst="rect">
             <a:avLst/>
@@ -24923,14 +24901,14 @@
       </p:sp>
       <p:sp>
         <p:nvSpPr>
-          <p:cNvPr id="41" name="Text 6"/>
+          <p:cNvPr id="42" name="Text 6"/>
           <p:cNvSpPr/>
           <p:nvPr/>
         </p:nvSpPr>
         <p:spPr>
           <a:xfrm>
             <a:off x="521280" y="1261800"/>
-            <a:ext cx="8137080" cy="620640"/>
+            <a:ext cx="8136720" cy="620280"/>
           </a:xfrm>
           <a:prstGeom prst="rect">
             <a:avLst/>
@@ -24996,14 +24974,14 @@
       </p:sp>
       <p:sp>
         <p:nvSpPr>
-          <p:cNvPr id="42" name="Shape 7"/>
+          <p:cNvPr id="43" name="Shape 7"/>
           <p:cNvSpPr/>
           <p:nvPr/>
         </p:nvSpPr>
         <p:spPr>
           <a:xfrm>
             <a:off x="320040" y="2011680"/>
-            <a:ext cx="8502840" cy="620640"/>
+            <a:ext cx="8502480" cy="620280"/>
           </a:xfrm>
           <a:prstGeom prst="rect">
             <a:avLst/>
@@ -25048,14 +25026,14 @@
       </p:sp>
       <p:sp>
         <p:nvSpPr>
-          <p:cNvPr id="43" name="Shape 8"/>
+          <p:cNvPr id="44" name="Shape 8"/>
           <p:cNvSpPr/>
           <p:nvPr/>
         </p:nvSpPr>
         <p:spPr>
           <a:xfrm>
             <a:off x="320040" y="2011680"/>
-            <a:ext cx="108720" cy="620640"/>
+            <a:ext cx="108360" cy="620280"/>
           </a:xfrm>
           <a:prstGeom prst="rect">
             <a:avLst/>
@@ -25100,14 +25078,14 @@
       </p:sp>
       <p:sp>
         <p:nvSpPr>
-          <p:cNvPr id="44" name="Text 9"/>
+          <p:cNvPr id="45" name="Text 9"/>
           <p:cNvSpPr/>
           <p:nvPr/>
         </p:nvSpPr>
         <p:spPr>
           <a:xfrm>
             <a:off x="521280" y="2011680"/>
-            <a:ext cx="8137080" cy="620640"/>
+            <a:ext cx="8136720" cy="620280"/>
           </a:xfrm>
           <a:prstGeom prst="rect">
             <a:avLst/>
@@ -25173,14 +25151,14 @@
       </p:sp>
       <p:sp>
         <p:nvSpPr>
-          <p:cNvPr id="45" name="Shape 10"/>
+          <p:cNvPr id="46" name="Shape 10"/>
           <p:cNvSpPr/>
           <p:nvPr/>
         </p:nvSpPr>
         <p:spPr>
           <a:xfrm>
             <a:off x="320040" y="2761560"/>
-            <a:ext cx="8502840" cy="620640"/>
+            <a:ext cx="8502480" cy="620280"/>
           </a:xfrm>
           <a:prstGeom prst="rect">
             <a:avLst/>
@@ -25225,14 +25203,14 @@
       </p:sp>
       <p:sp>
         <p:nvSpPr>
-          <p:cNvPr id="46" name="Shape 11"/>
+          <p:cNvPr id="47" name="Shape 11"/>
           <p:cNvSpPr/>
           <p:nvPr/>
         </p:nvSpPr>
         <p:spPr>
           <a:xfrm>
             <a:off x="320040" y="2761560"/>
-            <a:ext cx="108720" cy="620640"/>
+            <a:ext cx="108360" cy="620280"/>
           </a:xfrm>
           <a:prstGeom prst="rect">
             <a:avLst/>
@@ -25277,14 +25255,14 @@
       </p:sp>
       <p:sp>
         <p:nvSpPr>
-          <p:cNvPr id="47" name="Text 12"/>
+          <p:cNvPr id="48" name="Text 12"/>
           <p:cNvSpPr/>
           <p:nvPr/>
         </p:nvSpPr>
         <p:spPr>
           <a:xfrm>
             <a:off x="521280" y="2761560"/>
-            <a:ext cx="8137080" cy="620640"/>
+            <a:ext cx="8136720" cy="620280"/>
           </a:xfrm>
           <a:prstGeom prst="rect">
             <a:avLst/>
@@ -25350,14 +25328,14 @@
       </p:sp>
       <p:sp>
         <p:nvSpPr>
-          <p:cNvPr id="48" name="Shape 13"/>
+          <p:cNvPr id="49" name="Shape 13"/>
           <p:cNvSpPr/>
           <p:nvPr/>
         </p:nvSpPr>
         <p:spPr>
           <a:xfrm>
             <a:off x="320040" y="3511440"/>
-            <a:ext cx="8502840" cy="620640"/>
+            <a:ext cx="8502480" cy="620280"/>
           </a:xfrm>
           <a:prstGeom prst="rect">
             <a:avLst/>
@@ -25402,14 +25380,14 @@
       </p:sp>
       <p:sp>
         <p:nvSpPr>
-          <p:cNvPr id="49" name="Shape 14"/>
+          <p:cNvPr id="50" name="Shape 14"/>
           <p:cNvSpPr/>
           <p:nvPr/>
         </p:nvSpPr>
         <p:spPr>
           <a:xfrm>
             <a:off x="320040" y="3511440"/>
-            <a:ext cx="108720" cy="620640"/>
+            <a:ext cx="108360" cy="620280"/>
           </a:xfrm>
           <a:prstGeom prst="rect">
             <a:avLst/>
@@ -25454,14 +25432,14 @@
       </p:sp>
       <p:sp>
         <p:nvSpPr>
-          <p:cNvPr id="50" name="Text 15"/>
+          <p:cNvPr id="51" name="Text 15"/>
           <p:cNvSpPr/>
           <p:nvPr/>
         </p:nvSpPr>
         <p:spPr>
           <a:xfrm>
             <a:off x="521280" y="3511440"/>
-            <a:ext cx="8137080" cy="620640"/>
+            <a:ext cx="8136720" cy="620280"/>
           </a:xfrm>
           <a:prstGeom prst="rect">
             <a:avLst/>
@@ -25527,14 +25505,14 @@
       </p:sp>
       <p:sp>
         <p:nvSpPr>
-          <p:cNvPr id="51" name="Shape 16"/>
+          <p:cNvPr id="52" name="Shape 16"/>
           <p:cNvSpPr/>
           <p:nvPr/>
         </p:nvSpPr>
         <p:spPr>
           <a:xfrm>
             <a:off x="0" y="4864680"/>
-            <a:ext cx="9142920" cy="277920"/>
+            <a:ext cx="9142560" cy="277560"/>
           </a:xfrm>
           <a:prstGeom prst="rect">
             <a:avLst/>
@@ -25579,14 +25557,14 @@
       </p:sp>
       <p:sp>
         <p:nvSpPr>
-          <p:cNvPr id="52" name="Text 17"/>
+          <p:cNvPr id="53" name="Text 17"/>
           <p:cNvSpPr/>
           <p:nvPr/>
         </p:nvSpPr>
         <p:spPr>
           <a:xfrm>
             <a:off x="164520" y="4864680"/>
-            <a:ext cx="8777160" cy="277920"/>
+            <a:ext cx="8776800" cy="277560"/>
           </a:xfrm>
           <a:prstGeom prst="rect">
             <a:avLst/>
@@ -25677,14 +25655,14 @@
       </p:grpSpPr>
       <p:sp>
         <p:nvSpPr>
-          <p:cNvPr id="53" name="Shape 0"/>
+          <p:cNvPr id="54" name="Shape 0"/>
           <p:cNvSpPr/>
           <p:nvPr/>
         </p:nvSpPr>
         <p:spPr>
           <a:xfrm>
             <a:off x="0" y="0"/>
-            <a:ext cx="9142920" cy="291600"/>
+            <a:ext cx="9142560" cy="291240"/>
           </a:xfrm>
           <a:prstGeom prst="rect">
             <a:avLst/>
@@ -25729,14 +25707,14 @@
       </p:sp>
       <p:sp>
         <p:nvSpPr>
-          <p:cNvPr id="54" name="Text 1"/>
+          <p:cNvPr id="55" name="Text 1"/>
           <p:cNvSpPr/>
           <p:nvPr/>
         </p:nvSpPr>
         <p:spPr>
           <a:xfrm>
             <a:off x="164520" y="0"/>
-            <a:ext cx="8777160" cy="291600"/>
+            <a:ext cx="8776800" cy="291240"/>
           </a:xfrm>
           <a:prstGeom prst="rect">
             <a:avLst/>
@@ -25790,14 +25768,14 @@
       </p:sp>
       <p:sp>
         <p:nvSpPr>
-          <p:cNvPr id="55" name="Text 2"/>
+          <p:cNvPr id="56" name="Text 2"/>
           <p:cNvSpPr/>
           <p:nvPr/>
         </p:nvSpPr>
         <p:spPr>
           <a:xfrm>
             <a:off x="320040" y="502920"/>
-            <a:ext cx="8502840" cy="547560"/>
+            <a:ext cx="8502480" cy="547200"/>
           </a:xfrm>
           <a:prstGeom prst="rect">
             <a:avLst/>
@@ -25851,7 +25829,7 @@
       </p:sp>
       <p:sp>
         <p:nvSpPr>
-          <p:cNvPr id="56" name="Shape 3"/>
+          <p:cNvPr id="57" name="Shape 3"/>
           <p:cNvSpPr/>
           <p:nvPr/>
         </p:nvSpPr>
@@ -25895,14 +25873,14 @@
       </p:sp>
       <p:sp>
         <p:nvSpPr>
-          <p:cNvPr id="57" name="Text 4"/>
+          <p:cNvPr id="58" name="Text 4"/>
           <p:cNvSpPr/>
           <p:nvPr/>
         </p:nvSpPr>
         <p:spPr>
           <a:xfrm>
             <a:off x="457200" y="1261800"/>
-            <a:ext cx="5485320" cy="529200"/>
+            <a:ext cx="5484960" cy="528840"/>
           </a:xfrm>
           <a:prstGeom prst="rect">
             <a:avLst/>
@@ -25956,14 +25934,14 @@
       </p:sp>
       <p:sp>
         <p:nvSpPr>
-          <p:cNvPr id="58" name="Text 5"/>
+          <p:cNvPr id="59" name="Text 5"/>
           <p:cNvSpPr/>
           <p:nvPr/>
         </p:nvSpPr>
         <p:spPr>
           <a:xfrm>
             <a:off x="457200" y="1920240"/>
-            <a:ext cx="5485320" cy="529200"/>
+            <a:ext cx="5484960" cy="528840"/>
           </a:xfrm>
           <a:prstGeom prst="rect">
             <a:avLst/>
@@ -26017,14 +25995,14 @@
       </p:sp>
       <p:sp>
         <p:nvSpPr>
-          <p:cNvPr id="59" name="Text 6"/>
+          <p:cNvPr id="60" name="Text 6"/>
           <p:cNvSpPr/>
           <p:nvPr/>
         </p:nvSpPr>
         <p:spPr>
           <a:xfrm>
             <a:off x="457200" y="2578680"/>
-            <a:ext cx="5485320" cy="529200"/>
+            <a:ext cx="5484960" cy="528840"/>
           </a:xfrm>
           <a:prstGeom prst="rect">
             <a:avLst/>
@@ -26078,14 +26056,14 @@
       </p:sp>
       <p:sp>
         <p:nvSpPr>
-          <p:cNvPr id="60" name="Text 7"/>
+          <p:cNvPr id="61" name="Text 7"/>
           <p:cNvSpPr/>
           <p:nvPr/>
         </p:nvSpPr>
         <p:spPr>
           <a:xfrm>
             <a:off x="457200" y="3237120"/>
-            <a:ext cx="5485320" cy="529200"/>
+            <a:ext cx="5484960" cy="528840"/>
           </a:xfrm>
           <a:prstGeom prst="rect">
             <a:avLst/>
@@ -26139,14 +26117,14 @@
       </p:sp>
       <p:sp>
         <p:nvSpPr>
-          <p:cNvPr id="61" name="Shape 8"/>
+          <p:cNvPr id="62" name="Shape 8"/>
           <p:cNvSpPr/>
           <p:nvPr/>
         </p:nvSpPr>
         <p:spPr>
           <a:xfrm>
             <a:off x="6217920" y="1170360"/>
-            <a:ext cx="2604960" cy="2650680"/>
+            <a:ext cx="2604600" cy="2650320"/>
           </a:xfrm>
           <a:prstGeom prst="rect">
             <a:avLst/>
@@ -26191,14 +26169,14 @@
       </p:sp>
       <p:sp>
         <p:nvSpPr>
-          <p:cNvPr id="62" name="Text 9"/>
+          <p:cNvPr id="63" name="Text 9"/>
           <p:cNvSpPr/>
           <p:nvPr/>
         </p:nvSpPr>
         <p:spPr>
           <a:xfrm>
             <a:off x="6263640" y="1234440"/>
-            <a:ext cx="2513520" cy="2513520"/>
+            <a:ext cx="2513160" cy="2513160"/>
           </a:xfrm>
           <a:prstGeom prst="rect">
             <a:avLst/>
@@ -26360,14 +26338,14 @@
       </p:sp>
       <p:sp>
         <p:nvSpPr>
-          <p:cNvPr id="63" name="Shape 10"/>
+          <p:cNvPr id="64" name="Shape 10"/>
           <p:cNvSpPr/>
           <p:nvPr/>
         </p:nvSpPr>
         <p:spPr>
           <a:xfrm>
             <a:off x="0" y="4864680"/>
-            <a:ext cx="9142920" cy="277920"/>
+            <a:ext cx="9142560" cy="277560"/>
           </a:xfrm>
           <a:prstGeom prst="rect">
             <a:avLst/>
@@ -26412,14 +26390,14 @@
       </p:sp>
       <p:sp>
         <p:nvSpPr>
-          <p:cNvPr id="64" name="Text 11"/>
+          <p:cNvPr id="65" name="Text 11"/>
           <p:cNvSpPr/>
           <p:nvPr/>
         </p:nvSpPr>
         <p:spPr>
           <a:xfrm>
             <a:off x="164520" y="4864680"/>
-            <a:ext cx="8777160" cy="277920"/>
+            <a:ext cx="8776800" cy="277560"/>
           </a:xfrm>
           <a:prstGeom prst="rect">
             <a:avLst/>
@@ -26510,14 +26488,14 @@
       </p:grpSpPr>
       <p:sp>
         <p:nvSpPr>
-          <p:cNvPr id="65" name="Shape 0"/>
+          <p:cNvPr id="66" name="Shape 0"/>
           <p:cNvSpPr/>
           <p:nvPr/>
         </p:nvSpPr>
         <p:spPr>
           <a:xfrm>
             <a:off x="0" y="0"/>
-            <a:ext cx="9142920" cy="291600"/>
+            <a:ext cx="9142560" cy="291240"/>
           </a:xfrm>
           <a:prstGeom prst="rect">
             <a:avLst/>
@@ -26562,14 +26540,14 @@
       </p:sp>
       <p:sp>
         <p:nvSpPr>
-          <p:cNvPr id="66" name="Text 1"/>
+          <p:cNvPr id="67" name="Text 1"/>
           <p:cNvSpPr/>
           <p:nvPr/>
         </p:nvSpPr>
         <p:spPr>
           <a:xfrm>
             <a:off x="164520" y="0"/>
-            <a:ext cx="8777160" cy="291600"/>
+            <a:ext cx="8776800" cy="291240"/>
           </a:xfrm>
           <a:prstGeom prst="rect">
             <a:avLst/>
@@ -26623,14 +26601,14 @@
       </p:sp>
       <p:sp>
         <p:nvSpPr>
-          <p:cNvPr id="67" name="Text 2"/>
+          <p:cNvPr id="68" name="Text 2"/>
           <p:cNvSpPr/>
           <p:nvPr/>
         </p:nvSpPr>
         <p:spPr>
           <a:xfrm>
             <a:off x="320040" y="502920"/>
-            <a:ext cx="8502840" cy="547560"/>
+            <a:ext cx="8502480" cy="547200"/>
           </a:xfrm>
           <a:prstGeom prst="rect">
             <a:avLst/>
@@ -26684,7 +26662,7 @@
       </p:sp>
       <p:sp>
         <p:nvSpPr>
-          <p:cNvPr id="68" name="Shape 3"/>
+          <p:cNvPr id="69" name="Shape 3"/>
           <p:cNvSpPr/>
           <p:nvPr/>
         </p:nvSpPr>
@@ -26728,14 +26706,14 @@
       </p:sp>
       <p:sp>
         <p:nvSpPr>
-          <p:cNvPr id="69" name="Shape 4"/>
+          <p:cNvPr id="70" name="Shape 4"/>
           <p:cNvSpPr/>
           <p:nvPr/>
         </p:nvSpPr>
         <p:spPr>
           <a:xfrm>
             <a:off x="320040" y="1261800"/>
-            <a:ext cx="4205160" cy="1141920"/>
+            <a:ext cx="4204800" cy="1141560"/>
           </a:xfrm>
           <a:prstGeom prst="rect">
             <a:avLst/>
@@ -26780,14 +26758,14 @@
       </p:sp>
       <p:sp>
         <p:nvSpPr>
-          <p:cNvPr id="70" name="Text 5"/>
+          <p:cNvPr id="71" name="Text 5"/>
           <p:cNvSpPr/>
           <p:nvPr/>
         </p:nvSpPr>
         <p:spPr>
           <a:xfrm>
             <a:off x="484560" y="1334880"/>
-            <a:ext cx="3839400" cy="364680"/>
+            <a:ext cx="3839040" cy="364320"/>
           </a:xfrm>
           <a:prstGeom prst="rect">
             <a:avLst/>
@@ -26841,14 +26819,14 @@
       </p:sp>
       <p:sp>
         <p:nvSpPr>
-          <p:cNvPr id="71" name="Text 6"/>
+          <p:cNvPr id="72" name="Text 6"/>
           <p:cNvSpPr/>
           <p:nvPr/>
         </p:nvSpPr>
         <p:spPr>
           <a:xfrm>
             <a:off x="484560" y="1737360"/>
-            <a:ext cx="3839400" cy="547560"/>
+            <a:ext cx="3839040" cy="547200"/>
           </a:xfrm>
           <a:prstGeom prst="rect">
             <a:avLst/>
@@ -26902,14 +26880,14 @@
       </p:sp>
       <p:sp>
         <p:nvSpPr>
-          <p:cNvPr id="72" name="Shape 7"/>
+          <p:cNvPr id="73" name="Shape 7"/>
           <p:cNvSpPr/>
           <p:nvPr/>
         </p:nvSpPr>
         <p:spPr>
           <a:xfrm>
             <a:off x="320040" y="2633400"/>
-            <a:ext cx="4205160" cy="1141920"/>
+            <a:ext cx="4204800" cy="1141560"/>
           </a:xfrm>
           <a:prstGeom prst="rect">
             <a:avLst/>
@@ -26954,14 +26932,14 @@
       </p:sp>
       <p:sp>
         <p:nvSpPr>
-          <p:cNvPr id="73" name="Text 8"/>
+          <p:cNvPr id="74" name="Text 8"/>
           <p:cNvSpPr/>
           <p:nvPr/>
         </p:nvSpPr>
         <p:spPr>
           <a:xfrm>
             <a:off x="484560" y="2706480"/>
-            <a:ext cx="3839400" cy="364680"/>
+            <a:ext cx="3839040" cy="364320"/>
           </a:xfrm>
           <a:prstGeom prst="rect">
             <a:avLst/>
@@ -27015,14 +26993,14 @@
       </p:sp>
       <p:sp>
         <p:nvSpPr>
-          <p:cNvPr id="74" name="Text 9"/>
+          <p:cNvPr id="75" name="Text 9"/>
           <p:cNvSpPr/>
           <p:nvPr/>
         </p:nvSpPr>
         <p:spPr>
           <a:xfrm>
             <a:off x="484560" y="3108960"/>
-            <a:ext cx="3839400" cy="547560"/>
+            <a:ext cx="3839040" cy="547200"/>
           </a:xfrm>
           <a:prstGeom prst="rect">
             <a:avLst/>
@@ -27076,14 +27054,14 @@
       </p:sp>
       <p:sp>
         <p:nvSpPr>
-          <p:cNvPr id="75" name="Shape 10"/>
+          <p:cNvPr id="76" name="Shape 10"/>
           <p:cNvSpPr/>
           <p:nvPr/>
         </p:nvSpPr>
         <p:spPr>
           <a:xfrm>
             <a:off x="4709160" y="1261800"/>
-            <a:ext cx="4205160" cy="1141920"/>
+            <a:ext cx="4204800" cy="1141560"/>
           </a:xfrm>
           <a:prstGeom prst="rect">
             <a:avLst/>
@@ -27128,14 +27106,14 @@
       </p:sp>
       <p:sp>
         <p:nvSpPr>
-          <p:cNvPr id="76" name="Text 11"/>
+          <p:cNvPr id="77" name="Text 11"/>
           <p:cNvSpPr/>
           <p:nvPr/>
         </p:nvSpPr>
         <p:spPr>
           <a:xfrm>
             <a:off x="4873680" y="1334880"/>
-            <a:ext cx="3839400" cy="364680"/>
+            <a:ext cx="3839040" cy="364320"/>
           </a:xfrm>
           <a:prstGeom prst="rect">
             <a:avLst/>
@@ -27189,14 +27167,14 @@
       </p:sp>
       <p:sp>
         <p:nvSpPr>
-          <p:cNvPr id="77" name="Text 12"/>
+          <p:cNvPr id="78" name="Text 12"/>
           <p:cNvSpPr/>
           <p:nvPr/>
         </p:nvSpPr>
         <p:spPr>
           <a:xfrm>
             <a:off x="4873680" y="1737360"/>
-            <a:ext cx="3839400" cy="547560"/>
+            <a:ext cx="3839040" cy="547200"/>
           </a:xfrm>
           <a:prstGeom prst="rect">
             <a:avLst/>
@@ -27250,14 +27228,14 @@
       </p:sp>
       <p:sp>
         <p:nvSpPr>
-          <p:cNvPr id="78" name="Shape 13"/>
+          <p:cNvPr id="79" name="Shape 13"/>
           <p:cNvSpPr/>
           <p:nvPr/>
         </p:nvSpPr>
         <p:spPr>
           <a:xfrm>
             <a:off x="4709160" y="2633400"/>
-            <a:ext cx="4205160" cy="1141920"/>
+            <a:ext cx="4204800" cy="1141560"/>
           </a:xfrm>
           <a:prstGeom prst="rect">
             <a:avLst/>
@@ -27302,14 +27280,14 @@
       </p:sp>
       <p:sp>
         <p:nvSpPr>
-          <p:cNvPr id="79" name="Text 14"/>
+          <p:cNvPr id="80" name="Text 14"/>
           <p:cNvSpPr/>
           <p:nvPr/>
         </p:nvSpPr>
         <p:spPr>
           <a:xfrm>
             <a:off x="4873680" y="2706480"/>
-            <a:ext cx="3839400" cy="364680"/>
+            <a:ext cx="3839040" cy="364320"/>
           </a:xfrm>
           <a:prstGeom prst="rect">
             <a:avLst/>
@@ -27363,14 +27341,14 @@
       </p:sp>
       <p:sp>
         <p:nvSpPr>
-          <p:cNvPr id="80" name="Text 15"/>
+          <p:cNvPr id="81" name="Text 15"/>
           <p:cNvSpPr/>
           <p:nvPr/>
         </p:nvSpPr>
         <p:spPr>
           <a:xfrm>
             <a:off x="4873680" y="3108960"/>
-            <a:ext cx="3839400" cy="547560"/>
+            <a:ext cx="3839040" cy="547200"/>
           </a:xfrm>
           <a:prstGeom prst="rect">
             <a:avLst/>
@@ -27424,14 +27402,14 @@
       </p:sp>
       <p:sp>
         <p:nvSpPr>
-          <p:cNvPr id="81" name="Shape 16"/>
+          <p:cNvPr id="82" name="Shape 16"/>
           <p:cNvSpPr/>
           <p:nvPr/>
         </p:nvSpPr>
         <p:spPr>
           <a:xfrm>
             <a:off x="320040" y="4434840"/>
-            <a:ext cx="8502840" cy="346320"/>
+            <a:ext cx="8502480" cy="345960"/>
           </a:xfrm>
           <a:prstGeom prst="rect">
             <a:avLst/>
@@ -27476,14 +27454,14 @@
       </p:sp>
       <p:sp>
         <p:nvSpPr>
-          <p:cNvPr id="82" name="Text 17"/>
+          <p:cNvPr id="83" name="Text 17"/>
           <p:cNvSpPr/>
           <p:nvPr/>
         </p:nvSpPr>
         <p:spPr>
           <a:xfrm>
             <a:off x="411480" y="4434840"/>
-            <a:ext cx="8319960" cy="346320"/>
+            <a:ext cx="8319600" cy="345960"/>
           </a:xfrm>
           <a:prstGeom prst="rect">
             <a:avLst/>
@@ -27549,14 +27527,14 @@
       </p:sp>
       <p:sp>
         <p:nvSpPr>
-          <p:cNvPr id="83" name="Shape 18"/>
+          <p:cNvPr id="84" name="Shape 18"/>
           <p:cNvSpPr/>
           <p:nvPr/>
         </p:nvSpPr>
         <p:spPr>
           <a:xfrm>
             <a:off x="0" y="4864680"/>
-            <a:ext cx="9142920" cy="277920"/>
+            <a:ext cx="9142560" cy="277560"/>
           </a:xfrm>
           <a:prstGeom prst="rect">
             <a:avLst/>
@@ -27601,14 +27579,14 @@
       </p:sp>
       <p:sp>
         <p:nvSpPr>
-          <p:cNvPr id="84" name="Text 19"/>
+          <p:cNvPr id="85" name="Text 19"/>
           <p:cNvSpPr/>
           <p:nvPr/>
         </p:nvSpPr>
         <p:spPr>
           <a:xfrm>
             <a:off x="164520" y="4864680"/>
-            <a:ext cx="8777160" cy="277920"/>
+            <a:ext cx="8776800" cy="277560"/>
           </a:xfrm>
           <a:prstGeom prst="rect">
             <a:avLst/>
@@ -27699,14 +27677,14 @@
       </p:grpSpPr>
       <p:sp>
         <p:nvSpPr>
-          <p:cNvPr id="85" name="Shape 0"/>
+          <p:cNvPr id="86" name="Shape 0"/>
           <p:cNvSpPr/>
           <p:nvPr/>
         </p:nvSpPr>
         <p:spPr>
           <a:xfrm>
             <a:off x="0" y="0"/>
-            <a:ext cx="9142920" cy="291600"/>
+            <a:ext cx="9142560" cy="291240"/>
           </a:xfrm>
           <a:prstGeom prst="rect">
             <a:avLst/>
@@ -27751,14 +27729,14 @@
       </p:sp>
       <p:sp>
         <p:nvSpPr>
-          <p:cNvPr id="86" name="Text 1"/>
+          <p:cNvPr id="87" name="Text 1"/>
           <p:cNvSpPr/>
           <p:nvPr/>
         </p:nvSpPr>
         <p:spPr>
           <a:xfrm>
             <a:off x="164520" y="0"/>
-            <a:ext cx="8777160" cy="291600"/>
+            <a:ext cx="8776800" cy="291240"/>
           </a:xfrm>
           <a:prstGeom prst="rect">
             <a:avLst/>
@@ -27812,14 +27790,14 @@
       </p:sp>
       <p:sp>
         <p:nvSpPr>
-          <p:cNvPr id="87" name="Text 2"/>
+          <p:cNvPr id="88" name="Text 2"/>
           <p:cNvSpPr/>
           <p:nvPr/>
         </p:nvSpPr>
         <p:spPr>
           <a:xfrm>
             <a:off x="320040" y="502920"/>
-            <a:ext cx="8502840" cy="547560"/>
+            <a:ext cx="8502480" cy="547200"/>
           </a:xfrm>
           <a:prstGeom prst="rect">
             <a:avLst/>
@@ -27873,7 +27851,7 @@
       </p:sp>
       <p:sp>
         <p:nvSpPr>
-          <p:cNvPr id="88" name="Shape 3"/>
+          <p:cNvPr id="89" name="Shape 3"/>
           <p:cNvSpPr/>
           <p:nvPr/>
         </p:nvSpPr>
@@ -27917,14 +27895,14 @@
       </p:sp>
       <p:sp>
         <p:nvSpPr>
-          <p:cNvPr id="89" name="Shape 4"/>
+          <p:cNvPr id="90" name="Shape 4"/>
           <p:cNvSpPr/>
           <p:nvPr/>
         </p:nvSpPr>
         <p:spPr>
           <a:xfrm>
             <a:off x="320040" y="1170360"/>
-            <a:ext cx="8502840" cy="346320"/>
+            <a:ext cx="8502480" cy="345960"/>
           </a:xfrm>
           <a:prstGeom prst="rect">
             <a:avLst/>
@@ -27969,14 +27947,14 @@
       </p:sp>
       <p:sp>
         <p:nvSpPr>
-          <p:cNvPr id="90" name="Text 5"/>
+          <p:cNvPr id="91" name="Text 5"/>
           <p:cNvSpPr/>
           <p:nvPr/>
         </p:nvSpPr>
         <p:spPr>
           <a:xfrm>
             <a:off x="457200" y="1170360"/>
-            <a:ext cx="8228520" cy="346320"/>
+            <a:ext cx="8228160" cy="345960"/>
           </a:xfrm>
           <a:prstGeom prst="rect">
             <a:avLst/>
@@ -28030,14 +28008,14 @@
       </p:sp>
       <p:sp>
         <p:nvSpPr>
-          <p:cNvPr id="91" name="Shape 6"/>
+          <p:cNvPr id="92" name="Shape 6"/>
           <p:cNvSpPr/>
           <p:nvPr/>
         </p:nvSpPr>
         <p:spPr>
           <a:xfrm>
             <a:off x="320040" y="1554480"/>
-            <a:ext cx="8502840" cy="529200"/>
+            <a:ext cx="8502480" cy="528840"/>
           </a:xfrm>
           <a:prstGeom prst="rect">
             <a:avLst/>
@@ -28082,14 +28060,14 @@
       </p:sp>
       <p:sp>
         <p:nvSpPr>
-          <p:cNvPr id="92" name="Text 7"/>
+          <p:cNvPr id="93" name="Text 7"/>
           <p:cNvSpPr/>
           <p:nvPr/>
         </p:nvSpPr>
         <p:spPr>
           <a:xfrm>
             <a:off x="457200" y="1554480"/>
-            <a:ext cx="1919160" cy="529200"/>
+            <a:ext cx="1918800" cy="528840"/>
           </a:xfrm>
           <a:prstGeom prst="rect">
             <a:avLst/>
@@ -28143,14 +28121,14 @@
       </p:sp>
       <p:sp>
         <p:nvSpPr>
-          <p:cNvPr id="93" name="Text 8"/>
+          <p:cNvPr id="94" name="Text 8"/>
           <p:cNvSpPr/>
           <p:nvPr/>
         </p:nvSpPr>
         <p:spPr>
           <a:xfrm>
             <a:off x="2377440" y="1554480"/>
-            <a:ext cx="1004760" cy="529200"/>
+            <a:ext cx="1004400" cy="528840"/>
           </a:xfrm>
           <a:prstGeom prst="rect">
             <a:avLst/>
@@ -28204,14 +28182,14 @@
       </p:sp>
       <p:sp>
         <p:nvSpPr>
-          <p:cNvPr id="94" name="Text 9"/>
+          <p:cNvPr id="95" name="Text 9"/>
           <p:cNvSpPr/>
           <p:nvPr/>
         </p:nvSpPr>
         <p:spPr>
           <a:xfrm>
             <a:off x="3383280" y="1554480"/>
-            <a:ext cx="5302440" cy="529200"/>
+            <a:ext cx="5302080" cy="528840"/>
           </a:xfrm>
           <a:prstGeom prst="rect">
             <a:avLst/>
@@ -28265,14 +28243,14 @@
       </p:sp>
       <p:sp>
         <p:nvSpPr>
-          <p:cNvPr id="95" name="Shape 10"/>
+          <p:cNvPr id="96" name="Shape 10"/>
           <p:cNvSpPr/>
           <p:nvPr/>
         </p:nvSpPr>
         <p:spPr>
           <a:xfrm>
             <a:off x="320040" y="2148840"/>
-            <a:ext cx="8502840" cy="529200"/>
+            <a:ext cx="8502480" cy="528840"/>
           </a:xfrm>
           <a:prstGeom prst="rect">
             <a:avLst/>
@@ -28317,14 +28295,14 @@
       </p:sp>
       <p:sp>
         <p:nvSpPr>
-          <p:cNvPr id="96" name="Text 11"/>
+          <p:cNvPr id="97" name="Text 11"/>
           <p:cNvSpPr/>
           <p:nvPr/>
         </p:nvSpPr>
         <p:spPr>
           <a:xfrm>
             <a:off x="457200" y="2148840"/>
-            <a:ext cx="1919160" cy="529200"/>
+            <a:ext cx="1918800" cy="528840"/>
           </a:xfrm>
           <a:prstGeom prst="rect">
             <a:avLst/>
@@ -28378,14 +28356,14 @@
       </p:sp>
       <p:sp>
         <p:nvSpPr>
-          <p:cNvPr id="97" name="Text 12"/>
+          <p:cNvPr id="98" name="Text 12"/>
           <p:cNvSpPr/>
           <p:nvPr/>
         </p:nvSpPr>
         <p:spPr>
           <a:xfrm>
             <a:off x="2377440" y="2148840"/>
-            <a:ext cx="1004760" cy="529200"/>
+            <a:ext cx="1004400" cy="528840"/>
           </a:xfrm>
           <a:prstGeom prst="rect">
             <a:avLst/>
@@ -28439,14 +28417,14 @@
       </p:sp>
       <p:sp>
         <p:nvSpPr>
-          <p:cNvPr id="98" name="Text 13"/>
+          <p:cNvPr id="99" name="Text 13"/>
           <p:cNvSpPr/>
           <p:nvPr/>
         </p:nvSpPr>
         <p:spPr>
           <a:xfrm>
             <a:off x="3383280" y="2148840"/>
-            <a:ext cx="5302440" cy="529200"/>
+            <a:ext cx="5302080" cy="528840"/>
           </a:xfrm>
           <a:prstGeom prst="rect">
             <a:avLst/>
@@ -28500,14 +28478,14 @@
       </p:sp>
       <p:sp>
         <p:nvSpPr>
-          <p:cNvPr id="99" name="Shape 14"/>
+          <p:cNvPr id="100" name="Shape 14"/>
           <p:cNvSpPr/>
           <p:nvPr/>
         </p:nvSpPr>
         <p:spPr>
           <a:xfrm>
             <a:off x="320040" y="2743200"/>
-            <a:ext cx="8502840" cy="529200"/>
+            <a:ext cx="8502480" cy="528840"/>
           </a:xfrm>
           <a:prstGeom prst="rect">
             <a:avLst/>
@@ -28552,14 +28530,14 @@
       </p:sp>
       <p:sp>
         <p:nvSpPr>
-          <p:cNvPr id="100" name="Text 15"/>
+          <p:cNvPr id="101" name="Text 15"/>
           <p:cNvSpPr/>
           <p:nvPr/>
         </p:nvSpPr>
         <p:spPr>
           <a:xfrm>
             <a:off x="457200" y="2743200"/>
-            <a:ext cx="1919160" cy="529200"/>
+            <a:ext cx="1918800" cy="528840"/>
           </a:xfrm>
           <a:prstGeom prst="rect">
             <a:avLst/>
@@ -28613,14 +28591,14 @@
       </p:sp>
       <p:sp>
         <p:nvSpPr>
-          <p:cNvPr id="101" name="Text 16"/>
+          <p:cNvPr id="102" name="Text 16"/>
           <p:cNvSpPr/>
           <p:nvPr/>
         </p:nvSpPr>
         <p:spPr>
           <a:xfrm>
             <a:off x="2377440" y="2743200"/>
-            <a:ext cx="1004760" cy="529200"/>
+            <a:ext cx="1004400" cy="528840"/>
           </a:xfrm>
           <a:prstGeom prst="rect">
             <a:avLst/>
@@ -28674,14 +28652,14 @@
       </p:sp>
       <p:sp>
         <p:nvSpPr>
-          <p:cNvPr id="102" name="Text 17"/>
+          <p:cNvPr id="103" name="Text 17"/>
           <p:cNvSpPr/>
           <p:nvPr/>
         </p:nvSpPr>
         <p:spPr>
           <a:xfrm>
             <a:off x="3383280" y="2743200"/>
-            <a:ext cx="5302440" cy="529200"/>
+            <a:ext cx="5302080" cy="528840"/>
           </a:xfrm>
           <a:prstGeom prst="rect">
             <a:avLst/>
@@ -28735,14 +28713,14 @@
       </p:sp>
       <p:sp>
         <p:nvSpPr>
-          <p:cNvPr id="103" name="Shape 18"/>
+          <p:cNvPr id="104" name="Shape 18"/>
           <p:cNvSpPr/>
           <p:nvPr/>
         </p:nvSpPr>
         <p:spPr>
           <a:xfrm>
             <a:off x="320040" y="3337560"/>
-            <a:ext cx="8502840" cy="529200"/>
+            <a:ext cx="8502480" cy="528840"/>
           </a:xfrm>
           <a:prstGeom prst="rect">
             <a:avLst/>
@@ -28787,14 +28765,14 @@
       </p:sp>
       <p:sp>
         <p:nvSpPr>
-          <p:cNvPr id="104" name="Text 19"/>
+          <p:cNvPr id="105" name="Text 19"/>
           <p:cNvSpPr/>
           <p:nvPr/>
         </p:nvSpPr>
         <p:spPr>
           <a:xfrm>
             <a:off x="457200" y="3337560"/>
-            <a:ext cx="1919160" cy="529200"/>
+            <a:ext cx="1918800" cy="528840"/>
           </a:xfrm>
           <a:prstGeom prst="rect">
             <a:avLst/>
@@ -28848,14 +28826,14 @@
       </p:sp>
       <p:sp>
         <p:nvSpPr>
-          <p:cNvPr id="105" name="Text 20"/>
+          <p:cNvPr id="106" name="Text 20"/>
           <p:cNvSpPr/>
           <p:nvPr/>
         </p:nvSpPr>
         <p:spPr>
           <a:xfrm>
             <a:off x="2377440" y="3337560"/>
-            <a:ext cx="1004760" cy="529200"/>
+            <a:ext cx="1004400" cy="528840"/>
           </a:xfrm>
           <a:prstGeom prst="rect">
             <a:avLst/>
@@ -28909,14 +28887,14 @@
       </p:sp>
       <p:sp>
         <p:nvSpPr>
-          <p:cNvPr id="106" name="Text 21"/>
+          <p:cNvPr id="107" name="Text 21"/>
           <p:cNvSpPr/>
           <p:nvPr/>
         </p:nvSpPr>
         <p:spPr>
           <a:xfrm>
             <a:off x="3383280" y="3337560"/>
-            <a:ext cx="5302440" cy="529200"/>
+            <a:ext cx="5302080" cy="528840"/>
           </a:xfrm>
           <a:prstGeom prst="rect">
             <a:avLst/>
@@ -28970,14 +28948,14 @@
       </p:sp>
       <p:sp>
         <p:nvSpPr>
-          <p:cNvPr id="107" name="Shape 22"/>
+          <p:cNvPr id="108" name="Shape 22"/>
           <p:cNvSpPr/>
           <p:nvPr/>
         </p:nvSpPr>
         <p:spPr>
           <a:xfrm>
             <a:off x="320040" y="3931920"/>
-            <a:ext cx="8502840" cy="529200"/>
+            <a:ext cx="8502480" cy="528840"/>
           </a:xfrm>
           <a:prstGeom prst="rect">
             <a:avLst/>
@@ -29022,14 +29000,14 @@
       </p:sp>
       <p:sp>
         <p:nvSpPr>
-          <p:cNvPr id="108" name="Text 23"/>
+          <p:cNvPr id="109" name="Text 23"/>
           <p:cNvSpPr/>
           <p:nvPr/>
         </p:nvSpPr>
         <p:spPr>
           <a:xfrm>
             <a:off x="457200" y="3931920"/>
-            <a:ext cx="1919160" cy="529200"/>
+            <a:ext cx="1918800" cy="528840"/>
           </a:xfrm>
           <a:prstGeom prst="rect">
             <a:avLst/>
@@ -29083,14 +29061,14 @@
       </p:sp>
       <p:sp>
         <p:nvSpPr>
-          <p:cNvPr id="109" name="Text 24"/>
+          <p:cNvPr id="110" name="Text 24"/>
           <p:cNvSpPr/>
           <p:nvPr/>
         </p:nvSpPr>
         <p:spPr>
           <a:xfrm>
             <a:off x="2377440" y="3931920"/>
-            <a:ext cx="1004760" cy="529200"/>
+            <a:ext cx="1004400" cy="528840"/>
           </a:xfrm>
           <a:prstGeom prst="rect">
             <a:avLst/>
@@ -29144,14 +29122,14 @@
       </p:sp>
       <p:sp>
         <p:nvSpPr>
-          <p:cNvPr id="110" name="Text 25"/>
+          <p:cNvPr id="111" name="Text 25"/>
           <p:cNvSpPr/>
           <p:nvPr/>
         </p:nvSpPr>
         <p:spPr>
           <a:xfrm>
             <a:off x="3383280" y="3931920"/>
-            <a:ext cx="5302440" cy="529200"/>
+            <a:ext cx="5302080" cy="528840"/>
           </a:xfrm>
           <a:prstGeom prst="rect">
             <a:avLst/>
@@ -29205,14 +29183,14 @@
       </p:sp>
       <p:sp>
         <p:nvSpPr>
-          <p:cNvPr id="111" name="Shape 26"/>
+          <p:cNvPr id="112" name="Shape 26"/>
           <p:cNvSpPr/>
           <p:nvPr/>
         </p:nvSpPr>
         <p:spPr>
           <a:xfrm>
             <a:off x="0" y="4864680"/>
-            <a:ext cx="9142920" cy="277920"/>
+            <a:ext cx="9142560" cy="277560"/>
           </a:xfrm>
           <a:prstGeom prst="rect">
             <a:avLst/>
@@ -29257,14 +29235,14 @@
       </p:sp>
       <p:sp>
         <p:nvSpPr>
-          <p:cNvPr id="112" name="Text 27"/>
+          <p:cNvPr id="113" name="Text 27"/>
           <p:cNvSpPr/>
           <p:nvPr/>
         </p:nvSpPr>
         <p:spPr>
           <a:xfrm>
             <a:off x="164520" y="4864680"/>
-            <a:ext cx="8777160" cy="277920"/>
+            <a:ext cx="8776800" cy="277560"/>
           </a:xfrm>
           <a:prstGeom prst="rect">
             <a:avLst/>
@@ -29355,14 +29333,14 @@
       </p:grpSpPr>
       <p:sp>
         <p:nvSpPr>
-          <p:cNvPr id="113" name="Shape 0"/>
+          <p:cNvPr id="114" name="Shape 0"/>
           <p:cNvSpPr/>
           <p:nvPr/>
         </p:nvSpPr>
         <p:spPr>
           <a:xfrm>
             <a:off x="0" y="0"/>
-            <a:ext cx="9142920" cy="291600"/>
+            <a:ext cx="9142560" cy="291240"/>
           </a:xfrm>
           <a:prstGeom prst="rect">
             <a:avLst/>
@@ -29407,14 +29385,14 @@
       </p:sp>
       <p:sp>
         <p:nvSpPr>
-          <p:cNvPr id="114" name="Text 1"/>
+          <p:cNvPr id="115" name="Text 1"/>
           <p:cNvSpPr/>
           <p:nvPr/>
         </p:nvSpPr>
         <p:spPr>
           <a:xfrm>
             <a:off x="164520" y="0"/>
-            <a:ext cx="8777160" cy="291600"/>
+            <a:ext cx="8776800" cy="291240"/>
           </a:xfrm>
           <a:prstGeom prst="rect">
             <a:avLst/>
@@ -29468,14 +29446,14 @@
       </p:sp>
       <p:sp>
         <p:nvSpPr>
-          <p:cNvPr id="115" name="Text 2"/>
+          <p:cNvPr id="116" name="Text 2"/>
           <p:cNvSpPr/>
           <p:nvPr/>
         </p:nvSpPr>
         <p:spPr>
           <a:xfrm>
             <a:off x="320040" y="502920"/>
-            <a:ext cx="8502840" cy="547560"/>
+            <a:ext cx="8502480" cy="547200"/>
           </a:xfrm>
           <a:prstGeom prst="rect">
             <a:avLst/>
@@ -29529,7 +29507,7 @@
       </p:sp>
       <p:sp>
         <p:nvSpPr>
-          <p:cNvPr id="116" name="Shape 3"/>
+          <p:cNvPr id="117" name="Shape 3"/>
           <p:cNvSpPr/>
           <p:nvPr/>
         </p:nvSpPr>
@@ -29573,14 +29551,14 @@
       </p:sp>
       <p:sp>
         <p:nvSpPr>
-          <p:cNvPr id="117" name="Shape 4"/>
+          <p:cNvPr id="118" name="Shape 4"/>
           <p:cNvSpPr/>
           <p:nvPr/>
         </p:nvSpPr>
         <p:spPr>
           <a:xfrm>
             <a:off x="320040" y="1417320"/>
-            <a:ext cx="1827720" cy="1004760"/>
+            <a:ext cx="1827360" cy="1004400"/>
           </a:xfrm>
           <a:prstGeom prst="rect">
             <a:avLst/>
@@ -29625,14 +29603,14 @@
       </p:sp>
       <p:sp>
         <p:nvSpPr>
-          <p:cNvPr id="118" name="Text 5"/>
+          <p:cNvPr id="119" name="Text 5"/>
           <p:cNvSpPr/>
           <p:nvPr/>
         </p:nvSpPr>
         <p:spPr>
           <a:xfrm>
             <a:off x="320040" y="1417320"/>
-            <a:ext cx="1827720" cy="1004760"/>
+            <a:ext cx="1827360" cy="1004400"/>
           </a:xfrm>
           <a:prstGeom prst="rect">
             <a:avLst/>
@@ -29686,14 +29664,14 @@
       </p:sp>
       <p:sp>
         <p:nvSpPr>
-          <p:cNvPr id="119" name="Text 6"/>
+          <p:cNvPr id="120" name="Text 6"/>
           <p:cNvSpPr/>
           <p:nvPr/>
         </p:nvSpPr>
         <p:spPr>
           <a:xfrm>
             <a:off x="2148840" y="1737360"/>
-            <a:ext cx="318960" cy="364680"/>
+            <a:ext cx="318600" cy="364320"/>
           </a:xfrm>
           <a:prstGeom prst="rect">
             <a:avLst/>
@@ -29747,14 +29725,14 @@
       </p:sp>
       <p:sp>
         <p:nvSpPr>
-          <p:cNvPr id="120" name="Shape 7"/>
+          <p:cNvPr id="121" name="Shape 7"/>
           <p:cNvSpPr/>
           <p:nvPr/>
         </p:nvSpPr>
         <p:spPr>
           <a:xfrm>
             <a:off x="2468880" y="1417320"/>
-            <a:ext cx="1827720" cy="1004760"/>
+            <a:ext cx="1827360" cy="1004400"/>
           </a:xfrm>
           <a:prstGeom prst="rect">
             <a:avLst/>
@@ -29799,14 +29777,14 @@
       </p:sp>
       <p:sp>
         <p:nvSpPr>
-          <p:cNvPr id="121" name="Text 8"/>
+          <p:cNvPr id="122" name="Text 8"/>
           <p:cNvSpPr/>
           <p:nvPr/>
         </p:nvSpPr>
         <p:spPr>
           <a:xfrm>
             <a:off x="2468880" y="1417320"/>
-            <a:ext cx="1827720" cy="1004760"/>
+            <a:ext cx="1827360" cy="1004400"/>
           </a:xfrm>
           <a:prstGeom prst="rect">
             <a:avLst/>
@@ -29860,14 +29838,14 @@
       </p:sp>
       <p:sp>
         <p:nvSpPr>
-          <p:cNvPr id="122" name="Text 9"/>
+          <p:cNvPr id="123" name="Text 9"/>
           <p:cNvSpPr/>
           <p:nvPr/>
         </p:nvSpPr>
         <p:spPr>
           <a:xfrm>
             <a:off x="4297680" y="1737360"/>
-            <a:ext cx="318960" cy="364680"/>
+            <a:ext cx="318600" cy="364320"/>
           </a:xfrm>
           <a:prstGeom prst="rect">
             <a:avLst/>
@@ -29921,14 +29899,14 @@
       </p:sp>
       <p:sp>
         <p:nvSpPr>
-          <p:cNvPr id="123" name="Shape 10"/>
+          <p:cNvPr id="124" name="Shape 10"/>
           <p:cNvSpPr/>
           <p:nvPr/>
         </p:nvSpPr>
         <p:spPr>
           <a:xfrm>
             <a:off x="4617720" y="1417320"/>
-            <a:ext cx="1827720" cy="1004760"/>
+            <a:ext cx="1827360" cy="1004400"/>
           </a:xfrm>
           <a:prstGeom prst="rect">
             <a:avLst/>
@@ -29973,14 +29951,14 @@
       </p:sp>
       <p:sp>
         <p:nvSpPr>
-          <p:cNvPr id="124" name="Text 11"/>
+          <p:cNvPr id="125" name="Text 11"/>
           <p:cNvSpPr/>
           <p:nvPr/>
         </p:nvSpPr>
         <p:spPr>
           <a:xfrm>
             <a:off x="4617720" y="1417320"/>
-            <a:ext cx="1827720" cy="1004760"/>
+            <a:ext cx="1827360" cy="1004400"/>
           </a:xfrm>
           <a:prstGeom prst="rect">
             <a:avLst/>
@@ -30034,14 +30012,14 @@
       </p:sp>
       <p:sp>
         <p:nvSpPr>
-          <p:cNvPr id="125" name="Text 12"/>
+          <p:cNvPr id="126" name="Text 12"/>
           <p:cNvSpPr/>
           <p:nvPr/>
         </p:nvSpPr>
         <p:spPr>
           <a:xfrm>
             <a:off x="6446520" y="1737360"/>
-            <a:ext cx="318960" cy="364680"/>
+            <a:ext cx="318600" cy="364320"/>
           </a:xfrm>
           <a:prstGeom prst="rect">
             <a:avLst/>
@@ -30095,14 +30073,14 @@
       </p:sp>
       <p:sp>
         <p:nvSpPr>
-          <p:cNvPr id="126" name="Shape 13"/>
+          <p:cNvPr id="127" name="Shape 13"/>
           <p:cNvSpPr/>
           <p:nvPr/>
         </p:nvSpPr>
         <p:spPr>
           <a:xfrm>
             <a:off x="6766560" y="1417320"/>
-            <a:ext cx="1827720" cy="1004760"/>
+            <a:ext cx="1827360" cy="1004400"/>
           </a:xfrm>
           <a:prstGeom prst="rect">
             <a:avLst/>
@@ -30147,14 +30125,14 @@
       </p:sp>
       <p:sp>
         <p:nvSpPr>
-          <p:cNvPr id="127" name="Text 14"/>
+          <p:cNvPr id="128" name="Text 14"/>
           <p:cNvSpPr/>
           <p:nvPr/>
         </p:nvSpPr>
         <p:spPr>
           <a:xfrm>
             <a:off x="6766560" y="1417320"/>
-            <a:ext cx="1827720" cy="1004760"/>
+            <a:ext cx="1827360" cy="1004400"/>
           </a:xfrm>
           <a:prstGeom prst="rect">
             <a:avLst/>
@@ -30208,14 +30186,14 @@
       </p:sp>
       <p:sp>
         <p:nvSpPr>
-          <p:cNvPr id="128" name="Text 15"/>
+          <p:cNvPr id="129" name="Text 15"/>
           <p:cNvSpPr/>
           <p:nvPr/>
         </p:nvSpPr>
         <p:spPr>
           <a:xfrm>
             <a:off x="320040" y="2633400"/>
-            <a:ext cx="8502840" cy="364680"/>
+            <a:ext cx="8502480" cy="364320"/>
           </a:xfrm>
           <a:prstGeom prst="rect">
             <a:avLst/>
@@ -30269,14 +30247,14 @@
       </p:sp>
       <p:sp>
         <p:nvSpPr>
-          <p:cNvPr id="129" name="Text 16"/>
+          <p:cNvPr id="130" name="Text 16"/>
           <p:cNvSpPr/>
           <p:nvPr/>
         </p:nvSpPr>
         <p:spPr>
           <a:xfrm>
             <a:off x="320040" y="2999160"/>
-            <a:ext cx="8502840" cy="364680"/>
+            <a:ext cx="8502480" cy="364320"/>
           </a:xfrm>
           <a:prstGeom prst="rect">
             <a:avLst/>
@@ -30330,14 +30308,14 @@
       </p:sp>
       <p:sp>
         <p:nvSpPr>
-          <p:cNvPr id="130" name="Text 17"/>
+          <p:cNvPr id="131" name="Text 17"/>
           <p:cNvSpPr/>
           <p:nvPr/>
         </p:nvSpPr>
         <p:spPr>
           <a:xfrm>
             <a:off x="320040" y="3364920"/>
-            <a:ext cx="8502840" cy="364680"/>
+            <a:ext cx="8502480" cy="364320"/>
           </a:xfrm>
           <a:prstGeom prst="rect">
             <a:avLst/>
@@ -30391,14 +30369,14 @@
       </p:sp>
       <p:sp>
         <p:nvSpPr>
-          <p:cNvPr id="131" name="Shape 18"/>
+          <p:cNvPr id="132" name="Shape 18"/>
           <p:cNvSpPr/>
           <p:nvPr/>
         </p:nvSpPr>
         <p:spPr>
           <a:xfrm>
             <a:off x="320040" y="4434840"/>
-            <a:ext cx="8502840" cy="346320"/>
+            <a:ext cx="8502480" cy="345960"/>
           </a:xfrm>
           <a:prstGeom prst="rect">
             <a:avLst/>
@@ -30443,14 +30421,14 @@
       </p:sp>
       <p:sp>
         <p:nvSpPr>
-          <p:cNvPr id="132" name="Text 19"/>
+          <p:cNvPr id="133" name="Text 19"/>
           <p:cNvSpPr/>
           <p:nvPr/>
         </p:nvSpPr>
         <p:spPr>
           <a:xfrm>
             <a:off x="411480" y="4434840"/>
-            <a:ext cx="8319960" cy="346320"/>
+            <a:ext cx="8319600" cy="345960"/>
           </a:xfrm>
           <a:prstGeom prst="rect">
             <a:avLst/>
@@ -30516,14 +30494,14 @@
       </p:sp>
       <p:sp>
         <p:nvSpPr>
-          <p:cNvPr id="133" name="Shape 20"/>
+          <p:cNvPr id="134" name="Shape 20"/>
           <p:cNvSpPr/>
           <p:nvPr/>
         </p:nvSpPr>
         <p:spPr>
           <a:xfrm>
             <a:off x="0" y="4864680"/>
-            <a:ext cx="9142920" cy="277920"/>
+            <a:ext cx="9142560" cy="277560"/>
           </a:xfrm>
           <a:prstGeom prst="rect">
             <a:avLst/>
@@ -30568,14 +30546,14 @@
       </p:sp>
       <p:sp>
         <p:nvSpPr>
-          <p:cNvPr id="134" name="Text 21"/>
+          <p:cNvPr id="135" name="Text 21"/>
           <p:cNvSpPr/>
           <p:nvPr/>
         </p:nvSpPr>
         <p:spPr>
           <a:xfrm>
             <a:off x="164520" y="4864680"/>
-            <a:ext cx="8777160" cy="277920"/>
+            <a:ext cx="8776800" cy="277560"/>
           </a:xfrm>
           <a:prstGeom prst="rect">
             <a:avLst/>

--- a/RatDev_OWASP_GRC.pptx
+++ b/RatDev_OWASP_GRC.pptx
@@ -391,7 +391,7 @@
             <a:pPr indent="0" algn="r">
               <a:buNone/>
             </a:pPr>
-            <a:fld id="{D1BDE319-C118-4CE8-A043-A7AA835C5FE3}" type="slidenum">
+            <a:fld id="{75DCBA5E-6451-4131-90F9-E5996884BA1C}" type="slidenum">
               <a:rPr b="0" lang="en-US" sz="1400" strike="noStrike" u="none">
                 <a:solidFill>
                   <a:srgbClr val="000000"/>
@@ -663,7 +663,7 @@
                 <a:tab algn="l" pos="0"/>
               </a:tabLst>
             </a:pPr>
-            <a:fld id="{B8679485-4608-4F06-B0A4-A4BE7A6DA5E6}" type="slidenum">
+            <a:fld id="{3CEBBFCB-EEEE-4D21-8779-C9BD42A6260D}" type="slidenum">
               <a:rPr b="0" lang="en-US" sz="1200" strike="noStrike" u="none">
                 <a:solidFill>
                   <a:schemeClr val="dk1"/>
@@ -830,7 +830,7 @@
                 <a:tab algn="l" pos="0"/>
               </a:tabLst>
             </a:pPr>
-            <a:fld id="{B5D0422E-FDDB-42B0-8B0A-5F6CC73C92CD}" type="slidenum">
+            <a:fld id="{CA7D687C-DD8A-4C97-8883-BC11DE4F029A}" type="slidenum">
               <a:rPr b="0" lang="en-US" sz="1200" strike="noStrike" u="none">
                 <a:solidFill>
                   <a:schemeClr val="dk1"/>
@@ -997,7 +997,7 @@
                 <a:tab algn="l" pos="0"/>
               </a:tabLst>
             </a:pPr>
-            <a:fld id="{80908378-0E20-4C87-8C30-A58649B147A0}" type="slidenum">
+            <a:fld id="{2894E72B-2E5C-4B9E-8C1E-0143DD7501D9}" type="slidenum">
               <a:rPr b="0" lang="en-US" sz="1200" strike="noStrike" u="none">
                 <a:solidFill>
                   <a:schemeClr val="dk1"/>
@@ -1164,7 +1164,7 @@
                 <a:tab algn="l" pos="0"/>
               </a:tabLst>
             </a:pPr>
-            <a:fld id="{13D8BB07-CA92-4419-AFFE-91AA229D3AB0}" type="slidenum">
+            <a:fld id="{B3DE4CCE-5EF7-477B-A2F5-B78184401781}" type="slidenum">
               <a:rPr b="0" lang="en-US" sz="1200" strike="noStrike" u="none">
                 <a:solidFill>
                   <a:schemeClr val="dk1"/>
@@ -1331,7 +1331,7 @@
                 <a:tab algn="l" pos="0"/>
               </a:tabLst>
             </a:pPr>
-            <a:fld id="{5FA3675C-D174-4E79-B53F-DA1C7A9EADEB}" type="slidenum">
+            <a:fld id="{5698B2CB-428A-4936-9E39-D718A32A5A25}" type="slidenum">
               <a:rPr b="0" lang="en-US" sz="1200" strike="noStrike" u="none">
                 <a:solidFill>
                   <a:schemeClr val="dk1"/>
@@ -1498,7 +1498,7 @@
                 <a:tab algn="l" pos="0"/>
               </a:tabLst>
             </a:pPr>
-            <a:fld id="{34E59ED7-1805-485C-91DF-3334807DA560}" type="slidenum">
+            <a:fld id="{B63E7070-4225-48A3-9DFA-744EB67A05E2}" type="slidenum">
               <a:rPr b="0" lang="en-US" sz="1200" strike="noStrike" u="none">
                 <a:solidFill>
                   <a:schemeClr val="dk1"/>
@@ -1665,7 +1665,7 @@
                 <a:tab algn="l" pos="0"/>
               </a:tabLst>
             </a:pPr>
-            <a:fld id="{55143D4B-2357-45DB-A8D9-32E1397EF3EB}" type="slidenum">
+            <a:fld id="{10A92A2F-31C9-4AFB-BA27-B91CA930808D}" type="slidenum">
               <a:rPr b="0" lang="en-US" sz="1200" strike="noStrike" u="none">
                 <a:solidFill>
                   <a:schemeClr val="dk1"/>
@@ -1832,7 +1832,7 @@
                 <a:tab algn="l" pos="0"/>
               </a:tabLst>
             </a:pPr>
-            <a:fld id="{4EEA7D35-A77E-4262-8290-5248DFAD0A53}" type="slidenum">
+            <a:fld id="{C7B0EADC-2710-42BE-B451-9264D08DC549}" type="slidenum">
               <a:rPr b="0" lang="en-US" sz="1200" strike="noStrike" u="none">
                 <a:solidFill>
                   <a:schemeClr val="dk1"/>
@@ -1999,7 +1999,7 @@
                 <a:tab algn="l" pos="0"/>
               </a:tabLst>
             </a:pPr>
-            <a:fld id="{E0EBC595-70B8-4687-9C4A-71F05541C0F8}" type="slidenum">
+            <a:fld id="{3CED6403-19AB-4D26-B3AB-D349DD4DE6A4}" type="slidenum">
               <a:rPr b="0" lang="en-US" sz="1200" strike="noStrike" u="none">
                 <a:solidFill>
                   <a:schemeClr val="dk1"/>
@@ -2271,7 +2271,7 @@
                 <a:tab algn="l" pos="0"/>
               </a:tabLst>
             </a:pPr>
-            <a:fld id="{4D6269A9-D485-46A9-8EDC-752246D632B1}" type="slidenum">
+            <a:fld id="{790EC21F-9FFC-43E2-BFD3-83C136ACD98C}" type="slidenum">
               <a:rPr b="0" lang="en-US" sz="1200" strike="noStrike" u="none">
                 <a:solidFill>
                   <a:schemeClr val="dk1"/>
@@ -2438,7 +2438,7 @@
                 <a:tab algn="l" pos="0"/>
               </a:tabLst>
             </a:pPr>
-            <a:fld id="{B1E1DC7E-5816-4942-9135-B68F7D18F879}" type="slidenum">
+            <a:fld id="{54F1DBB9-34BD-4A61-B2B2-79A81B1AD363}" type="slidenum">
               <a:rPr b="0" lang="en-US" sz="1200" strike="noStrike" u="none">
                 <a:solidFill>
                   <a:schemeClr val="dk1"/>
@@ -2605,7 +2605,7 @@
                 <a:tab algn="l" pos="0"/>
               </a:tabLst>
             </a:pPr>
-            <a:fld id="{A4C337C2-54E9-4E33-B3E3-6177965AA5E2}" type="slidenum">
+            <a:fld id="{E0F04C2B-CF89-4D1F-9C0F-32D031466CB9}" type="slidenum">
               <a:rPr b="0" lang="en-US" sz="1200" strike="noStrike" u="none">
                 <a:solidFill>
                   <a:schemeClr val="dk1"/>
@@ -2772,7 +2772,7 @@
                 <a:tab algn="l" pos="0"/>
               </a:tabLst>
             </a:pPr>
-            <a:fld id="{05992F9C-A127-4D64-92E4-25194E68056D}" type="slidenum">
+            <a:fld id="{A757A1FD-A80A-495B-B054-460CACFA1860}" type="slidenum">
               <a:rPr b="0" lang="en-US" sz="1200" strike="noStrike" u="none">
                 <a:solidFill>
                   <a:schemeClr val="dk1"/>
@@ -2939,7 +2939,7 @@
                 <a:tab algn="l" pos="0"/>
               </a:tabLst>
             </a:pPr>
-            <a:fld id="{549B045D-E62A-47D1-BF4B-48EE058D1B38}" type="slidenum">
+            <a:fld id="{81A67CFC-2B6F-4C89-A0BA-F77EB722BAB3}" type="slidenum">
               <a:rPr b="0" lang="en-US" sz="1200" strike="noStrike" u="none">
                 <a:solidFill>
                   <a:schemeClr val="dk1"/>
@@ -3106,7 +3106,7 @@
                 <a:tab algn="l" pos="0"/>
               </a:tabLst>
             </a:pPr>
-            <a:fld id="{33E75364-04AB-489D-9CF8-0346F7D88921}" type="slidenum">
+            <a:fld id="{0AE7F3E3-7694-4A48-BB03-01E2E91B1F32}" type="slidenum">
               <a:rPr b="0" lang="en-US" sz="1200" strike="noStrike" u="none">
                 <a:solidFill>
                   <a:schemeClr val="dk1"/>
@@ -3378,7 +3378,7 @@
                 <a:tab algn="l" pos="0"/>
               </a:tabLst>
             </a:pPr>
-            <a:fld id="{3D1C71A5-E766-44E3-8C20-CB4399A5DE9B}" type="slidenum">
+            <a:fld id="{A918989E-4B35-45C5-9588-5521CFC1766A}" type="slidenum">
               <a:rPr b="0" lang="en-US" sz="1200" strike="noStrike" u="none">
                 <a:solidFill>
                   <a:schemeClr val="dk1"/>
@@ -3545,7 +3545,7 @@
                 <a:tab algn="l" pos="0"/>
               </a:tabLst>
             </a:pPr>
-            <a:fld id="{CC7457A8-D29C-40D9-89DA-73BF5329AE65}" type="slidenum">
+            <a:fld id="{D8D8893D-40F3-4FE2-AD6C-FB8D77A42426}" type="slidenum">
               <a:rPr b="0" lang="en-US" sz="1200" strike="noStrike" u="none">
                 <a:solidFill>
                   <a:schemeClr val="dk1"/>
@@ -3712,7 +3712,7 @@
                 <a:tab algn="l" pos="0"/>
               </a:tabLst>
             </a:pPr>
-            <a:fld id="{183BADF3-26D8-4F3C-8E1A-0A2FB09E1634}" type="slidenum">
+            <a:fld id="{FB46C99A-40A6-4178-A2AF-3776182D4FC1}" type="slidenum">
               <a:rPr b="0" lang="en-US" sz="1200" strike="noStrike" u="none">
                 <a:solidFill>
                   <a:schemeClr val="dk1"/>
@@ -3879,7 +3879,7 @@
                 <a:tab algn="l" pos="0"/>
               </a:tabLst>
             </a:pPr>
-            <a:fld id="{30BAD2E3-4941-49A6-929F-5AA572AF5D86}" type="slidenum">
+            <a:fld id="{C4B15D50-6147-4D9C-AE1F-9AEBF2FB40D9}" type="slidenum">
               <a:rPr b="0" lang="en-US" sz="1200" strike="noStrike" u="none">
                 <a:solidFill>
                   <a:schemeClr val="dk1"/>
@@ -4046,7 +4046,7 @@
                 <a:tab algn="l" pos="0"/>
               </a:tabLst>
             </a:pPr>
-            <a:fld id="{5EEA8265-949D-4D13-B806-8918DE72CFBE}" type="slidenum">
+            <a:fld id="{1D5AA8BA-1765-4564-A4D1-FC400988DB38}" type="slidenum">
               <a:rPr b="0" lang="en-US" sz="1200" strike="noStrike" u="none">
                 <a:solidFill>
                   <a:schemeClr val="dk1"/>
@@ -4213,7 +4213,7 @@
                 <a:tab algn="l" pos="0"/>
               </a:tabLst>
             </a:pPr>
-            <a:fld id="{B8623237-2CA2-4AC7-9B17-1619B9D9943C}" type="slidenum">
+            <a:fld id="{702812C9-8494-4423-B832-2A528C72E8D3}" type="slidenum">
               <a:rPr b="0" lang="en-US" sz="1200" strike="noStrike" u="none">
                 <a:solidFill>
                   <a:schemeClr val="dk1"/>
@@ -5764,6 +5764,7 @@
                 <a:effectLst/>
                 <a:uFillTx/>
                 <a:latin typeface="Arial"/>
+                <a:ea typeface="DejaVu Sans"/>
               </a:rPr>
               <a:t>Please don’t wait until the end, there will be no time for questions...interrupt</a:t>
             </a:r>
@@ -5774,7 +5775,7 @@
               <a:rPr sz="3860"/>
             </a:br>
             <a:r>
-              <a:rPr b="1" lang="en-US" sz="1600" strike="noStrike" u="none">
+              <a:rPr b="0" lang="en-US" sz="1400" strike="noStrike" u="none">
                 <a:solidFill>
                   <a:srgbClr val="00ff78"/>
                 </a:solidFill>
@@ -5782,9 +5783,9 @@
                 <a:uFillTx/>
                 <a:latin typeface="Arial"/>
               </a:rPr>
-              <a:t>https://github.com/scp-localhost/owasp-ratdev-remix</a:t>
-            </a:r>
-            <a:endParaRPr b="0" lang="en-US" sz="1600" strike="noStrike" u="none">
+              <a:t>https://github.com/scp-localhost/itacs-ratdev-remix</a:t>
+            </a:r>
+            <a:endParaRPr b="0" lang="en-US" sz="1400" strike="noStrike" u="none">
               <a:solidFill>
                 <a:srgbClr val="ffffff"/>
               </a:solidFill>

--- a/RatDev_OWASP_GRC.pptx
+++ b/RatDev_OWASP_GRC.pptx
@@ -391,7 +391,7 @@
             <a:pPr indent="0" algn="r">
               <a:buNone/>
             </a:pPr>
-            <a:fld id="{75DCBA5E-6451-4131-90F9-E5996884BA1C}" type="slidenum">
+            <a:fld id="{7FE298E8-7020-4C70-8320-926AA4673519}" type="slidenum">
               <a:rPr b="0" lang="en-US" sz="1400" strike="noStrike" u="none">
                 <a:solidFill>
                   <a:srgbClr val="000000"/>
@@ -663,7 +663,7 @@
                 <a:tab algn="l" pos="0"/>
               </a:tabLst>
             </a:pPr>
-            <a:fld id="{3CEBBFCB-EEEE-4D21-8779-C9BD42A6260D}" type="slidenum">
+            <a:fld id="{81B7B67E-6930-4BB2-A32F-3C7B438F77B6}" type="slidenum">
               <a:rPr b="0" lang="en-US" sz="1200" strike="noStrike" u="none">
                 <a:solidFill>
                   <a:schemeClr val="dk1"/>
@@ -830,7 +830,7 @@
                 <a:tab algn="l" pos="0"/>
               </a:tabLst>
             </a:pPr>
-            <a:fld id="{CA7D687C-DD8A-4C97-8883-BC11DE4F029A}" type="slidenum">
+            <a:fld id="{FF867AE4-0E8C-4AAB-88FC-592B3AFA4C9C}" type="slidenum">
               <a:rPr b="0" lang="en-US" sz="1200" strike="noStrike" u="none">
                 <a:solidFill>
                   <a:schemeClr val="dk1"/>
@@ -997,7 +997,7 @@
                 <a:tab algn="l" pos="0"/>
               </a:tabLst>
             </a:pPr>
-            <a:fld id="{2894E72B-2E5C-4B9E-8C1E-0143DD7501D9}" type="slidenum">
+            <a:fld id="{739C901A-A4A2-4FBC-BCCF-2056B4B9266B}" type="slidenum">
               <a:rPr b="0" lang="en-US" sz="1200" strike="noStrike" u="none">
                 <a:solidFill>
                   <a:schemeClr val="dk1"/>
@@ -1164,7 +1164,7 @@
                 <a:tab algn="l" pos="0"/>
               </a:tabLst>
             </a:pPr>
-            <a:fld id="{B3DE4CCE-5EF7-477B-A2F5-B78184401781}" type="slidenum">
+            <a:fld id="{44735F80-44E9-4263-A6FA-D884E7D01D1A}" type="slidenum">
               <a:rPr b="0" lang="en-US" sz="1200" strike="noStrike" u="none">
                 <a:solidFill>
                   <a:schemeClr val="dk1"/>
@@ -1331,7 +1331,7 @@
                 <a:tab algn="l" pos="0"/>
               </a:tabLst>
             </a:pPr>
-            <a:fld id="{5698B2CB-428A-4936-9E39-D718A32A5A25}" type="slidenum">
+            <a:fld id="{8CBBB4B9-09FA-432C-98DB-8B883479939B}" type="slidenum">
               <a:rPr b="0" lang="en-US" sz="1200" strike="noStrike" u="none">
                 <a:solidFill>
                   <a:schemeClr val="dk1"/>
@@ -1498,7 +1498,7 @@
                 <a:tab algn="l" pos="0"/>
               </a:tabLst>
             </a:pPr>
-            <a:fld id="{B63E7070-4225-48A3-9DFA-744EB67A05E2}" type="slidenum">
+            <a:fld id="{D4E0B8BC-AE14-4B23-B77E-B1BDC99A4183}" type="slidenum">
               <a:rPr b="0" lang="en-US" sz="1200" strike="noStrike" u="none">
                 <a:solidFill>
                   <a:schemeClr val="dk1"/>
@@ -1665,7 +1665,7 @@
                 <a:tab algn="l" pos="0"/>
               </a:tabLst>
             </a:pPr>
-            <a:fld id="{10A92A2F-31C9-4AFB-BA27-B91CA930808D}" type="slidenum">
+            <a:fld id="{FAB4C287-9E1D-4027-88A3-C938EEEBD9CA}" type="slidenum">
               <a:rPr b="0" lang="en-US" sz="1200" strike="noStrike" u="none">
                 <a:solidFill>
                   <a:schemeClr val="dk1"/>
@@ -1832,7 +1832,7 @@
                 <a:tab algn="l" pos="0"/>
               </a:tabLst>
             </a:pPr>
-            <a:fld id="{C7B0EADC-2710-42BE-B451-9264D08DC549}" type="slidenum">
+            <a:fld id="{5BA6FE00-28EC-4F74-9C56-A77CAF27B2CA}" type="slidenum">
               <a:rPr b="0" lang="en-US" sz="1200" strike="noStrike" u="none">
                 <a:solidFill>
                   <a:schemeClr val="dk1"/>
@@ -1999,7 +1999,7 @@
                 <a:tab algn="l" pos="0"/>
               </a:tabLst>
             </a:pPr>
-            <a:fld id="{3CED6403-19AB-4D26-B3AB-D349DD4DE6A4}" type="slidenum">
+            <a:fld id="{9627B03F-ACD0-4B04-A479-122FC8B7FED2}" type="slidenum">
               <a:rPr b="0" lang="en-US" sz="1200" strike="noStrike" u="none">
                 <a:solidFill>
                   <a:schemeClr val="dk1"/>
@@ -2271,7 +2271,7 @@
                 <a:tab algn="l" pos="0"/>
               </a:tabLst>
             </a:pPr>
-            <a:fld id="{790EC21F-9FFC-43E2-BFD3-83C136ACD98C}" type="slidenum">
+            <a:fld id="{93D5D439-0EA7-44AB-930C-C8F2E4E12179}" type="slidenum">
               <a:rPr b="0" lang="en-US" sz="1200" strike="noStrike" u="none">
                 <a:solidFill>
                   <a:schemeClr val="dk1"/>
@@ -2438,7 +2438,7 @@
                 <a:tab algn="l" pos="0"/>
               </a:tabLst>
             </a:pPr>
-            <a:fld id="{54F1DBB9-34BD-4A61-B2B2-79A81B1AD363}" type="slidenum">
+            <a:fld id="{A4BA6186-C19B-4D16-87B7-77FDE2FB7E28}" type="slidenum">
               <a:rPr b="0" lang="en-US" sz="1200" strike="noStrike" u="none">
                 <a:solidFill>
                   <a:schemeClr val="dk1"/>
@@ -2605,7 +2605,7 @@
                 <a:tab algn="l" pos="0"/>
               </a:tabLst>
             </a:pPr>
-            <a:fld id="{E0F04C2B-CF89-4D1F-9C0F-32D031466CB9}" type="slidenum">
+            <a:fld id="{8A644A0C-F679-4010-BCAE-7A719168E101}" type="slidenum">
               <a:rPr b="0" lang="en-US" sz="1200" strike="noStrike" u="none">
                 <a:solidFill>
                   <a:schemeClr val="dk1"/>
@@ -2772,7 +2772,7 @@
                 <a:tab algn="l" pos="0"/>
               </a:tabLst>
             </a:pPr>
-            <a:fld id="{A757A1FD-A80A-495B-B054-460CACFA1860}" type="slidenum">
+            <a:fld id="{EEAE3FD6-E406-4C81-88DD-76BC702E6737}" type="slidenum">
               <a:rPr b="0" lang="en-US" sz="1200" strike="noStrike" u="none">
                 <a:solidFill>
                   <a:schemeClr val="dk1"/>
@@ -2939,7 +2939,7 @@
                 <a:tab algn="l" pos="0"/>
               </a:tabLst>
             </a:pPr>
-            <a:fld id="{81A67CFC-2B6F-4C89-A0BA-F77EB722BAB3}" type="slidenum">
+            <a:fld id="{89516FE6-C70D-4200-BCD2-1D26BA2EEFA4}" type="slidenum">
               <a:rPr b="0" lang="en-US" sz="1200" strike="noStrike" u="none">
                 <a:solidFill>
                   <a:schemeClr val="dk1"/>
@@ -3106,7 +3106,7 @@
                 <a:tab algn="l" pos="0"/>
               </a:tabLst>
             </a:pPr>
-            <a:fld id="{0AE7F3E3-7694-4A48-BB03-01E2E91B1F32}" type="slidenum">
+            <a:fld id="{6F359812-E9DA-4B9E-A061-7DFC89E7DECF}" type="slidenum">
               <a:rPr b="0" lang="en-US" sz="1200" strike="noStrike" u="none">
                 <a:solidFill>
                   <a:schemeClr val="dk1"/>
@@ -3378,7 +3378,7 @@
                 <a:tab algn="l" pos="0"/>
               </a:tabLst>
             </a:pPr>
-            <a:fld id="{A918989E-4B35-45C5-9588-5521CFC1766A}" type="slidenum">
+            <a:fld id="{F55BD9EA-D26C-4C7C-B725-A70C8D4D3D89}" type="slidenum">
               <a:rPr b="0" lang="en-US" sz="1200" strike="noStrike" u="none">
                 <a:solidFill>
                   <a:schemeClr val="dk1"/>
@@ -3545,7 +3545,7 @@
                 <a:tab algn="l" pos="0"/>
               </a:tabLst>
             </a:pPr>
-            <a:fld id="{D8D8893D-40F3-4FE2-AD6C-FB8D77A42426}" type="slidenum">
+            <a:fld id="{AA36A816-5EC1-415B-AD33-E4F7D62BEE44}" type="slidenum">
               <a:rPr b="0" lang="en-US" sz="1200" strike="noStrike" u="none">
                 <a:solidFill>
                   <a:schemeClr val="dk1"/>
@@ -3712,7 +3712,7 @@
                 <a:tab algn="l" pos="0"/>
               </a:tabLst>
             </a:pPr>
-            <a:fld id="{FB46C99A-40A6-4178-A2AF-3776182D4FC1}" type="slidenum">
+            <a:fld id="{5728515F-AC59-4134-A738-8738EA56276F}" type="slidenum">
               <a:rPr b="0" lang="en-US" sz="1200" strike="noStrike" u="none">
                 <a:solidFill>
                   <a:schemeClr val="dk1"/>
@@ -3879,7 +3879,7 @@
                 <a:tab algn="l" pos="0"/>
               </a:tabLst>
             </a:pPr>
-            <a:fld id="{C4B15D50-6147-4D9C-AE1F-9AEBF2FB40D9}" type="slidenum">
+            <a:fld id="{EDEA4610-798B-4ADF-8423-096073D11EC7}" type="slidenum">
               <a:rPr b="0" lang="en-US" sz="1200" strike="noStrike" u="none">
                 <a:solidFill>
                   <a:schemeClr val="dk1"/>
@@ -4046,7 +4046,7 @@
                 <a:tab algn="l" pos="0"/>
               </a:tabLst>
             </a:pPr>
-            <a:fld id="{1D5AA8BA-1765-4564-A4D1-FC400988DB38}" type="slidenum">
+            <a:fld id="{3113DD7D-E3C7-47DD-B168-D063DB17781C}" type="slidenum">
               <a:rPr b="0" lang="en-US" sz="1200" strike="noStrike" u="none">
                 <a:solidFill>
                   <a:schemeClr val="dk1"/>
@@ -4213,7 +4213,7 @@
                 <a:tab algn="l" pos="0"/>
               </a:tabLst>
             </a:pPr>
-            <a:fld id="{702812C9-8494-4423-B832-2A528C72E8D3}" type="slidenum">
+            <a:fld id="{4AFD3B92-A5E2-43E5-AAF2-DD16B6C56D55}" type="slidenum">
               <a:rPr b="0" lang="en-US" sz="1200" strike="noStrike" u="none">
                 <a:solidFill>
                   <a:schemeClr val="dk1"/>
